--- a/Fatima_awachi_EDA_Project_Presentation.pptx
+++ b/Fatima_awachi_EDA_Project_Presentation.pptx
@@ -4,9 +4,6 @@
   <p:sldMasterIdLst>
     <p:sldMasterId id="2147483648" r:id="rId1"/>
   </p:sldMasterIdLst>
-  <p:notesMasterIdLst>
-    <p:notesMasterId r:id="rId18"/>
-  </p:notesMasterIdLst>
   <p:sldIdLst>
     <p:sldId id="256" r:id="rId2"/>
     <p:sldId id="257" r:id="rId3"/>
@@ -23,8 +20,10 @@
     <p:sldId id="268" r:id="rId14"/>
     <p:sldId id="269" r:id="rId15"/>
     <p:sldId id="270" r:id="rId16"/>
-    <p:sldId id="272" r:id="rId17"/>
   </p:sldIdLst>
+  <p:notesMasterIdLst>
+    <p:notesMasterId r:id="rId17"/>
+  </p:notesMasterIdLst>
   <p:sldSz cx="12192000" cy="6858000"/>
   <p:notesSz cx="6858000" cy="12192000"/>
   <p:defaultTextStyle>
@@ -119,11 +118,6 @@
       </a:defRPr>
     </a:lvl9pPr>
   </p:defaultTextStyle>
-  <p:extLst>
-    <p:ext uri="{EFAFB233-063F-42B5-8137-9DF3F51BA10A}">
-      <p15:sldGuideLst xmlns:p15="http://schemas.microsoft.com/office/powerpoint/2012/main"/>
-    </p:ext>
-  </p:extLst>
 </p:presentation>
 </file>
 
@@ -149,10 +143,234 @@
           <a:chExt cx="0" cy="0"/>
         </a:xfrm>
       </p:grpSpPr>
+      <p:sp>
+        <p:nvSpPr>
+          <p:cNvPr id="2" name="Header Placeholder 1"/>
+          <p:cNvSpPr>
+            <a:spLocks noGrp="1"/>
+          </p:cNvSpPr>
+          <p:nvPr>
+            <p:ph type="hdr" sz="quarter"/>
+          </p:nvPr>
+        </p:nvSpPr>
+        <p:spPr>
+          <a:xfrm>
+            <a:off x="0" y="0"/>
+            <a:ext cx="2971800" cy="458788"/>
+          </a:xfrm>
+          <a:prstGeom prst="rect">
+            <a:avLst/>
+          </a:prstGeom>
+        </p:spPr>
+        <p:txBody>
+          <a:bodyPr vert="horz" lIns="91440" tIns="45720" rIns="91440" bIns="45720" rtlCol="0"/>
+          <a:lstStyle>
+            <a:lvl1pPr algn="l">
+              <a:defRPr sz="1200"/>
+            </a:lvl1pPr>
+          </a:lstStyle>
+          <a:p>
+            <a:endParaRPr lang="en-US"/>
+          </a:p>
+        </p:txBody>
+      </p:sp>
+      <p:sp>
+        <p:nvSpPr>
+          <p:cNvPr id="3" name="Date Placeholder 2"/>
+          <p:cNvSpPr>
+            <a:spLocks noGrp="1"/>
+          </p:cNvSpPr>
+          <p:nvPr>
+            <p:ph type="dt" idx="1"/>
+          </p:nvPr>
+        </p:nvSpPr>
+        <p:spPr>
+          <a:xfrm>
+            <a:off x="3884613" y="0"/>
+            <a:ext cx="2971800" cy="458788"/>
+          </a:xfrm>
+          <a:prstGeom prst="rect">
+            <a:avLst/>
+          </a:prstGeom>
+        </p:spPr>
+        <p:txBody>
+          <a:bodyPr vert="horz" lIns="91440" tIns="45720" rIns="91440" bIns="45720" rtlCol="0"/>
+          <a:lstStyle>
+            <a:lvl1pPr algn="r">
+              <a:defRPr sz="1200"/>
+            </a:lvl1pPr>
+          </a:lstStyle>
+          <a:p>
+            <a:fld id="{5282F153-3F37-0F45-9E97-73ACFA13230C}" type="datetimeFigureOut">
+              <a:rPr lang="en-US"/>
+              <a:t>7/23/19</a:t>
+            </a:fld>
+            <a:endParaRPr lang="en-US"/>
+          </a:p>
+        </p:txBody>
+      </p:sp>
+      <p:sp>
+        <p:nvSpPr>
+          <p:cNvPr id="4" name="Slide Image Placeholder 3"/>
+          <p:cNvSpPr>
+            <a:spLocks noGrp="1" noRot="1" noChangeAspect="1"/>
+          </p:cNvSpPr>
+          <p:nvPr>
+            <p:ph type="sldImg" idx="2"/>
+          </p:nvPr>
+        </p:nvSpPr>
+        <p:spPr>
+          <a:xfrm>
+            <a:off x="685800" y="1143000"/>
+            <a:ext cx="5486400" cy="3086100"/>
+          </a:xfrm>
+          <a:prstGeom prst="rect">
+            <a:avLst/>
+          </a:prstGeom>
+          <a:noFill/>
+          <a:ln w="12700">
+            <a:solidFill>
+              <a:prstClr val="black"/>
+            </a:solidFill>
+          </a:ln>
+        </p:spPr>
+        <p:txBody>
+          <a:bodyPr vert="horz" lIns="91440" tIns="45720" rIns="91440" bIns="45720" rtlCol="0" anchor="ctr"/>
+          <a:lstStyle/>
+          <a:p>
+            <a:endParaRPr lang="en-US"/>
+          </a:p>
+        </p:txBody>
+      </p:sp>
+      <p:sp>
+        <p:nvSpPr>
+          <p:cNvPr id="5" name="Notes Placeholder 4"/>
+          <p:cNvSpPr>
+            <a:spLocks noGrp="1"/>
+          </p:cNvSpPr>
+          <p:nvPr>
+            <p:ph type="body" sz="quarter" idx="3"/>
+          </p:nvPr>
+        </p:nvSpPr>
+        <p:spPr>
+          <a:xfrm>
+            <a:off x="685800" y="4400550"/>
+            <a:ext cx="5486400" cy="3600450"/>
+          </a:xfrm>
+          <a:prstGeom prst="rect">
+            <a:avLst/>
+          </a:prstGeom>
+        </p:spPr>
+        <p:txBody>
+          <a:bodyPr vert="horz" lIns="91440" tIns="45720" rIns="91440" bIns="45720" rtlCol="0"/>
+          <a:lstStyle/>
+          <a:p>
+            <a:pPr lvl="0"/>
+            <a:r>
+              <a:rPr lang="en-US"/>
+              <a:t>Click to edit Master text styles</a:t>
+            </a:r>
+          </a:p>
+          <a:p>
+            <a:pPr lvl="1"/>
+            <a:r>
+              <a:rPr lang="en-US"/>
+              <a:t>Second level</a:t>
+            </a:r>
+          </a:p>
+          <a:p>
+            <a:pPr lvl="2"/>
+            <a:r>
+              <a:rPr lang="en-US"/>
+              <a:t>Third level</a:t>
+            </a:r>
+          </a:p>
+          <a:p>
+            <a:pPr lvl="3"/>
+            <a:r>
+              <a:rPr lang="en-US"/>
+              <a:t>Fourth level</a:t>
+            </a:r>
+          </a:p>
+          <a:p>
+            <a:pPr lvl="4"/>
+            <a:r>
+              <a:rPr lang="en-US"/>
+              <a:t>Fifth level</a:t>
+            </a:r>
+          </a:p>
+        </p:txBody>
+      </p:sp>
+      <p:sp>
+        <p:nvSpPr>
+          <p:cNvPr id="6" name="Footer Placeholder 5"/>
+          <p:cNvSpPr>
+            <a:spLocks noGrp="1"/>
+          </p:cNvSpPr>
+          <p:nvPr>
+            <p:ph type="ftr" sz="quarter" idx="4"/>
+          </p:nvPr>
+        </p:nvSpPr>
+        <p:spPr>
+          <a:xfrm>
+            <a:off x="0" y="8685213"/>
+            <a:ext cx="2971800" cy="458787"/>
+          </a:xfrm>
+          <a:prstGeom prst="rect">
+            <a:avLst/>
+          </a:prstGeom>
+        </p:spPr>
+        <p:txBody>
+          <a:bodyPr vert="horz" lIns="91440" tIns="45720" rIns="91440" bIns="45720" rtlCol="0" anchor="b"/>
+          <a:lstStyle>
+            <a:lvl1pPr algn="l">
+              <a:defRPr sz="1200"/>
+            </a:lvl1pPr>
+          </a:lstStyle>
+          <a:p>
+            <a:endParaRPr lang="en-US"/>
+          </a:p>
+        </p:txBody>
+      </p:sp>
+      <p:sp>
+        <p:nvSpPr>
+          <p:cNvPr id="7" name="Slide Number Placeholder 6"/>
+          <p:cNvSpPr>
+            <a:spLocks noGrp="1"/>
+          </p:cNvSpPr>
+          <p:nvPr>
+            <p:ph type="sldNum" sz="quarter" idx="5"/>
+          </p:nvPr>
+        </p:nvSpPr>
+        <p:spPr>
+          <a:xfrm>
+            <a:off x="3884613" y="8685213"/>
+            <a:ext cx="2971800" cy="458787"/>
+          </a:xfrm>
+          <a:prstGeom prst="rect">
+            <a:avLst/>
+          </a:prstGeom>
+        </p:spPr>
+        <p:txBody>
+          <a:bodyPr vert="horz" lIns="91440" tIns="45720" rIns="91440" bIns="45720" rtlCol="0" anchor="b"/>
+          <a:lstStyle>
+            <a:lvl1pPr algn="r">
+              <a:defRPr sz="1200"/>
+            </a:lvl1pPr>
+          </a:lstStyle>
+          <a:p>
+            <a:fld id="{CE5E9CC1-C706-0F49-92D6-E571CC5EEA8F}" type="slidenum">
+              <a:rPr lang="en-US"/>
+              <a:t>‹#›</a:t>
+            </a:fld>
+            <a:endParaRPr lang="en-US"/>
+          </a:p>
+        </p:txBody>
+      </p:sp>
     </p:spTree>
     <p:extLst>
       <p:ext uri="{BB962C8B-B14F-4D97-AF65-F5344CB8AC3E}">
-        <p14:creationId xmlns:p14="http://schemas.microsoft.com/office/powerpoint/2010/main" val="3837990021"/>
+        <p14:creationId xmlns:p14="http://schemas.microsoft.com/office/powerpoint/2010/main" val="1024086991"/>
       </p:ext>
     </p:extLst>
   </p:cSld>
@@ -298,8 +516,9 @@
           <a:p>
             <a:r>
               <a:rPr lang="en-US" dirty="0"/>
-              <a:t>Good morning everyone. Today I'll be presenting my exploratory data analysis project on crime patterns in Los Angeles between 2020 and 2025. My name is Fatima Awachi, and this project was completed as part of the General Assembly Data Science Bootcamp.</a:t>
-            </a:r>
+              <a:t>Good morning everyone. Today I'll be presenting my exploratory data analysis project on crime patterns in Los Angeles between 2020 and 2024. My name is Fatima Awachi, and this project was completed as part of the General Assembly Data Science Bootcamp. The full project is available on my GitHub, linked here.</a:t>
+            </a:r>
+            <a:endParaRPr lang="en-US" dirty="0"/>
           </a:p>
         </p:txBody>
       </p:sp>
@@ -385,8 +604,9 @@
           <a:p>
             <a:r>
               <a:rPr lang="en-US" dirty="0"/>
-              <a:t>I also wanted to know when crimes happen most often during the day, so I grouped incidents into morning, afternoon, evening, and night.</a:t>
-            </a:r>
+              <a:t>I took this a step further and looked at seasons. Summer recorded the highest number of crime incidents, while winter recorded the lowest — crime is generally higher during the warmer months.</a:t>
+            </a:r>
+            <a:endParaRPr lang="en-US" dirty="0"/>
           </a:p>
         </p:txBody>
       </p:sp>
@@ -472,8 +692,9 @@
           <a:p>
             <a:r>
               <a:rPr lang="en-US" dirty="0"/>
-              <a:t>Most crimes were reported during the night, followed by the afternoon, while morning had the fewest incidents. This suggests law enforcement resources could be shifted toward nighttime hours.</a:t>
-            </a:r>
+              <a:t>Finally, since Central had the highest crime rate, I zoomed into that area specifically. Burglary from vehicle was the most common crime there, followed by battery simple assault and vehicle theft — vehicle-related crime clearly dominates in Central.</a:t>
+            </a:r>
+            <a:endParaRPr lang="en-US" dirty="0"/>
           </a:p>
         </p:txBody>
       </p:sp>
@@ -559,8 +780,9 @@
           <a:p>
             <a:r>
               <a:rPr lang="en-US" dirty="0"/>
-              <a:t>Finally, since Central had the highest crime rate, I dug deeper into that area specifically to see which crime types were most common there.</a:t>
-            </a:r>
+              <a:t>To summarize: I analyzed over one million crime incidents. Vehicle theft was the most common crime overall, Central had the highest crime rate, crime peaked in 2022, most incidents happened at night and during summer, and vehicle-related crime was especially common in Central.</a:t>
+            </a:r>
+            <a:endParaRPr lang="en-US" dirty="0"/>
           </a:p>
         </p:txBody>
       </p:sp>
@@ -646,8 +868,9 @@
           <a:p>
             <a:r>
               <a:rPr lang="en-US" dirty="0"/>
-              <a:t>Burglary from vehicle was the most common crime in Central, and overall, vehicle-related and theft-related crimes dominated the list in this area.</a:t>
-            </a:r>
+              <a:t>Based on these findings, I recommend increasing police patrols in high-crime areas like Central, improving vehicle theft prevention through public awareness, increasing nighttime police presence, and continuing to monitor crime trends. It's worth noting that similar strategies are already used successfully in many major U.S. cities, which supports how practical these recommendations are.</a:t>
+            </a:r>
+            <a:endParaRPr lang="en-US" dirty="0"/>
           </a:p>
         </p:txBody>
       </p:sp>
@@ -733,8 +956,9 @@
           <a:p>
             <a:r>
               <a:rPr lang="en-US" dirty="0"/>
-              <a:t>To summarize: I analyzed over one million crime incidents. Vehicle theft was the most common crime overall, Central had the highest crime rate, crime peaked in 2022, most incidents happened at night, and vehicle-related crime was especially common in Central.</a:t>
-            </a:r>
+              <a:t>Looking ahead, next steps include building a live Streamlit dashboard, bringing in full 2025 data once it's available, adding demographic detail, and digging into what's driving that summer spike in crime.</a:t>
+            </a:r>
+            <a:endParaRPr lang="en-US" dirty="0"/>
           </a:p>
         </p:txBody>
       </p:sp>
@@ -820,8 +1044,9 @@
           <a:p>
             <a:r>
               <a:rPr lang="en-US" dirty="0"/>
-              <a:t>Based on these findings, I have four recommendations: increase police patrols in Central, improve vehicle theft prevention programs, increase police presence during nighttime hours, and continue monitoring yearly crime trends going forward.</a:t>
-            </a:r>
+              <a:t>In conclusion, this project showed how exploratory data analysis can uncover meaningful crime patterns and support better public safety planning in Los Angeles. Data-driven decisions like these can help allocate resources more effectively. Thank you — and feel free to check out the full project on my GitHub.</a:t>
+            </a:r>
+            <a:endParaRPr lang="en-US" dirty="0"/>
           </a:p>
         </p:txBody>
       </p:sp>
@@ -843,93 +1068,6 @@
             <a:fld id="{F7021451-1387-4CA6-816F-3879F97B5CBC}" type="slidenum">
               <a:rPr lang="en-US"/>
               <a:t>15</a:t>
-            </a:fld>
-            <a:endParaRPr lang="en-US"/>
-          </a:p>
-        </p:txBody>
-      </p:sp>
-    </p:spTree>
-    <p:extLst>
-      <p:ext uri="{BB962C8B-B14F-4D97-AF65-F5344CB8AC3E}">
-        <p14:creationId xmlns:p14="http://schemas.microsoft.com/office/powerpoint/2010/main" val="1024086991"/>
-      </p:ext>
-    </p:extLst>
-  </p:cSld>
-  <p:clrMapOvr>
-    <a:masterClrMapping/>
-  </p:clrMapOvr>
-</p:notes>
-</file>
-
-<file path=ppt/notesSlides/notesSlide16.xml><?xml version="1.0" encoding="utf-8"?>
-<p:notes xmlns:a="http://schemas.openxmlformats.org/drawingml/2006/main" xmlns:r="http://schemas.openxmlformats.org/officeDocument/2006/relationships" xmlns:p="http://schemas.openxmlformats.org/presentationml/2006/main">
-  <p:cSld>
-    <p:spTree>
-      <p:nvGrpSpPr>
-        <p:cNvPr id="1" name=""/>
-        <p:cNvGrpSpPr/>
-        <p:nvPr/>
-      </p:nvGrpSpPr>
-      <p:grpSpPr>
-        <a:xfrm>
-          <a:off x="0" y="0"/>
-          <a:ext cx="0" cy="0"/>
-          <a:chOff x="0" y="0"/>
-          <a:chExt cx="0" cy="0"/>
-        </a:xfrm>
-      </p:grpSpPr>
-      <p:sp>
-        <p:nvSpPr>
-          <p:cNvPr id="2" name="Slide Image Placeholder 1"/>
-          <p:cNvSpPr>
-            <a:spLocks noGrp="1" noRot="1" noChangeAspect="1"/>
-          </p:cNvSpPr>
-          <p:nvPr>
-            <p:ph type="sldImg"/>
-          </p:nvPr>
-        </p:nvSpPr>
-        <p:spPr/>
-      </p:sp>
-      <p:sp>
-        <p:nvSpPr>
-          <p:cNvPr id="3" name="Notes Placeholder 2"/>
-          <p:cNvSpPr>
-            <a:spLocks noGrp="1"/>
-          </p:cNvSpPr>
-          <p:nvPr>
-            <p:ph type="body" idx="1"/>
-          </p:nvPr>
-        </p:nvSpPr>
-        <p:spPr/>
-        <p:txBody>
-          <a:bodyPr/>
-          <a:lstStyle/>
-          <a:p>
-            <a:r>
-              <a:rPr lang="en-US" dirty="0"/>
-              <a:t>In conclusion, this project showed how exploratory data analysis can uncover meaningful crime patterns and support better public safety planning. Data-driven decisions like these can help allocate resources more effectively and improve crime prevention across Los Angeles. Thank you!</a:t>
-            </a:r>
-          </a:p>
-        </p:txBody>
-      </p:sp>
-      <p:sp>
-        <p:nvSpPr>
-          <p:cNvPr id="4" name="Slide Number Placeholder 3"/>
-          <p:cNvSpPr>
-            <a:spLocks noGrp="1"/>
-          </p:cNvSpPr>
-          <p:nvPr>
-            <p:ph type="sldNum" sz="quarter" idx="10"/>
-          </p:nvPr>
-        </p:nvSpPr>
-        <p:spPr/>
-        <p:txBody>
-          <a:bodyPr/>
-          <a:lstStyle/>
-          <a:p>
-            <a:fld id="{F7021451-1387-4CA6-816F-3879F97B5CBC}" type="slidenum">
-              <a:rPr lang="en-US"/>
-              <a:t>16</a:t>
             </a:fld>
             <a:endParaRPr lang="en-US"/>
           </a:p>
@@ -994,8 +1132,9 @@
           <a:p>
             <a:r>
               <a:rPr lang="en-US" dirty="0"/>
-              <a:t>Crime affects public safety and community decision-making every day. In this project I looked at LAPD crime reports from 2020 to 2025, with over a million incidents across 21 areas, and it was hard to know which areas, times, and crime types needed the most attention. My objectives were to find the most common crime types, the highest-crime areas, yearly trends, peak times of day, and the top crimes within the highest-crime area.</a:t>
-            </a:r>
+              <a:t>Crime affects public safety and community decision-making every day. This project analyzes LAPD crime incidents from 2020 to 2024, using the date, time, area, and type of each reported crime, with the goal of finding patterns that support better public safety decisions.</a:t>
+            </a:r>
+            <a:endParaRPr lang="en-US" dirty="0"/>
           </a:p>
         </p:txBody>
       </p:sp>
@@ -1081,8 +1220,9 @@
           <a:p>
             <a:r>
               <a:rPr lang="en-US" dirty="0"/>
-              <a:t>Here's a quick look at the dataset. It contains just over one million crime records with ten variables, covering Los Angeles from 2020 through 2025. Importantly, there were no missing values and no duplicate records, so the data was clean and ready to analyze.</a:t>
-            </a:r>
+              <a:t>Here's the problem: over one million crime incidents were reported across Los Angeles in this period. With that much data, it's hard to know which crime types, areas, and time periods need the most attention — and without that clarity, public safety planning and resource allocation become much harder. That's where exploratory data analysis comes in.</a:t>
+            </a:r>
+            <a:endParaRPr lang="en-US" dirty="0"/>
           </a:p>
         </p:txBody>
       </p:sp>
@@ -1168,8 +1308,9 @@
           <a:p>
             <a:r>
               <a:rPr lang="en-US" dirty="0"/>
-              <a:t>This chart shows the top ten reported crime types in Los Angeles. Vehicle theft clearly stands out at the top of the list, followed by battery simple assault and burglary from vehicle.</a:t>
-            </a:r>
+              <a:t>To tackle this, I framed five guiding questions: what are the most common crime types, which areas have the most crime, how have incidents changed over time, when do crimes happen most, and what crimes are most common in the highest-crime area.</a:t>
+            </a:r>
+            <a:endParaRPr lang="en-US" dirty="0"/>
           </a:p>
         </p:txBody>
       </p:sp>
@@ -1255,8 +1396,9 @@
           <a:p>
             <a:r>
               <a:rPr lang="en-US" dirty="0"/>
-              <a:t>So the key finding here: Vehicle Theft was the most frequently reported crime, followed by Battery Simple Assault and Burglary from Vehicle. This tells us vehicle-related crime is a major issue across the city.</a:t>
-            </a:r>
+              <a:t>Here's a quick look at the dataset. It contains just over one million crime records with ten variables, covering Los Angeles from 2020 through 2024. There were no missing values and no duplicate records, so the data was clean and ready to analyze.</a:t>
+            </a:r>
+            <a:endParaRPr lang="en-US" dirty="0"/>
           </a:p>
         </p:txBody>
       </p:sp>
@@ -1342,8 +1484,9 @@
           <a:p>
             <a:r>
               <a:rPr lang="en-US" dirty="0"/>
-              <a:t>Next, I looked at which areas recorded the most crime. This chart ranks the top ten areas by number of reported incidents.</a:t>
-            </a:r>
+              <a:t>This chart shows the top ten reported crime types. Vehicle theft clearly stands out at the top with about 115.5 thousand incidents, followed by battery simple assault and burglary from vehicle.</a:t>
+            </a:r>
+            <a:endParaRPr lang="en-US" dirty="0"/>
           </a:p>
         </p:txBody>
       </p:sp>
@@ -1429,8 +1572,9 @@
           <a:p>
             <a:r>
               <a:rPr lang="en-US" dirty="0"/>
-              <a:t>Central recorded the highest number of crime incidents, followed by 77th Street and Pacific. These three areas clearly need more attention than the rest.</a:t>
-            </a:r>
+              <a:t>Next, here are the areas with the most reported crime. Central recorded the highest number of incidents, followed by 77th Street and Pacific.</a:t>
+            </a:r>
+            <a:endParaRPr lang="en-US" dirty="0"/>
           </a:p>
         </p:txBody>
       </p:sp>
@@ -1516,8 +1660,9 @@
           <a:p>
             <a:r>
               <a:rPr lang="en-US" dirty="0"/>
-              <a:t>Moving on to trends over time, this line chart shows how crime incidents changed year by year from 2020 to 2025.</a:t>
-            </a:r>
+              <a:t>This line chart shows how crime changed year by year. Incidents rose steadily until 2022, stayed high in 2023, then declined in 2024.</a:t>
+            </a:r>
+            <a:endParaRPr lang="en-US" dirty="0"/>
           </a:p>
         </p:txBody>
       </p:sp>
@@ -1603,8 +1748,9 @@
           <a:p>
             <a:r>
               <a:rPr lang="en-US" dirty="0"/>
-              <a:t>Crime incidents increased steadily until 2022, which recorded the highest number of reports, and then declined, with a sharp drop in 2024 and 2025. That's because the dataset only includes a small portion of recent records, not full years.</a:t>
-            </a:r>
+              <a:t>I also broke incidents down by time of day. Most crimes were reported at night, followed by the afternoon, with mornings recording the fewest incidents.</a:t>
+            </a:r>
+            <a:endParaRPr lang="en-US" dirty="0"/>
           </a:p>
         </p:txBody>
       </p:sp>
@@ -1677,11 +1823,6 @@
 <file path=ppt/slideMasters/slideMaster1.xml><?xml version="1.0" encoding="utf-8"?>
 <p:sldMaster xmlns:a="http://schemas.openxmlformats.org/drawingml/2006/main" xmlns:r="http://schemas.openxmlformats.org/officeDocument/2006/relationships" xmlns:p="http://schemas.openxmlformats.org/presentationml/2006/main">
   <p:cSld>
-    <p:bg>
-      <p:bgRef idx="1001">
-        <a:schemeClr val="bg1"/>
-      </p:bgRef>
-    </p:bg>
     <p:spTree>
       <p:nvGrpSpPr>
         <p:cNvPr id="1" name=""/>
@@ -1964,7 +2105,6 @@
         <a:solidFill>
           <a:srgbClr val="FFFFFF"/>
         </a:solidFill>
-        <a:effectLst/>
       </p:bgPr>
     </p:bg>
     <p:spTree>
@@ -1990,23 +2130,16 @@
         <p:spPr>
           <a:xfrm>
             <a:off x="0" y="0"/>
-            <a:ext cx="12188952" cy="6858000"/>
-          </a:xfrm>
-          <a:prstGeom prst="rect">
-            <a:avLst/>
-          </a:prstGeom>
-          <a:solidFill>
-            <a:srgbClr val="FFFFFF"/>
-          </a:solidFill>
-          <a:ln/>
-        </p:spPr>
-        <p:txBody>
-          <a:bodyPr/>
-          <a:lstStyle/>
-          <a:p>
-            <a:endParaRPr lang="en-BH"/>
-          </a:p>
-        </p:txBody>
+            <a:ext cx="12188952" cy="128016"/>
+          </a:xfrm>
+          <a:prstGeom prst="rect">
+            <a:avLst/>
+          </a:prstGeom>
+          <a:solidFill>
+            <a:srgbClr val="8B0000"/>
+          </a:solidFill>
+          <a:ln/>
+        </p:spPr>
       </p:sp>
       <p:sp>
         <p:nvSpPr>
@@ -2027,13 +2160,6 @@
           </a:solidFill>
           <a:ln/>
         </p:spPr>
-        <p:txBody>
-          <a:bodyPr/>
-          <a:lstStyle/>
-          <a:p>
-            <a:endParaRPr lang="en-BH"/>
-          </a:p>
-        </p:txBody>
       </p:sp>
       <p:sp>
         <p:nvSpPr>
@@ -2056,7 +2182,7 @@
           <a:bodyPr wrap="square" rtlCol="0" anchor="ctr"/>
           <a:lstStyle/>
           <a:p>
-            <a:pPr marL="0" indent="0" algn="l">
+            <a:pPr indent="0" marL="0">
               <a:buNone/>
             </a:pPr>
             <a:r>
@@ -2095,7 +2221,7 @@
           <a:bodyPr wrap="square" rtlCol="0" anchor="ctr"/>
           <a:lstStyle/>
           <a:p>
-            <a:pPr marL="0" indent="0" algn="l">
+            <a:pPr indent="0" marL="0">
               <a:buNone/>
             </a:pPr>
             <a:r>
@@ -2107,7 +2233,7 @@
                 <a:ea typeface="Cambria" pitchFamily="34" charset="-122"/>
                 <a:cs typeface="Cambria" pitchFamily="34" charset="-120"/>
               </a:rPr>
-              <a:t>2020 – 2025</a:t>
+              <a:t>2020 – 2024</a:t>
             </a:r>
             <a:endParaRPr lang="en-US" sz="2400" dirty="0"/>
           </a:p>
@@ -2134,7 +2260,7 @@
           <a:bodyPr wrap="square" rtlCol="0" anchor="ctr"/>
           <a:lstStyle/>
           <a:p>
-            <a:pPr marL="0" indent="0">
+            <a:pPr indent="0" marL="0">
               <a:buNone/>
             </a:pPr>
             <a:r>
@@ -2173,7 +2299,7 @@
           <a:bodyPr wrap="square" rtlCol="0" anchor="ctr"/>
           <a:lstStyle/>
           <a:p>
-            <a:pPr marL="0" indent="0">
+            <a:pPr indent="0" marL="0">
               <a:buNone/>
             </a:pPr>
             <a:r>
@@ -2188,6 +2314,54 @@
               <a:t>General Assembly — Data Science Bootcamp</a:t>
             </a:r>
             <a:endParaRPr lang="en-US" sz="1300" dirty="0"/>
+          </a:p>
+        </p:txBody>
+      </p:sp>
+      <p:sp>
+        <p:nvSpPr>
+          <p:cNvPr id="8" name="Text 6">
+            <a:hlinkClick r:id="rId1" tooltip="View project on GitHub"/>
+          </p:cNvPr>
+          <p:cNvSpPr/>
+          <p:nvPr/>
+        </p:nvSpPr>
+        <p:spPr>
+          <a:xfrm>
+            <a:off x="822960" y="6080760"/>
+            <a:ext cx="7315200" cy="320040"/>
+          </a:xfrm>
+          <a:prstGeom prst="rect">
+            <a:avLst/>
+          </a:prstGeom>
+          <a:noFill/>
+          <a:ln/>
+        </p:spPr>
+        <p:txBody>
+          <a:bodyPr wrap="square" rtlCol="0" anchor="ctr"/>
+          <a:lstStyle/>
+          <a:p>
+            <a:pPr indent="0" marL="0">
+              <a:buNone/>
+            </a:pPr>
+            <a:r>
+              <a:rPr lang="en-US" sz="1200" u="sng" dirty="0">
+                <a:solidFill>
+                  <a:srgbClr val="8B0000"/>
+                </a:solidFill>
+                <a:latin typeface="Calibri" pitchFamily="34" charset="0"/>
+                <a:ea typeface="Calibri" pitchFamily="34" charset="-122"/>
+                <a:cs typeface="Calibri" pitchFamily="34" charset="-120"/>
+                <a:hlinkClick r:id="rId1" invalidUrl="" action="" tgtFrame="" tooltip="View project on GitHub" history="1" highlightClick="0" endSnd="0">
+                  <a:extLst>
+                    <a:ext uri="{A12FA001-AC4F-418D-AE19-62706E023703}">
+                      <ahyp:hlinkClr xmlns:ahyp="http://schemas.microsoft.com/office/drawing/2018/hyperlinkcolor" val="tx"/>
+                    </a:ext>
+                  </a:extLst>
+                </a:hlinkClick>
+              </a:rPr>
+              <a:t>GitHub Repository →</a:t>
+            </a:r>
+            <a:endParaRPr lang="en-US" sz="1200" dirty="0"/>
           </a:p>
         </p:txBody>
       </p:sp>
@@ -2207,7 +2381,6 @@
         <a:solidFill>
           <a:srgbClr val="FFFFFF"/>
         </a:solidFill>
-        <a:effectLst/>
       </p:bgPr>
     </p:bg>
     <p:spTree>
@@ -2224,30 +2397,238 @@
           <a:chExt cx="0" cy="0"/>
         </a:xfrm>
       </p:grpSpPr>
+      <p:sp>
+        <p:nvSpPr>
+          <p:cNvPr id="2" name="Shape 0"/>
+          <p:cNvSpPr/>
+          <p:nvPr/>
+        </p:nvSpPr>
+        <p:spPr>
+          <a:xfrm>
+            <a:off x="0" y="0"/>
+            <a:ext cx="12188952" cy="128016"/>
+          </a:xfrm>
+          <a:prstGeom prst="rect">
+            <a:avLst/>
+          </a:prstGeom>
+          <a:solidFill>
+            <a:srgbClr val="8B0000"/>
+          </a:solidFill>
+          <a:ln/>
+        </p:spPr>
+      </p:sp>
       <p:pic>
         <p:nvPicPr>
-          <p:cNvPr id="2" name="Image 0" descr="time_of_day.png"/>
+          <p:cNvPr id="3" name="Image 0" descr="v2_season.png">    </p:cNvPr>
           <p:cNvPicPr>
             <a:picLocks noChangeAspect="1"/>
           </p:cNvPicPr>
           <p:nvPr/>
         </p:nvPicPr>
         <p:blipFill>
-          <a:blip r:embed="rId3"/>
+          <a:blip r:embed="rId1"/>
           <a:stretch>
             <a:fillRect/>
           </a:stretch>
         </p:blipFill>
         <p:spPr>
           <a:xfrm>
-            <a:off x="2389273" y="274320"/>
-            <a:ext cx="7410405" cy="6309360"/>
+            <a:off x="365760" y="1409502"/>
+            <a:ext cx="7589520" cy="4038995"/>
           </a:xfrm>
           <a:prstGeom prst="rect">
             <a:avLst/>
           </a:prstGeom>
         </p:spPr>
       </p:pic>
+      <p:sp>
+        <p:nvSpPr>
+          <p:cNvPr id="4" name="Shape 1"/>
+          <p:cNvSpPr/>
+          <p:nvPr/>
+        </p:nvSpPr>
+        <p:spPr>
+          <a:xfrm>
+            <a:off x="8229600" y="1874520"/>
+            <a:ext cx="3566160" cy="3108960"/>
+          </a:xfrm>
+          <a:prstGeom prst="rect">
+            <a:avLst/>
+          </a:prstGeom>
+          <a:solidFill>
+            <a:srgbClr val="F4F4F4"/>
+          </a:solidFill>
+          <a:ln/>
+        </p:spPr>
+      </p:sp>
+      <p:sp>
+        <p:nvSpPr>
+          <p:cNvPr id="5" name="Shape 2"/>
+          <p:cNvSpPr/>
+          <p:nvPr/>
+        </p:nvSpPr>
+        <p:spPr>
+          <a:xfrm>
+            <a:off x="8229600" y="1874520"/>
+            <a:ext cx="1737360" cy="420624"/>
+          </a:xfrm>
+          <a:prstGeom prst="rect">
+            <a:avLst/>
+          </a:prstGeom>
+          <a:solidFill>
+            <a:srgbClr val="8B0000"/>
+          </a:solidFill>
+          <a:ln/>
+        </p:spPr>
+      </p:sp>
+      <p:sp>
+        <p:nvSpPr>
+          <p:cNvPr id="6" name="Text 3"/>
+          <p:cNvSpPr/>
+          <p:nvPr/>
+        </p:nvSpPr>
+        <p:spPr>
+          <a:xfrm>
+            <a:off x="8229600" y="1874520"/>
+            <a:ext cx="1737360" cy="420624"/>
+          </a:xfrm>
+          <a:prstGeom prst="rect">
+            <a:avLst/>
+          </a:prstGeom>
+          <a:noFill/>
+          <a:ln/>
+        </p:spPr>
+        <p:txBody>
+          <a:bodyPr wrap="square" rtlCol="0" anchor="ctr"/>
+          <a:lstStyle/>
+          <a:p>
+            <a:pPr algn="ctr" indent="0" marL="0">
+              <a:buNone/>
+            </a:pPr>
+            <a:r>
+              <a:rPr lang="en-US" sz="1250" b="1" spc="100" kern="0" dirty="0">
+                <a:solidFill>
+                  <a:srgbClr val="FFFFFF"/>
+                </a:solidFill>
+                <a:latin typeface="Calibri" pitchFamily="34" charset="0"/>
+                <a:ea typeface="Calibri" pitchFamily="34" charset="-122"/>
+                <a:cs typeface="Calibri" pitchFamily="34" charset="-120"/>
+              </a:rPr>
+              <a:t>KEY FINDING</a:t>
+            </a:r>
+            <a:endParaRPr lang="en-US" sz="1250" dirty="0"/>
+          </a:p>
+        </p:txBody>
+      </p:sp>
+      <p:sp>
+        <p:nvSpPr>
+          <p:cNvPr id="7" name="Text 4"/>
+          <p:cNvSpPr/>
+          <p:nvPr/>
+        </p:nvSpPr>
+        <p:spPr>
+          <a:xfrm>
+            <a:off x="8503920" y="2651760"/>
+            <a:ext cx="3017520" cy="2103120"/>
+          </a:xfrm>
+          <a:prstGeom prst="rect">
+            <a:avLst/>
+          </a:prstGeom>
+          <a:noFill/>
+          <a:ln/>
+        </p:spPr>
+        <p:txBody>
+          <a:bodyPr wrap="square" rtlCol="0" anchor="t"/>
+          <a:lstStyle/>
+          <a:p>
+            <a:pPr marL="342900" indent="-342900">
+              <a:lnSpc>
+                <a:spcPct val="115000"/>
+              </a:lnSpc>
+              <a:spcAft>
+                <a:spcPts val="1200"/>
+              </a:spcAft>
+              <a:buSzPct val="100000"/>
+              <a:buChar char="•"/>
+            </a:pPr>
+            <a:r>
+              <a:rPr lang="en-US" sz="1450" dirty="0">
+                <a:solidFill>
+                  <a:srgbClr val="1A1A1A"/>
+                </a:solidFill>
+                <a:latin typeface="Calibri" pitchFamily="34" charset="0"/>
+                <a:ea typeface="Calibri" pitchFamily="34" charset="-122"/>
+                <a:cs typeface="Calibri" pitchFamily="34" charset="-120"/>
+              </a:rPr>
+              <a:t>Summer recorded the highest number of crime incidents</a:t>
+            </a:r>
+            <a:endParaRPr lang="en-US" sz="1450" dirty="0"/>
+          </a:p>
+          <a:p>
+            <a:pPr marL="342900" indent="-342900">
+              <a:lnSpc>
+                <a:spcPct val="115000"/>
+              </a:lnSpc>
+              <a:spcAft>
+                <a:spcPts val="1200"/>
+              </a:spcAft>
+              <a:buSzPct val="100000"/>
+              <a:buChar char="•"/>
+            </a:pPr>
+            <a:r>
+              <a:rPr lang="en-US" sz="1450" dirty="0">
+                <a:solidFill>
+                  <a:srgbClr val="1A1A1A"/>
+                </a:solidFill>
+                <a:latin typeface="Calibri" pitchFamily="34" charset="0"/>
+                <a:ea typeface="Calibri" pitchFamily="34" charset="-122"/>
+                <a:cs typeface="Calibri" pitchFamily="34" charset="-120"/>
+              </a:rPr>
+              <a:t>Winter recorded the lowest — crime is generally higher in warmer months</a:t>
+            </a:r>
+            <a:endParaRPr lang="en-US" sz="1450" dirty="0"/>
+          </a:p>
+        </p:txBody>
+      </p:sp>
+      <p:sp>
+        <p:nvSpPr>
+          <p:cNvPr id="8" name="Text 5"/>
+          <p:cNvSpPr/>
+          <p:nvPr/>
+        </p:nvSpPr>
+        <p:spPr>
+          <a:xfrm>
+            <a:off x="11475720" y="6446520"/>
+            <a:ext cx="457200" cy="320040"/>
+          </a:xfrm>
+          <a:prstGeom prst="rect">
+            <a:avLst/>
+          </a:prstGeom>
+          <a:noFill/>
+          <a:ln/>
+        </p:spPr>
+        <p:txBody>
+          <a:bodyPr wrap="square" rtlCol="0" anchor="ctr"/>
+          <a:lstStyle/>
+          <a:p>
+            <a:pPr algn="r" indent="0" marL="0">
+              <a:buNone/>
+            </a:pPr>
+            <a:r>
+              <a:rPr lang="en-US" sz="1000" dirty="0">
+                <a:solidFill>
+                  <a:srgbClr val="AAAAAA"/>
+                </a:solidFill>
+                <a:latin typeface="Calibri" pitchFamily="34" charset="0"/>
+                <a:ea typeface="Calibri" pitchFamily="34" charset="-122"/>
+                <a:cs typeface="Calibri" pitchFamily="34" charset="-120"/>
+              </a:rPr>
+              <a:t>10</a:t>
+            </a:r>
+            <a:endParaRPr lang="en-US" sz="1000" dirty="0"/>
+          </a:p>
+        </p:txBody>
+      </p:sp>
     </p:spTree>
   </p:cSld>
   <p:clrMapOvr>
@@ -2264,7 +2645,6 @@
         <a:solidFill>
           <a:srgbClr val="FFFFFF"/>
         </a:solidFill>
-        <a:effectLst/>
       </p:bgPr>
     </p:bg>
     <p:spTree>
@@ -2290,7 +2670,7 @@
         <p:spPr>
           <a:xfrm>
             <a:off x="0" y="0"/>
-            <a:ext cx="12188952" cy="6858000"/>
+            <a:ext cx="12188952" cy="128016"/>
           </a:xfrm>
           <a:prstGeom prst="rect">
             <a:avLst/>
@@ -2300,24 +2680,81 @@
           </a:solidFill>
           <a:ln/>
         </p:spPr>
-        <p:txBody>
-          <a:bodyPr/>
-          <a:lstStyle/>
-          <a:p>
-            <a:endParaRPr lang="en-BH"/>
-          </a:p>
-        </p:txBody>
-      </p:sp>
-      <p:sp>
-        <p:nvSpPr>
-          <p:cNvPr id="3" name="Text 1"/>
-          <p:cNvSpPr/>
-          <p:nvPr/>
-        </p:nvSpPr>
-        <p:spPr>
-          <a:xfrm>
-            <a:off x="1188720" y="2011680"/>
-            <a:ext cx="9811512" cy="502920"/>
+      </p:sp>
+      <p:pic>
+        <p:nvPicPr>
+          <p:cNvPr id="3" name="Image 0" descr="v2_central_top10.png">    </p:cNvPr>
+          <p:cNvPicPr>
+            <a:picLocks noChangeAspect="1"/>
+          </p:cNvPicPr>
+          <p:nvPr/>
+        </p:nvPicPr>
+        <p:blipFill>
+          <a:blip r:embed="rId1"/>
+          <a:stretch>
+            <a:fillRect/>
+          </a:stretch>
+        </p:blipFill>
+        <p:spPr>
+          <a:xfrm>
+            <a:off x="365760" y="2206660"/>
+            <a:ext cx="7589520" cy="2444680"/>
+          </a:xfrm>
+          <a:prstGeom prst="rect">
+            <a:avLst/>
+          </a:prstGeom>
+        </p:spPr>
+      </p:pic>
+      <p:sp>
+        <p:nvSpPr>
+          <p:cNvPr id="4" name="Shape 1"/>
+          <p:cNvSpPr/>
+          <p:nvPr/>
+        </p:nvSpPr>
+        <p:spPr>
+          <a:xfrm>
+            <a:off x="8229600" y="1874520"/>
+            <a:ext cx="3566160" cy="3108960"/>
+          </a:xfrm>
+          <a:prstGeom prst="rect">
+            <a:avLst/>
+          </a:prstGeom>
+          <a:solidFill>
+            <a:srgbClr val="F4F4F4"/>
+          </a:solidFill>
+          <a:ln/>
+        </p:spPr>
+      </p:sp>
+      <p:sp>
+        <p:nvSpPr>
+          <p:cNvPr id="5" name="Shape 2"/>
+          <p:cNvSpPr/>
+          <p:nvPr/>
+        </p:nvSpPr>
+        <p:spPr>
+          <a:xfrm>
+            <a:off x="8229600" y="1874520"/>
+            <a:ext cx="1737360" cy="420624"/>
+          </a:xfrm>
+          <a:prstGeom prst="rect">
+            <a:avLst/>
+          </a:prstGeom>
+          <a:solidFill>
+            <a:srgbClr val="8B0000"/>
+          </a:solidFill>
+          <a:ln/>
+        </p:spPr>
+      </p:sp>
+      <p:sp>
+        <p:nvSpPr>
+          <p:cNvPr id="6" name="Text 3"/>
+          <p:cNvSpPr/>
+          <p:nvPr/>
+        </p:nvSpPr>
+        <p:spPr>
+          <a:xfrm>
+            <a:off x="8229600" y="1874520"/>
+            <a:ext cx="1737360" cy="420624"/>
           </a:xfrm>
           <a:prstGeom prst="rect">
             <a:avLst/>
@@ -2329,34 +2766,34 @@
           <a:bodyPr wrap="square" rtlCol="0" anchor="ctr"/>
           <a:lstStyle/>
           <a:p>
-            <a:pPr marL="0" indent="0">
+            <a:pPr algn="ctr" indent="0" marL="0">
               <a:buNone/>
             </a:pPr>
             <a:r>
-              <a:rPr lang="en-US" sz="1500" b="1" kern="0" spc="200" dirty="0">
-                <a:solidFill>
-                  <a:srgbClr val="FFD6D6"/>
+              <a:rPr lang="en-US" sz="1250" b="1" spc="100" kern="0" dirty="0">
+                <a:solidFill>
+                  <a:srgbClr val="FFFFFF"/>
                 </a:solidFill>
                 <a:latin typeface="Calibri" pitchFamily="34" charset="0"/>
                 <a:ea typeface="Calibri" pitchFamily="34" charset="-122"/>
                 <a:cs typeface="Calibri" pitchFamily="34" charset="-120"/>
               </a:rPr>
-              <a:t>FINDING</a:t>
-            </a:r>
-            <a:endParaRPr lang="en-US" sz="1500" dirty="0"/>
-          </a:p>
-        </p:txBody>
-      </p:sp>
-      <p:sp>
-        <p:nvSpPr>
-          <p:cNvPr id="4" name="Text 2"/>
-          <p:cNvSpPr/>
-          <p:nvPr/>
-        </p:nvSpPr>
-        <p:spPr>
-          <a:xfrm>
-            <a:off x="1188720" y="2606040"/>
-            <a:ext cx="9811512" cy="2377440"/>
+              <a:t>KEY FINDING</a:t>
+            </a:r>
+            <a:endParaRPr lang="en-US" sz="1250" dirty="0"/>
+          </a:p>
+        </p:txBody>
+      </p:sp>
+      <p:sp>
+        <p:nvSpPr>
+          <p:cNvPr id="7" name="Text 4"/>
+          <p:cNvSpPr/>
+          <p:nvPr/>
+        </p:nvSpPr>
+        <p:spPr>
+          <a:xfrm>
+            <a:off x="8503920" y="2651760"/>
+            <a:ext cx="3017520" cy="2103120"/>
           </a:xfrm>
           <a:prstGeom prst="rect">
             <a:avLst/>
@@ -2368,30 +2805,82 @@
           <a:bodyPr wrap="square" rtlCol="0" anchor="t"/>
           <a:lstStyle/>
           <a:p>
-            <a:pPr marL="0" indent="0">
+            <a:pPr marL="342900" indent="-342900">
               <a:lnSpc>
-                <a:spcPct val="125000"/>
+                <a:spcPct val="115000"/>
               </a:lnSpc>
-              <a:buNone/>
-            </a:pPr>
-            <a:r>
-              <a:rPr lang="en-US" sz="2600" dirty="0">
-                <a:solidFill>
-                  <a:srgbClr val="FFFFFF"/>
-                </a:solidFill>
-                <a:latin typeface="Cambria" pitchFamily="34" charset="0"/>
-                <a:ea typeface="Cambria" pitchFamily="34" charset="-122"/>
-                <a:cs typeface="Cambria" pitchFamily="34" charset="-120"/>
-              </a:rPr>
-              <a:t>Most crimes were reported during the Night, followed by the Afternoon. Morning recorded the fewest incidents.</a:t>
-            </a:r>
-            <a:endParaRPr lang="en-US" sz="2600" dirty="0"/>
-          </a:p>
-        </p:txBody>
-      </p:sp>
-      <p:sp>
-        <p:nvSpPr>
-          <p:cNvPr id="5" name="Text 3"/>
+              <a:spcAft>
+                <a:spcPts val="1200"/>
+              </a:spcAft>
+              <a:buSzPct val="100000"/>
+              <a:buChar char="•"/>
+            </a:pPr>
+            <a:r>
+              <a:rPr lang="en-US" sz="1450" dirty="0">
+                <a:solidFill>
+                  <a:srgbClr val="1A1A1A"/>
+                </a:solidFill>
+                <a:latin typeface="Calibri" pitchFamily="34" charset="0"/>
+                <a:ea typeface="Calibri" pitchFamily="34" charset="-122"/>
+                <a:cs typeface="Calibri" pitchFamily="34" charset="-120"/>
+              </a:rPr>
+              <a:t>Burglary from Vehicle was the most frequent crime in Central</a:t>
+            </a:r>
+            <a:endParaRPr lang="en-US" sz="1450" dirty="0"/>
+          </a:p>
+          <a:p>
+            <a:pPr marL="342900" indent="-342900">
+              <a:lnSpc>
+                <a:spcPct val="115000"/>
+              </a:lnSpc>
+              <a:spcAft>
+                <a:spcPts val="1200"/>
+              </a:spcAft>
+              <a:buSzPct val="100000"/>
+              <a:buChar char="•"/>
+            </a:pPr>
+            <a:r>
+              <a:rPr lang="en-US" sz="1450" dirty="0">
+                <a:solidFill>
+                  <a:srgbClr val="1A1A1A"/>
+                </a:solidFill>
+                <a:latin typeface="Calibri" pitchFamily="34" charset="0"/>
+                <a:ea typeface="Calibri" pitchFamily="34" charset="-122"/>
+                <a:cs typeface="Calibri" pitchFamily="34" charset="-120"/>
+              </a:rPr>
+              <a:t>Followed by Battery – Simple Assault and Vehicle Theft</a:t>
+            </a:r>
+            <a:endParaRPr lang="en-US" sz="1450" dirty="0"/>
+          </a:p>
+          <a:p>
+            <a:pPr marL="342900" indent="-342900">
+              <a:lnSpc>
+                <a:spcPct val="115000"/>
+              </a:lnSpc>
+              <a:spcAft>
+                <a:spcPts val="1200"/>
+              </a:spcAft>
+              <a:buSzPct val="100000"/>
+              <a:buChar char="•"/>
+            </a:pPr>
+            <a:r>
+              <a:rPr lang="en-US" sz="1450" dirty="0">
+                <a:solidFill>
+                  <a:srgbClr val="1A1A1A"/>
+                </a:solidFill>
+                <a:latin typeface="Calibri" pitchFamily="34" charset="0"/>
+                <a:ea typeface="Calibri" pitchFamily="34" charset="-122"/>
+                <a:cs typeface="Calibri" pitchFamily="34" charset="-120"/>
+              </a:rPr>
+              <a:t>Vehicle-related crime dominates this area</a:t>
+            </a:r>
+            <a:endParaRPr lang="en-US" sz="1450" dirty="0"/>
+          </a:p>
+        </p:txBody>
+      </p:sp>
+      <p:sp>
+        <p:nvSpPr>
+          <p:cNvPr id="8" name="Text 5"/>
           <p:cNvSpPr/>
           <p:nvPr/>
         </p:nvSpPr>
@@ -2410,13 +2899,13 @@
           <a:bodyPr wrap="square" rtlCol="0" anchor="ctr"/>
           <a:lstStyle/>
           <a:p>
-            <a:pPr marL="0" indent="0" algn="r">
+            <a:pPr algn="r" indent="0" marL="0">
               <a:buNone/>
             </a:pPr>
             <a:r>
               <a:rPr lang="en-US" sz="1000" dirty="0">
                 <a:solidFill>
-                  <a:srgbClr val="FFFFFF"/>
+                  <a:srgbClr val="AAAAAA"/>
                 </a:solidFill>
                 <a:latin typeface="Calibri" pitchFamily="34" charset="0"/>
                 <a:ea typeface="Calibri" pitchFamily="34" charset="-122"/>
@@ -2444,7 +2933,6 @@
         <a:solidFill>
           <a:srgbClr val="FFFFFF"/>
         </a:solidFill>
-        <a:effectLst/>
       </p:bgPr>
     </p:bg>
     <p:spTree>
@@ -2461,30 +2949,478 @@
           <a:chExt cx="0" cy="0"/>
         </a:xfrm>
       </p:grpSpPr>
-      <p:pic>
-        <p:nvPicPr>
-          <p:cNvPr id="2" name="Image 0" descr="central_top10.png"/>
-          <p:cNvPicPr>
-            <a:picLocks noChangeAspect="1"/>
-          </p:cNvPicPr>
-          <p:nvPr/>
-        </p:nvPicPr>
-        <p:blipFill>
-          <a:blip r:embed="rId3"/>
-          <a:stretch>
-            <a:fillRect/>
-          </a:stretch>
-        </p:blipFill>
-        <p:spPr>
-          <a:xfrm>
-            <a:off x="3140363" y="274320"/>
-            <a:ext cx="5908226" cy="6309360"/>
-          </a:xfrm>
-          <a:prstGeom prst="rect">
-            <a:avLst/>
-          </a:prstGeom>
-        </p:spPr>
-      </p:pic>
+      <p:sp>
+        <p:nvSpPr>
+          <p:cNvPr id="2" name="Shape 0"/>
+          <p:cNvSpPr/>
+          <p:nvPr/>
+        </p:nvSpPr>
+        <p:spPr>
+          <a:xfrm>
+            <a:off x="0" y="0"/>
+            <a:ext cx="12188952" cy="128016"/>
+          </a:xfrm>
+          <a:prstGeom prst="rect">
+            <a:avLst/>
+          </a:prstGeom>
+          <a:solidFill>
+            <a:srgbClr val="8B0000"/>
+          </a:solidFill>
+          <a:ln/>
+        </p:spPr>
+      </p:sp>
+      <p:sp>
+        <p:nvSpPr>
+          <p:cNvPr id="3" name="Text 1"/>
+          <p:cNvSpPr/>
+          <p:nvPr/>
+        </p:nvSpPr>
+        <p:spPr>
+          <a:xfrm>
+            <a:off x="640080" y="457200"/>
+            <a:ext cx="10881360" cy="640080"/>
+          </a:xfrm>
+          <a:prstGeom prst="rect">
+            <a:avLst/>
+          </a:prstGeom>
+          <a:noFill/>
+          <a:ln/>
+        </p:spPr>
+        <p:txBody>
+          <a:bodyPr wrap="square" rtlCol="0" anchor="ctr"/>
+          <a:lstStyle/>
+          <a:p>
+            <a:pPr indent="0" marL="0">
+              <a:buNone/>
+            </a:pPr>
+            <a:r>
+              <a:rPr lang="en-US" sz="3200" b="1" dirty="0">
+                <a:solidFill>
+                  <a:srgbClr val="1A1A1A"/>
+                </a:solidFill>
+                <a:latin typeface="Cambria" pitchFamily="34" charset="0"/>
+                <a:ea typeface="Cambria" pitchFamily="34" charset="-122"/>
+                <a:cs typeface="Cambria" pitchFamily="34" charset="-120"/>
+              </a:rPr>
+              <a:t>Summary</a:t>
+            </a:r>
+            <a:endParaRPr lang="en-US" sz="3200" dirty="0"/>
+          </a:p>
+        </p:txBody>
+      </p:sp>
+      <p:sp>
+        <p:nvSpPr>
+          <p:cNvPr id="4" name="Shape 2"/>
+          <p:cNvSpPr/>
+          <p:nvPr/>
+        </p:nvSpPr>
+        <p:spPr>
+          <a:xfrm>
+            <a:off x="658368" y="1133856"/>
+            <a:ext cx="822960" cy="54864"/>
+          </a:xfrm>
+          <a:prstGeom prst="rect">
+            <a:avLst/>
+          </a:prstGeom>
+          <a:solidFill>
+            <a:srgbClr val="8B0000"/>
+          </a:solidFill>
+          <a:ln/>
+        </p:spPr>
+      </p:sp>
+      <p:sp>
+        <p:nvSpPr>
+          <p:cNvPr id="5" name="Shape 3"/>
+          <p:cNvSpPr/>
+          <p:nvPr/>
+        </p:nvSpPr>
+        <p:spPr>
+          <a:xfrm>
+            <a:off x="640080" y="1417320"/>
+            <a:ext cx="5349240" cy="1417320"/>
+          </a:xfrm>
+          <a:prstGeom prst="rect">
+            <a:avLst/>
+          </a:prstGeom>
+          <a:solidFill>
+            <a:srgbClr val="F4F4F4"/>
+          </a:solidFill>
+          <a:ln/>
+        </p:spPr>
+      </p:sp>
+      <p:sp>
+        <p:nvSpPr>
+          <p:cNvPr id="6" name="Text 4"/>
+          <p:cNvSpPr/>
+          <p:nvPr/>
+        </p:nvSpPr>
+        <p:spPr>
+          <a:xfrm>
+            <a:off x="960120" y="1417320"/>
+            <a:ext cx="4846320" cy="1417320"/>
+          </a:xfrm>
+          <a:prstGeom prst="rect">
+            <a:avLst/>
+          </a:prstGeom>
+          <a:noFill/>
+          <a:ln/>
+        </p:spPr>
+        <p:txBody>
+          <a:bodyPr wrap="square" rtlCol="0" anchor="ctr"/>
+          <a:lstStyle/>
+          <a:p>
+            <a:pPr indent="0" marL="0">
+              <a:buNone/>
+            </a:pPr>
+            <a:r>
+              <a:rPr lang="en-US" sz="1500" dirty="0">
+                <a:solidFill>
+                  <a:srgbClr val="1A1A1A"/>
+                </a:solidFill>
+                <a:latin typeface="Calibri" pitchFamily="34" charset="0"/>
+                <a:ea typeface="Calibri" pitchFamily="34" charset="-122"/>
+                <a:cs typeface="Calibri" pitchFamily="34" charset="-120"/>
+              </a:rPr>
+              <a:t>More than one million crime incidents were analyzed</a:t>
+            </a:r>
+            <a:endParaRPr lang="en-US" sz="1500" dirty="0"/>
+          </a:p>
+        </p:txBody>
+      </p:sp>
+      <p:sp>
+        <p:nvSpPr>
+          <p:cNvPr id="7" name="Shape 5"/>
+          <p:cNvSpPr/>
+          <p:nvPr/>
+        </p:nvSpPr>
+        <p:spPr>
+          <a:xfrm>
+            <a:off x="6309360" y="1417320"/>
+            <a:ext cx="5349240" cy="1417320"/>
+          </a:xfrm>
+          <a:prstGeom prst="rect">
+            <a:avLst/>
+          </a:prstGeom>
+          <a:solidFill>
+            <a:srgbClr val="F4F4F4"/>
+          </a:solidFill>
+          <a:ln/>
+        </p:spPr>
+      </p:sp>
+      <p:sp>
+        <p:nvSpPr>
+          <p:cNvPr id="8" name="Text 6"/>
+          <p:cNvSpPr/>
+          <p:nvPr/>
+        </p:nvSpPr>
+        <p:spPr>
+          <a:xfrm>
+            <a:off x="6629400" y="1417320"/>
+            <a:ext cx="4846320" cy="1417320"/>
+          </a:xfrm>
+          <a:prstGeom prst="rect">
+            <a:avLst/>
+          </a:prstGeom>
+          <a:noFill/>
+          <a:ln/>
+        </p:spPr>
+        <p:txBody>
+          <a:bodyPr wrap="square" rtlCol="0" anchor="ctr"/>
+          <a:lstStyle/>
+          <a:p>
+            <a:pPr indent="0" marL="0">
+              <a:buNone/>
+            </a:pPr>
+            <a:r>
+              <a:rPr lang="en-US" sz="1500" dirty="0">
+                <a:solidFill>
+                  <a:srgbClr val="1A1A1A"/>
+                </a:solidFill>
+                <a:latin typeface="Calibri" pitchFamily="34" charset="0"/>
+                <a:ea typeface="Calibri" pitchFamily="34" charset="-122"/>
+                <a:cs typeface="Calibri" pitchFamily="34" charset="-120"/>
+              </a:rPr>
+              <a:t>Vehicle Theft was the most common crime</a:t>
+            </a:r>
+            <a:endParaRPr lang="en-US" sz="1500" dirty="0"/>
+          </a:p>
+        </p:txBody>
+      </p:sp>
+      <p:sp>
+        <p:nvSpPr>
+          <p:cNvPr id="9" name="Shape 7"/>
+          <p:cNvSpPr/>
+          <p:nvPr/>
+        </p:nvSpPr>
+        <p:spPr>
+          <a:xfrm>
+            <a:off x="640080" y="3154680"/>
+            <a:ext cx="5349240" cy="1417320"/>
+          </a:xfrm>
+          <a:prstGeom prst="rect">
+            <a:avLst/>
+          </a:prstGeom>
+          <a:solidFill>
+            <a:srgbClr val="F4F4F4"/>
+          </a:solidFill>
+          <a:ln/>
+        </p:spPr>
+      </p:sp>
+      <p:sp>
+        <p:nvSpPr>
+          <p:cNvPr id="10" name="Text 8"/>
+          <p:cNvSpPr/>
+          <p:nvPr/>
+        </p:nvSpPr>
+        <p:spPr>
+          <a:xfrm>
+            <a:off x="960120" y="3154680"/>
+            <a:ext cx="4846320" cy="1417320"/>
+          </a:xfrm>
+          <a:prstGeom prst="rect">
+            <a:avLst/>
+          </a:prstGeom>
+          <a:noFill/>
+          <a:ln/>
+        </p:spPr>
+        <p:txBody>
+          <a:bodyPr wrap="square" rtlCol="0" anchor="ctr"/>
+          <a:lstStyle/>
+          <a:p>
+            <a:pPr indent="0" marL="0">
+              <a:buNone/>
+            </a:pPr>
+            <a:r>
+              <a:rPr lang="en-US" sz="1500" dirty="0">
+                <a:solidFill>
+                  <a:srgbClr val="1A1A1A"/>
+                </a:solidFill>
+                <a:latin typeface="Calibri" pitchFamily="34" charset="0"/>
+                <a:ea typeface="Calibri" pitchFamily="34" charset="-122"/>
+                <a:cs typeface="Calibri" pitchFamily="34" charset="-120"/>
+              </a:rPr>
+              <a:t>Central recorded the highest crime rate</a:t>
+            </a:r>
+            <a:endParaRPr lang="en-US" sz="1500" dirty="0"/>
+          </a:p>
+        </p:txBody>
+      </p:sp>
+      <p:sp>
+        <p:nvSpPr>
+          <p:cNvPr id="11" name="Shape 9"/>
+          <p:cNvSpPr/>
+          <p:nvPr/>
+        </p:nvSpPr>
+        <p:spPr>
+          <a:xfrm>
+            <a:off x="6309360" y="3154680"/>
+            <a:ext cx="5349240" cy="1417320"/>
+          </a:xfrm>
+          <a:prstGeom prst="rect">
+            <a:avLst/>
+          </a:prstGeom>
+          <a:solidFill>
+            <a:srgbClr val="F4F4F4"/>
+          </a:solidFill>
+          <a:ln/>
+        </p:spPr>
+      </p:sp>
+      <p:sp>
+        <p:nvSpPr>
+          <p:cNvPr id="12" name="Text 10"/>
+          <p:cNvSpPr/>
+          <p:nvPr/>
+        </p:nvSpPr>
+        <p:spPr>
+          <a:xfrm>
+            <a:off x="6629400" y="3154680"/>
+            <a:ext cx="4846320" cy="1417320"/>
+          </a:xfrm>
+          <a:prstGeom prst="rect">
+            <a:avLst/>
+          </a:prstGeom>
+          <a:noFill/>
+          <a:ln/>
+        </p:spPr>
+        <p:txBody>
+          <a:bodyPr wrap="square" rtlCol="0" anchor="ctr"/>
+          <a:lstStyle/>
+          <a:p>
+            <a:pPr indent="0" marL="0">
+              <a:buNone/>
+            </a:pPr>
+            <a:r>
+              <a:rPr lang="en-US" sz="1500" dirty="0">
+                <a:solidFill>
+                  <a:srgbClr val="1A1A1A"/>
+                </a:solidFill>
+                <a:latin typeface="Calibri" pitchFamily="34" charset="0"/>
+                <a:ea typeface="Calibri" pitchFamily="34" charset="-122"/>
+                <a:cs typeface="Calibri" pitchFamily="34" charset="-120"/>
+              </a:rPr>
+              <a:t>Crime peaked in 2022</a:t>
+            </a:r>
+            <a:endParaRPr lang="en-US" sz="1500" dirty="0"/>
+          </a:p>
+        </p:txBody>
+      </p:sp>
+      <p:sp>
+        <p:nvSpPr>
+          <p:cNvPr id="13" name="Shape 11"/>
+          <p:cNvSpPr/>
+          <p:nvPr/>
+        </p:nvSpPr>
+        <p:spPr>
+          <a:xfrm>
+            <a:off x="640080" y="4892040"/>
+            <a:ext cx="5349240" cy="1417320"/>
+          </a:xfrm>
+          <a:prstGeom prst="rect">
+            <a:avLst/>
+          </a:prstGeom>
+          <a:solidFill>
+            <a:srgbClr val="F4F4F4"/>
+          </a:solidFill>
+          <a:ln/>
+        </p:spPr>
+      </p:sp>
+      <p:sp>
+        <p:nvSpPr>
+          <p:cNvPr id="14" name="Text 12"/>
+          <p:cNvSpPr/>
+          <p:nvPr/>
+        </p:nvSpPr>
+        <p:spPr>
+          <a:xfrm>
+            <a:off x="960120" y="4892040"/>
+            <a:ext cx="4846320" cy="1417320"/>
+          </a:xfrm>
+          <a:prstGeom prst="rect">
+            <a:avLst/>
+          </a:prstGeom>
+          <a:noFill/>
+          <a:ln/>
+        </p:spPr>
+        <p:txBody>
+          <a:bodyPr wrap="square" rtlCol="0" anchor="ctr"/>
+          <a:lstStyle/>
+          <a:p>
+            <a:pPr indent="0" marL="0">
+              <a:buNone/>
+            </a:pPr>
+            <a:r>
+              <a:rPr lang="en-US" sz="1500" dirty="0">
+                <a:solidFill>
+                  <a:srgbClr val="1A1A1A"/>
+                </a:solidFill>
+                <a:latin typeface="Calibri" pitchFamily="34" charset="0"/>
+                <a:ea typeface="Calibri" pitchFamily="34" charset="-122"/>
+                <a:cs typeface="Calibri" pitchFamily="34" charset="-120"/>
+              </a:rPr>
+              <a:t>Most crimes occurred at night, and in summer</a:t>
+            </a:r>
+            <a:endParaRPr lang="en-US" sz="1500" dirty="0"/>
+          </a:p>
+        </p:txBody>
+      </p:sp>
+      <p:sp>
+        <p:nvSpPr>
+          <p:cNvPr id="15" name="Shape 13"/>
+          <p:cNvSpPr/>
+          <p:nvPr/>
+        </p:nvSpPr>
+        <p:spPr>
+          <a:xfrm>
+            <a:off x="6309360" y="4892040"/>
+            <a:ext cx="5349240" cy="1417320"/>
+          </a:xfrm>
+          <a:prstGeom prst="rect">
+            <a:avLst/>
+          </a:prstGeom>
+          <a:solidFill>
+            <a:srgbClr val="F4F4F4"/>
+          </a:solidFill>
+          <a:ln/>
+        </p:spPr>
+      </p:sp>
+      <p:sp>
+        <p:nvSpPr>
+          <p:cNvPr id="16" name="Text 14"/>
+          <p:cNvSpPr/>
+          <p:nvPr/>
+        </p:nvSpPr>
+        <p:spPr>
+          <a:xfrm>
+            <a:off x="6629400" y="4892040"/>
+            <a:ext cx="4846320" cy="1417320"/>
+          </a:xfrm>
+          <a:prstGeom prst="rect">
+            <a:avLst/>
+          </a:prstGeom>
+          <a:noFill/>
+          <a:ln/>
+        </p:spPr>
+        <p:txBody>
+          <a:bodyPr wrap="square" rtlCol="0" anchor="ctr"/>
+          <a:lstStyle/>
+          <a:p>
+            <a:pPr indent="0" marL="0">
+              <a:buNone/>
+            </a:pPr>
+            <a:r>
+              <a:rPr lang="en-US" sz="1500" dirty="0">
+                <a:solidFill>
+                  <a:srgbClr val="1A1A1A"/>
+                </a:solidFill>
+                <a:latin typeface="Calibri" pitchFamily="34" charset="0"/>
+                <a:ea typeface="Calibri" pitchFamily="34" charset="-122"/>
+                <a:cs typeface="Calibri" pitchFamily="34" charset="-120"/>
+              </a:rPr>
+              <a:t>Vehicle-related crimes were common in Central</a:t>
+            </a:r>
+            <a:endParaRPr lang="en-US" sz="1500" dirty="0"/>
+          </a:p>
+        </p:txBody>
+      </p:sp>
+      <p:sp>
+        <p:nvSpPr>
+          <p:cNvPr id="17" name="Text 15"/>
+          <p:cNvSpPr/>
+          <p:nvPr/>
+        </p:nvSpPr>
+        <p:spPr>
+          <a:xfrm>
+            <a:off x="11475720" y="6446520"/>
+            <a:ext cx="457200" cy="320040"/>
+          </a:xfrm>
+          <a:prstGeom prst="rect">
+            <a:avLst/>
+          </a:prstGeom>
+          <a:noFill/>
+          <a:ln/>
+        </p:spPr>
+        <p:txBody>
+          <a:bodyPr wrap="square" rtlCol="0" anchor="ctr"/>
+          <a:lstStyle/>
+          <a:p>
+            <a:pPr algn="r" indent="0" marL="0">
+              <a:buNone/>
+            </a:pPr>
+            <a:r>
+              <a:rPr lang="en-US" sz="1000" dirty="0">
+                <a:solidFill>
+                  <a:srgbClr val="AAAAAA"/>
+                </a:solidFill>
+                <a:latin typeface="Calibri" pitchFamily="34" charset="0"/>
+                <a:ea typeface="Calibri" pitchFamily="34" charset="-122"/>
+                <a:cs typeface="Calibri" pitchFamily="34" charset="-120"/>
+              </a:rPr>
+              <a:t>12</a:t>
+            </a:r>
+            <a:endParaRPr lang="en-US" sz="1000" dirty="0"/>
+          </a:p>
+        </p:txBody>
+      </p:sp>
     </p:spTree>
   </p:cSld>
   <p:clrMapOvr>
@@ -2501,7 +3437,6 @@
         <a:solidFill>
           <a:srgbClr val="FFFFFF"/>
         </a:solidFill>
-        <a:effectLst/>
       </p:bgPr>
     </p:bg>
     <p:spTree>
@@ -2527,7 +3462,7 @@
         <p:spPr>
           <a:xfrm>
             <a:off x="0" y="0"/>
-            <a:ext cx="12188952" cy="6858000"/>
+            <a:ext cx="12188952" cy="128016"/>
           </a:xfrm>
           <a:prstGeom prst="rect">
             <a:avLst/>
@@ -2537,13 +3472,6 @@
           </a:solidFill>
           <a:ln/>
         </p:spPr>
-        <p:txBody>
-          <a:bodyPr/>
-          <a:lstStyle/>
-          <a:p>
-            <a:endParaRPr lang="en-BH"/>
-          </a:p>
-        </p:txBody>
       </p:sp>
       <p:sp>
         <p:nvSpPr>
@@ -2553,8 +3481,8 @@
         </p:nvSpPr>
         <p:spPr>
           <a:xfrm>
-            <a:off x="1188720" y="2011680"/>
-            <a:ext cx="9811512" cy="502920"/>
+            <a:off x="640080" y="457200"/>
+            <a:ext cx="10881360" cy="640080"/>
           </a:xfrm>
           <a:prstGeom prst="rect">
             <a:avLst/>
@@ -2566,61 +3494,196 @@
           <a:bodyPr wrap="square" rtlCol="0" anchor="ctr"/>
           <a:lstStyle/>
           <a:p>
-            <a:pPr marL="0" indent="0">
+            <a:pPr indent="0" marL="0">
               <a:buNone/>
             </a:pPr>
             <a:r>
-              <a:rPr lang="en-US" sz="1500" b="1" kern="0" spc="200" dirty="0">
-                <a:solidFill>
-                  <a:srgbClr val="FFD6D6"/>
+              <a:rPr lang="en-US" sz="3200" b="1" dirty="0">
+                <a:solidFill>
+                  <a:srgbClr val="1A1A1A"/>
+                </a:solidFill>
+                <a:latin typeface="Cambria" pitchFamily="34" charset="0"/>
+                <a:ea typeface="Cambria" pitchFamily="34" charset="-122"/>
+                <a:cs typeface="Cambria" pitchFamily="34" charset="-120"/>
+              </a:rPr>
+              <a:t>Recommendations</a:t>
+            </a:r>
+            <a:endParaRPr lang="en-US" sz="3200" dirty="0"/>
+          </a:p>
+        </p:txBody>
+      </p:sp>
+      <p:sp>
+        <p:nvSpPr>
+          <p:cNvPr id="4" name="Shape 2"/>
+          <p:cNvSpPr/>
+          <p:nvPr/>
+        </p:nvSpPr>
+        <p:spPr>
+          <a:xfrm>
+            <a:off x="658368" y="1133856"/>
+            <a:ext cx="822960" cy="54864"/>
+          </a:xfrm>
+          <a:prstGeom prst="rect">
+            <a:avLst/>
+          </a:prstGeom>
+          <a:solidFill>
+            <a:srgbClr val="8B0000"/>
+          </a:solidFill>
+          <a:ln/>
+        </p:spPr>
+      </p:sp>
+      <p:sp>
+        <p:nvSpPr>
+          <p:cNvPr id="5" name="Shape 3"/>
+          <p:cNvSpPr/>
+          <p:nvPr/>
+        </p:nvSpPr>
+        <p:spPr>
+          <a:xfrm>
+            <a:off x="640080" y="1417320"/>
+            <a:ext cx="10908792" cy="932688"/>
+          </a:xfrm>
+          <a:prstGeom prst="rect">
+            <a:avLst/>
+          </a:prstGeom>
+          <a:solidFill>
+            <a:srgbClr val="F4F4F4"/>
+          </a:solidFill>
+          <a:ln/>
+        </p:spPr>
+      </p:sp>
+      <p:sp>
+        <p:nvSpPr>
+          <p:cNvPr id="6" name="Text 4"/>
+          <p:cNvSpPr/>
+          <p:nvPr/>
+        </p:nvSpPr>
+        <p:spPr>
+          <a:xfrm>
+            <a:off x="868680" y="1417320"/>
+            <a:ext cx="822960" cy="932688"/>
+          </a:xfrm>
+          <a:prstGeom prst="rect">
+            <a:avLst/>
+          </a:prstGeom>
+          <a:noFill/>
+          <a:ln/>
+        </p:spPr>
+        <p:txBody>
+          <a:bodyPr wrap="square" rtlCol="0" anchor="ctr"/>
+          <a:lstStyle/>
+          <a:p>
+            <a:pPr indent="0" marL="0">
+              <a:buNone/>
+            </a:pPr>
+            <a:r>
+              <a:rPr lang="en-US" sz="2600" b="1" dirty="0">
+                <a:solidFill>
+                  <a:srgbClr val="8B0000"/>
+                </a:solidFill>
+                <a:latin typeface="Cambria" pitchFamily="34" charset="0"/>
+                <a:ea typeface="Cambria" pitchFamily="34" charset="-122"/>
+                <a:cs typeface="Cambria" pitchFamily="34" charset="-120"/>
+              </a:rPr>
+              <a:t>1</a:t>
+            </a:r>
+            <a:endParaRPr lang="en-US" sz="2600" dirty="0"/>
+          </a:p>
+        </p:txBody>
+      </p:sp>
+      <p:sp>
+        <p:nvSpPr>
+          <p:cNvPr id="7" name="Text 5"/>
+          <p:cNvSpPr/>
+          <p:nvPr/>
+        </p:nvSpPr>
+        <p:spPr>
+          <a:xfrm>
+            <a:off x="1828800" y="1417320"/>
+            <a:ext cx="9509760" cy="932688"/>
+          </a:xfrm>
+          <a:prstGeom prst="rect">
+            <a:avLst/>
+          </a:prstGeom>
+          <a:noFill/>
+          <a:ln/>
+        </p:spPr>
+        <p:txBody>
+          <a:bodyPr wrap="square" rtlCol="0" anchor="ctr"/>
+          <a:lstStyle/>
+          <a:p>
+            <a:pPr indent="0" marL="0">
+              <a:buNone/>
+            </a:pPr>
+            <a:r>
+              <a:rPr lang="en-US" sz="1600" dirty="0">
+                <a:solidFill>
+                  <a:srgbClr val="1A1A1A"/>
                 </a:solidFill>
                 <a:latin typeface="Calibri" pitchFamily="34" charset="0"/>
                 <a:ea typeface="Calibri" pitchFamily="34" charset="-122"/>
                 <a:cs typeface="Calibri" pitchFamily="34" charset="-120"/>
               </a:rPr>
-              <a:t>FINDING</a:t>
-            </a:r>
-            <a:endParaRPr lang="en-US" sz="1500" dirty="0"/>
-          </a:p>
-        </p:txBody>
-      </p:sp>
-      <p:sp>
-        <p:nvSpPr>
-          <p:cNvPr id="4" name="Text 2"/>
-          <p:cNvSpPr/>
-          <p:nvPr/>
-        </p:nvSpPr>
-        <p:spPr>
-          <a:xfrm>
-            <a:off x="1188720" y="2606040"/>
-            <a:ext cx="9811512" cy="2377440"/>
-          </a:xfrm>
-          <a:prstGeom prst="rect">
-            <a:avLst/>
-          </a:prstGeom>
-          <a:noFill/>
-          <a:ln/>
-        </p:spPr>
-        <p:txBody>
-          <a:bodyPr wrap="square" rtlCol="0" anchor="t"/>
-          <a:lstStyle/>
-          <a:p>
-            <a:pPr marL="0" indent="0">
-              <a:lnSpc>
-                <a:spcPct val="125000"/>
-              </a:lnSpc>
+              <a:t>Increase police patrols in high-crime areas, especially Central</a:t>
+            </a:r>
+            <a:endParaRPr lang="en-US" sz="1600" dirty="0"/>
+          </a:p>
+        </p:txBody>
+      </p:sp>
+      <p:sp>
+        <p:nvSpPr>
+          <p:cNvPr id="8" name="Shape 6"/>
+          <p:cNvSpPr/>
+          <p:nvPr/>
+        </p:nvSpPr>
+        <p:spPr>
+          <a:xfrm>
+            <a:off x="640080" y="2532888"/>
+            <a:ext cx="10908792" cy="932688"/>
+          </a:xfrm>
+          <a:prstGeom prst="rect">
+            <a:avLst/>
+          </a:prstGeom>
+          <a:solidFill>
+            <a:srgbClr val="F4F4F4"/>
+          </a:solidFill>
+          <a:ln/>
+        </p:spPr>
+      </p:sp>
+      <p:sp>
+        <p:nvSpPr>
+          <p:cNvPr id="9" name="Text 7"/>
+          <p:cNvSpPr/>
+          <p:nvPr/>
+        </p:nvSpPr>
+        <p:spPr>
+          <a:xfrm>
+            <a:off x="868680" y="2532888"/>
+            <a:ext cx="822960" cy="932688"/>
+          </a:xfrm>
+          <a:prstGeom prst="rect">
+            <a:avLst/>
+          </a:prstGeom>
+          <a:noFill/>
+          <a:ln/>
+        </p:spPr>
+        <p:txBody>
+          <a:bodyPr wrap="square" rtlCol="0" anchor="ctr"/>
+          <a:lstStyle/>
+          <a:p>
+            <a:pPr indent="0" marL="0">
               <a:buNone/>
             </a:pPr>
             <a:r>
-              <a:rPr lang="en-US" sz="2600" dirty="0">
-                <a:solidFill>
-                  <a:srgbClr val="FFFFFF"/>
+              <a:rPr lang="en-US" sz="2600" b="1" dirty="0">
+                <a:solidFill>
+                  <a:srgbClr val="8B0000"/>
                 </a:solidFill>
                 <a:latin typeface="Cambria" pitchFamily="34" charset="0"/>
                 <a:ea typeface="Cambria" pitchFamily="34" charset="-122"/>
                 <a:cs typeface="Cambria" pitchFamily="34" charset="-120"/>
               </a:rPr>
-              <a:t>Burglary from Vehicle was the most common crime in Central. Vehicle-related and theft-related incidents were common in this area.</a:t>
+              <a:t>2</a:t>
             </a:r>
             <a:endParaRPr lang="en-US" sz="2600" dirty="0"/>
           </a:p>
@@ -2628,7 +3691,281 @@
       </p:sp>
       <p:sp>
         <p:nvSpPr>
-          <p:cNvPr id="5" name="Text 3"/>
+          <p:cNvPr id="10" name="Text 8"/>
+          <p:cNvSpPr/>
+          <p:nvPr/>
+        </p:nvSpPr>
+        <p:spPr>
+          <a:xfrm>
+            <a:off x="1828800" y="2532888"/>
+            <a:ext cx="9509760" cy="932688"/>
+          </a:xfrm>
+          <a:prstGeom prst="rect">
+            <a:avLst/>
+          </a:prstGeom>
+          <a:noFill/>
+          <a:ln/>
+        </p:spPr>
+        <p:txBody>
+          <a:bodyPr wrap="square" rtlCol="0" anchor="ctr"/>
+          <a:lstStyle/>
+          <a:p>
+            <a:pPr indent="0" marL="0">
+              <a:buNone/>
+            </a:pPr>
+            <a:r>
+              <a:rPr lang="en-US" sz="1600" dirty="0">
+                <a:solidFill>
+                  <a:srgbClr val="1A1A1A"/>
+                </a:solidFill>
+                <a:latin typeface="Calibri" pitchFamily="34" charset="0"/>
+                <a:ea typeface="Calibri" pitchFamily="34" charset="-122"/>
+                <a:cs typeface="Calibri" pitchFamily="34" charset="-120"/>
+              </a:rPr>
+              <a:t>Improve vehicle theft prevention through public awareness campaigns</a:t>
+            </a:r>
+            <a:endParaRPr lang="en-US" sz="1600" dirty="0"/>
+          </a:p>
+        </p:txBody>
+      </p:sp>
+      <p:sp>
+        <p:nvSpPr>
+          <p:cNvPr id="11" name="Shape 9"/>
+          <p:cNvSpPr/>
+          <p:nvPr/>
+        </p:nvSpPr>
+        <p:spPr>
+          <a:xfrm>
+            <a:off x="640080" y="3648456"/>
+            <a:ext cx="10908792" cy="932688"/>
+          </a:xfrm>
+          <a:prstGeom prst="rect">
+            <a:avLst/>
+          </a:prstGeom>
+          <a:solidFill>
+            <a:srgbClr val="F4F4F4"/>
+          </a:solidFill>
+          <a:ln/>
+        </p:spPr>
+      </p:sp>
+      <p:sp>
+        <p:nvSpPr>
+          <p:cNvPr id="12" name="Text 10"/>
+          <p:cNvSpPr/>
+          <p:nvPr/>
+        </p:nvSpPr>
+        <p:spPr>
+          <a:xfrm>
+            <a:off x="868680" y="3648456"/>
+            <a:ext cx="822960" cy="932688"/>
+          </a:xfrm>
+          <a:prstGeom prst="rect">
+            <a:avLst/>
+          </a:prstGeom>
+          <a:noFill/>
+          <a:ln/>
+        </p:spPr>
+        <p:txBody>
+          <a:bodyPr wrap="square" rtlCol="0" anchor="ctr"/>
+          <a:lstStyle/>
+          <a:p>
+            <a:pPr indent="0" marL="0">
+              <a:buNone/>
+            </a:pPr>
+            <a:r>
+              <a:rPr lang="en-US" sz="2600" b="1" dirty="0">
+                <a:solidFill>
+                  <a:srgbClr val="8B0000"/>
+                </a:solidFill>
+                <a:latin typeface="Cambria" pitchFamily="34" charset="0"/>
+                <a:ea typeface="Cambria" pitchFamily="34" charset="-122"/>
+                <a:cs typeface="Cambria" pitchFamily="34" charset="-120"/>
+              </a:rPr>
+              <a:t>3</a:t>
+            </a:r>
+            <a:endParaRPr lang="en-US" sz="2600" dirty="0"/>
+          </a:p>
+        </p:txBody>
+      </p:sp>
+      <p:sp>
+        <p:nvSpPr>
+          <p:cNvPr id="13" name="Text 11"/>
+          <p:cNvSpPr/>
+          <p:nvPr/>
+        </p:nvSpPr>
+        <p:spPr>
+          <a:xfrm>
+            <a:off x="1828800" y="3648456"/>
+            <a:ext cx="9509760" cy="932688"/>
+          </a:xfrm>
+          <a:prstGeom prst="rect">
+            <a:avLst/>
+          </a:prstGeom>
+          <a:noFill/>
+          <a:ln/>
+        </p:spPr>
+        <p:txBody>
+          <a:bodyPr wrap="square" rtlCol="0" anchor="ctr"/>
+          <a:lstStyle/>
+          <a:p>
+            <a:pPr indent="0" marL="0">
+              <a:buNone/>
+            </a:pPr>
+            <a:r>
+              <a:rPr lang="en-US" sz="1600" dirty="0">
+                <a:solidFill>
+                  <a:srgbClr val="1A1A1A"/>
+                </a:solidFill>
+                <a:latin typeface="Calibri" pitchFamily="34" charset="0"/>
+                <a:ea typeface="Calibri" pitchFamily="34" charset="-122"/>
+                <a:cs typeface="Calibri" pitchFamily="34" charset="-120"/>
+              </a:rPr>
+              <a:t>Increase police presence during nighttime hours</a:t>
+            </a:r>
+            <a:endParaRPr lang="en-US" sz="1600" dirty="0"/>
+          </a:p>
+        </p:txBody>
+      </p:sp>
+      <p:sp>
+        <p:nvSpPr>
+          <p:cNvPr id="14" name="Shape 12"/>
+          <p:cNvSpPr/>
+          <p:nvPr/>
+        </p:nvSpPr>
+        <p:spPr>
+          <a:xfrm>
+            <a:off x="640080" y="4764024"/>
+            <a:ext cx="10908792" cy="932688"/>
+          </a:xfrm>
+          <a:prstGeom prst="rect">
+            <a:avLst/>
+          </a:prstGeom>
+          <a:solidFill>
+            <a:srgbClr val="F4F4F4"/>
+          </a:solidFill>
+          <a:ln/>
+        </p:spPr>
+      </p:sp>
+      <p:sp>
+        <p:nvSpPr>
+          <p:cNvPr id="15" name="Text 13"/>
+          <p:cNvSpPr/>
+          <p:nvPr/>
+        </p:nvSpPr>
+        <p:spPr>
+          <a:xfrm>
+            <a:off x="868680" y="4764024"/>
+            <a:ext cx="822960" cy="932688"/>
+          </a:xfrm>
+          <a:prstGeom prst="rect">
+            <a:avLst/>
+          </a:prstGeom>
+          <a:noFill/>
+          <a:ln/>
+        </p:spPr>
+        <p:txBody>
+          <a:bodyPr wrap="square" rtlCol="0" anchor="ctr"/>
+          <a:lstStyle/>
+          <a:p>
+            <a:pPr indent="0" marL="0">
+              <a:buNone/>
+            </a:pPr>
+            <a:r>
+              <a:rPr lang="en-US" sz="2600" b="1" dirty="0">
+                <a:solidFill>
+                  <a:srgbClr val="8B0000"/>
+                </a:solidFill>
+                <a:latin typeface="Cambria" pitchFamily="34" charset="0"/>
+                <a:ea typeface="Cambria" pitchFamily="34" charset="-122"/>
+                <a:cs typeface="Cambria" pitchFamily="34" charset="-120"/>
+              </a:rPr>
+              <a:t>4</a:t>
+            </a:r>
+            <a:endParaRPr lang="en-US" sz="2600" dirty="0"/>
+          </a:p>
+        </p:txBody>
+      </p:sp>
+      <p:sp>
+        <p:nvSpPr>
+          <p:cNvPr id="16" name="Text 14"/>
+          <p:cNvSpPr/>
+          <p:nvPr/>
+        </p:nvSpPr>
+        <p:spPr>
+          <a:xfrm>
+            <a:off x="1828800" y="4764024"/>
+            <a:ext cx="9509760" cy="932688"/>
+          </a:xfrm>
+          <a:prstGeom prst="rect">
+            <a:avLst/>
+          </a:prstGeom>
+          <a:noFill/>
+          <a:ln/>
+        </p:spPr>
+        <p:txBody>
+          <a:bodyPr wrap="square" rtlCol="0" anchor="ctr"/>
+          <a:lstStyle/>
+          <a:p>
+            <a:pPr indent="0" marL="0">
+              <a:buNone/>
+            </a:pPr>
+            <a:r>
+              <a:rPr lang="en-US" sz="1600" dirty="0">
+                <a:solidFill>
+                  <a:srgbClr val="1A1A1A"/>
+                </a:solidFill>
+                <a:latin typeface="Calibri" pitchFamily="34" charset="0"/>
+                <a:ea typeface="Calibri" pitchFamily="34" charset="-122"/>
+                <a:cs typeface="Calibri" pitchFamily="34" charset="-120"/>
+              </a:rPr>
+              <a:t>Continue monitoring crime trends to support future decision-making</a:t>
+            </a:r>
+            <a:endParaRPr lang="en-US" sz="1600" dirty="0"/>
+          </a:p>
+        </p:txBody>
+      </p:sp>
+      <p:sp>
+        <p:nvSpPr>
+          <p:cNvPr id="17" name="Text 15"/>
+          <p:cNvSpPr/>
+          <p:nvPr/>
+        </p:nvSpPr>
+        <p:spPr>
+          <a:xfrm>
+            <a:off x="640080" y="5925312"/>
+            <a:ext cx="10908792" cy="502920"/>
+          </a:xfrm>
+          <a:prstGeom prst="rect">
+            <a:avLst/>
+          </a:prstGeom>
+          <a:noFill/>
+          <a:ln/>
+        </p:spPr>
+        <p:txBody>
+          <a:bodyPr wrap="square" rtlCol="0" anchor="t"/>
+          <a:lstStyle/>
+          <a:p>
+            <a:pPr indent="0" marL="0">
+              <a:buNone/>
+            </a:pPr>
+            <a:r>
+              <a:rPr lang="en-US" sz="1150" i="1" dirty="0">
+                <a:solidFill>
+                  <a:srgbClr val="5A5A5A"/>
+                </a:solidFill>
+                <a:latin typeface="Calibri" pitchFamily="34" charset="0"/>
+                <a:ea typeface="Calibri" pitchFamily="34" charset="-122"/>
+                <a:cs typeface="Calibri" pitchFamily="34" charset="-120"/>
+              </a:rPr>
+              <a:t>Similar strategies — targeted night patrols and vehicle theft-prevention campaigns — are already used in many major U.S. cities, supporting the practicality of these recommendations.</a:t>
+            </a:r>
+            <a:endParaRPr lang="en-US" sz="1150" dirty="0"/>
+          </a:p>
+        </p:txBody>
+      </p:sp>
+      <p:sp>
+        <p:nvSpPr>
+          <p:cNvPr id="18" name="Text 16"/>
           <p:cNvSpPr/>
           <p:nvPr/>
         </p:nvSpPr>
@@ -2647,13 +3984,13 @@
           <a:bodyPr wrap="square" rtlCol="0" anchor="ctr"/>
           <a:lstStyle/>
           <a:p>
-            <a:pPr marL="0" indent="0" algn="r">
+            <a:pPr algn="r" indent="0" marL="0">
               <a:buNone/>
             </a:pPr>
             <a:r>
               <a:rPr lang="en-US" sz="1000" dirty="0">
                 <a:solidFill>
-                  <a:srgbClr val="FFFFFF"/>
+                  <a:srgbClr val="AAAAAA"/>
                 </a:solidFill>
                 <a:latin typeface="Calibri" pitchFamily="34" charset="0"/>
                 <a:ea typeface="Calibri" pitchFamily="34" charset="-122"/>
@@ -2681,7 +4018,6 @@
         <a:solidFill>
           <a:srgbClr val="FFFFFF"/>
         </a:solidFill>
-        <a:effectLst/>
       </p:bgPr>
     </p:bg>
     <p:spTree>
@@ -2700,7 +4036,27 @@
       </p:grpSpPr>
       <p:sp>
         <p:nvSpPr>
-          <p:cNvPr id="2" name="Text 0"/>
+          <p:cNvPr id="2" name="Shape 0"/>
+          <p:cNvSpPr/>
+          <p:nvPr/>
+        </p:nvSpPr>
+        <p:spPr>
+          <a:xfrm>
+            <a:off x="0" y="0"/>
+            <a:ext cx="12188952" cy="128016"/>
+          </a:xfrm>
+          <a:prstGeom prst="rect">
+            <a:avLst/>
+          </a:prstGeom>
+          <a:solidFill>
+            <a:srgbClr val="8B0000"/>
+          </a:solidFill>
+          <a:ln/>
+        </p:spPr>
+      </p:sp>
+      <p:sp>
+        <p:nvSpPr>
+          <p:cNvPr id="3" name="Text 1"/>
           <p:cNvSpPr/>
           <p:nvPr/>
         </p:nvSpPr>
@@ -2719,7 +4075,7 @@
           <a:bodyPr wrap="square" rtlCol="0" anchor="ctr"/>
           <a:lstStyle/>
           <a:p>
-            <a:pPr marL="0" indent="0">
+            <a:pPr indent="0" marL="0">
               <a:buNone/>
             </a:pPr>
             <a:r>
@@ -2731,7 +4087,7 @@
                 <a:ea typeface="Cambria" pitchFamily="34" charset="-122"/>
                 <a:cs typeface="Cambria" pitchFamily="34" charset="-120"/>
               </a:rPr>
-              <a:t>Summary</a:t>
+              <a:t>Next Steps</a:t>
             </a:r>
             <a:endParaRPr lang="en-US" sz="3200" dirty="0"/>
           </a:p>
@@ -2739,14 +4095,34 @@
       </p:sp>
       <p:sp>
         <p:nvSpPr>
-          <p:cNvPr id="3" name="Shape 1"/>
-          <p:cNvSpPr/>
-          <p:nvPr/>
-        </p:nvSpPr>
-        <p:spPr>
-          <a:xfrm>
-            <a:off x="640080" y="1417320"/>
-            <a:ext cx="5349240" cy="1417320"/>
+          <p:cNvPr id="4" name="Shape 2"/>
+          <p:cNvSpPr/>
+          <p:nvPr/>
+        </p:nvSpPr>
+        <p:spPr>
+          <a:xfrm>
+            <a:off x="658368" y="1133856"/>
+            <a:ext cx="822960" cy="54864"/>
+          </a:xfrm>
+          <a:prstGeom prst="rect">
+            <a:avLst/>
+          </a:prstGeom>
+          <a:solidFill>
+            <a:srgbClr val="8B0000"/>
+          </a:solidFill>
+          <a:ln/>
+        </p:spPr>
+      </p:sp>
+      <p:sp>
+        <p:nvSpPr>
+          <p:cNvPr id="5" name="Shape 3"/>
+          <p:cNvSpPr/>
+          <p:nvPr/>
+        </p:nvSpPr>
+        <p:spPr>
+          <a:xfrm>
+            <a:off x="640080" y="1645920"/>
+            <a:ext cx="10908792" cy="1051560"/>
           </a:xfrm>
           <a:prstGeom prst="rect">
             <a:avLst/>
@@ -2756,24 +4132,17 @@
           </a:solidFill>
           <a:ln/>
         </p:spPr>
-        <p:txBody>
-          <a:bodyPr/>
-          <a:lstStyle/>
-          <a:p>
-            <a:endParaRPr lang="en-BH"/>
-          </a:p>
-        </p:txBody>
-      </p:sp>
-      <p:sp>
-        <p:nvSpPr>
-          <p:cNvPr id="4" name="Text 2"/>
-          <p:cNvSpPr/>
-          <p:nvPr/>
-        </p:nvSpPr>
-        <p:spPr>
-          <a:xfrm>
-            <a:off x="960120" y="1417320"/>
-            <a:ext cx="4846320" cy="1417320"/>
+      </p:sp>
+      <p:sp>
+        <p:nvSpPr>
+          <p:cNvPr id="6" name="Text 4"/>
+          <p:cNvSpPr/>
+          <p:nvPr/>
+        </p:nvSpPr>
+        <p:spPr>
+          <a:xfrm>
+            <a:off x="868680" y="1645920"/>
+            <a:ext cx="822960" cy="1051560"/>
           </a:xfrm>
           <a:prstGeom prst="rect">
             <a:avLst/>
@@ -2785,11 +4154,50 @@
           <a:bodyPr wrap="square" rtlCol="0" anchor="ctr"/>
           <a:lstStyle/>
           <a:p>
-            <a:pPr marL="0" indent="0">
+            <a:pPr indent="0" marL="0">
               <a:buNone/>
             </a:pPr>
             <a:r>
-              <a:rPr lang="en-US" sz="1500" dirty="0">
+              <a:rPr lang="en-US" sz="3000" b="1" dirty="0">
+                <a:solidFill>
+                  <a:srgbClr val="8B0000"/>
+                </a:solidFill>
+                <a:latin typeface="Cambria" pitchFamily="34" charset="0"/>
+                <a:ea typeface="Cambria" pitchFamily="34" charset="-122"/>
+                <a:cs typeface="Cambria" pitchFamily="34" charset="-120"/>
+              </a:rPr>
+              <a:t>1</a:t>
+            </a:r>
+            <a:endParaRPr lang="en-US" sz="3000" dirty="0"/>
+          </a:p>
+        </p:txBody>
+      </p:sp>
+      <p:sp>
+        <p:nvSpPr>
+          <p:cNvPr id="7" name="Text 5"/>
+          <p:cNvSpPr/>
+          <p:nvPr/>
+        </p:nvSpPr>
+        <p:spPr>
+          <a:xfrm>
+            <a:off x="1828800" y="1645920"/>
+            <a:ext cx="9509760" cy="1051560"/>
+          </a:xfrm>
+          <a:prstGeom prst="rect">
+            <a:avLst/>
+          </a:prstGeom>
+          <a:noFill/>
+          <a:ln/>
+        </p:spPr>
+        <p:txBody>
+          <a:bodyPr wrap="square" rtlCol="0" anchor="ctr"/>
+          <a:lstStyle/>
+          <a:p>
+            <a:pPr indent="0" marL="0">
+              <a:buNone/>
+            </a:pPr>
+            <a:r>
+              <a:rPr lang="en-US" sz="1700" dirty="0">
                 <a:solidFill>
                   <a:srgbClr val="1A1A1A"/>
                 </a:solidFill>
@@ -2797,22 +4205,22 @@
                 <a:ea typeface="Calibri" pitchFamily="34" charset="-122"/>
                 <a:cs typeface="Calibri" pitchFamily="34" charset="-120"/>
               </a:rPr>
-              <a:t>More than one million crime incidents were analyzed</a:t>
-            </a:r>
-            <a:endParaRPr lang="en-US" sz="1500" dirty="0"/>
-          </a:p>
-        </p:txBody>
-      </p:sp>
-      <p:sp>
-        <p:nvSpPr>
-          <p:cNvPr id="5" name="Shape 3"/>
-          <p:cNvSpPr/>
-          <p:nvPr/>
-        </p:nvSpPr>
-        <p:spPr>
-          <a:xfrm>
-            <a:off x="6309360" y="1417320"/>
-            <a:ext cx="5349240" cy="1417320"/>
+              <a:t>Build an interactive Streamlit dashboard for real-time monitoring</a:t>
+            </a:r>
+            <a:endParaRPr lang="en-US" sz="1700" dirty="0"/>
+          </a:p>
+        </p:txBody>
+      </p:sp>
+      <p:sp>
+        <p:nvSpPr>
+          <p:cNvPr id="8" name="Shape 6"/>
+          <p:cNvSpPr/>
+          <p:nvPr/>
+        </p:nvSpPr>
+        <p:spPr>
+          <a:xfrm>
+            <a:off x="640080" y="2926080"/>
+            <a:ext cx="10908792" cy="1051560"/>
           </a:xfrm>
           <a:prstGeom prst="rect">
             <a:avLst/>
@@ -2822,24 +4230,17 @@
           </a:solidFill>
           <a:ln/>
         </p:spPr>
-        <p:txBody>
-          <a:bodyPr/>
-          <a:lstStyle/>
-          <a:p>
-            <a:endParaRPr lang="en-BH"/>
-          </a:p>
-        </p:txBody>
-      </p:sp>
-      <p:sp>
-        <p:nvSpPr>
-          <p:cNvPr id="6" name="Text 4"/>
-          <p:cNvSpPr/>
-          <p:nvPr/>
-        </p:nvSpPr>
-        <p:spPr>
-          <a:xfrm>
-            <a:off x="6629400" y="1417320"/>
-            <a:ext cx="4846320" cy="1417320"/>
+      </p:sp>
+      <p:sp>
+        <p:nvSpPr>
+          <p:cNvPr id="9" name="Text 7"/>
+          <p:cNvSpPr/>
+          <p:nvPr/>
+        </p:nvSpPr>
+        <p:spPr>
+          <a:xfrm>
+            <a:off x="868680" y="2926080"/>
+            <a:ext cx="822960" cy="1051560"/>
           </a:xfrm>
           <a:prstGeom prst="rect">
             <a:avLst/>
@@ -2851,11 +4252,50 @@
           <a:bodyPr wrap="square" rtlCol="0" anchor="ctr"/>
           <a:lstStyle/>
           <a:p>
-            <a:pPr marL="0" indent="0">
+            <a:pPr indent="0" marL="0">
               <a:buNone/>
             </a:pPr>
             <a:r>
-              <a:rPr lang="en-US" sz="1500" dirty="0">
+              <a:rPr lang="en-US" sz="3000" b="1" dirty="0">
+                <a:solidFill>
+                  <a:srgbClr val="8B0000"/>
+                </a:solidFill>
+                <a:latin typeface="Cambria" pitchFamily="34" charset="0"/>
+                <a:ea typeface="Cambria" pitchFamily="34" charset="-122"/>
+                <a:cs typeface="Cambria" pitchFamily="34" charset="-120"/>
+              </a:rPr>
+              <a:t>2</a:t>
+            </a:r>
+            <a:endParaRPr lang="en-US" sz="3000" dirty="0"/>
+          </a:p>
+        </p:txBody>
+      </p:sp>
+      <p:sp>
+        <p:nvSpPr>
+          <p:cNvPr id="10" name="Text 8"/>
+          <p:cNvSpPr/>
+          <p:nvPr/>
+        </p:nvSpPr>
+        <p:spPr>
+          <a:xfrm>
+            <a:off x="1828800" y="2926080"/>
+            <a:ext cx="9509760" cy="1051560"/>
+          </a:xfrm>
+          <a:prstGeom prst="rect">
+            <a:avLst/>
+          </a:prstGeom>
+          <a:noFill/>
+          <a:ln/>
+        </p:spPr>
+        <p:txBody>
+          <a:bodyPr wrap="square" rtlCol="0" anchor="ctr"/>
+          <a:lstStyle/>
+          <a:p>
+            <a:pPr indent="0" marL="0">
+              <a:buNone/>
+            </a:pPr>
+            <a:r>
+              <a:rPr lang="en-US" sz="1700" dirty="0">
                 <a:solidFill>
                   <a:srgbClr val="1A1A1A"/>
                 </a:solidFill>
@@ -2863,22 +4303,22 @@
                 <a:ea typeface="Calibri" pitchFamily="34" charset="-122"/>
                 <a:cs typeface="Calibri" pitchFamily="34" charset="-120"/>
               </a:rPr>
-              <a:t>Vehicle Theft was the most common crime</a:t>
-            </a:r>
-            <a:endParaRPr lang="en-US" sz="1500" dirty="0"/>
-          </a:p>
-        </p:txBody>
-      </p:sp>
-      <p:sp>
-        <p:nvSpPr>
-          <p:cNvPr id="7" name="Shape 5"/>
-          <p:cNvSpPr/>
-          <p:nvPr/>
-        </p:nvSpPr>
-        <p:spPr>
-          <a:xfrm>
-            <a:off x="640080" y="3154680"/>
-            <a:ext cx="5349240" cy="1417320"/>
+              <a:t>Bring in 2025 data as the year becomes fully available</a:t>
+            </a:r>
+            <a:endParaRPr lang="en-US" sz="1700" dirty="0"/>
+          </a:p>
+        </p:txBody>
+      </p:sp>
+      <p:sp>
+        <p:nvSpPr>
+          <p:cNvPr id="11" name="Shape 9"/>
+          <p:cNvSpPr/>
+          <p:nvPr/>
+        </p:nvSpPr>
+        <p:spPr>
+          <a:xfrm>
+            <a:off x="640080" y="4206240"/>
+            <a:ext cx="10908792" cy="1051560"/>
           </a:xfrm>
           <a:prstGeom prst="rect">
             <a:avLst/>
@@ -2888,24 +4328,17 @@
           </a:solidFill>
           <a:ln/>
         </p:spPr>
-        <p:txBody>
-          <a:bodyPr/>
-          <a:lstStyle/>
-          <a:p>
-            <a:endParaRPr lang="en-BH"/>
-          </a:p>
-        </p:txBody>
-      </p:sp>
-      <p:sp>
-        <p:nvSpPr>
-          <p:cNvPr id="8" name="Text 6"/>
-          <p:cNvSpPr/>
-          <p:nvPr/>
-        </p:nvSpPr>
-        <p:spPr>
-          <a:xfrm>
-            <a:off x="960120" y="3154680"/>
-            <a:ext cx="4846320" cy="1417320"/>
+      </p:sp>
+      <p:sp>
+        <p:nvSpPr>
+          <p:cNvPr id="12" name="Text 10"/>
+          <p:cNvSpPr/>
+          <p:nvPr/>
+        </p:nvSpPr>
+        <p:spPr>
+          <a:xfrm>
+            <a:off x="868680" y="4206240"/>
+            <a:ext cx="822960" cy="1051560"/>
           </a:xfrm>
           <a:prstGeom prst="rect">
             <a:avLst/>
@@ -2917,11 +4350,50 @@
           <a:bodyPr wrap="square" rtlCol="0" anchor="ctr"/>
           <a:lstStyle/>
           <a:p>
-            <a:pPr marL="0" indent="0">
+            <a:pPr indent="0" marL="0">
               <a:buNone/>
             </a:pPr>
             <a:r>
-              <a:rPr lang="en-US" sz="1500" dirty="0">
+              <a:rPr lang="en-US" sz="3000" b="1" dirty="0">
+                <a:solidFill>
+                  <a:srgbClr val="8B0000"/>
+                </a:solidFill>
+                <a:latin typeface="Cambria" pitchFamily="34" charset="0"/>
+                <a:ea typeface="Cambria" pitchFamily="34" charset="-122"/>
+                <a:cs typeface="Cambria" pitchFamily="34" charset="-120"/>
+              </a:rPr>
+              <a:t>3</a:t>
+            </a:r>
+            <a:endParaRPr lang="en-US" sz="3000" dirty="0"/>
+          </a:p>
+        </p:txBody>
+      </p:sp>
+      <p:sp>
+        <p:nvSpPr>
+          <p:cNvPr id="13" name="Text 11"/>
+          <p:cNvSpPr/>
+          <p:nvPr/>
+        </p:nvSpPr>
+        <p:spPr>
+          <a:xfrm>
+            <a:off x="1828800" y="4206240"/>
+            <a:ext cx="9509760" cy="1051560"/>
+          </a:xfrm>
+          <a:prstGeom prst="rect">
+            <a:avLst/>
+          </a:prstGeom>
+          <a:noFill/>
+          <a:ln/>
+        </p:spPr>
+        <p:txBody>
+          <a:bodyPr wrap="square" rtlCol="0" anchor="ctr"/>
+          <a:lstStyle/>
+          <a:p>
+            <a:pPr indent="0" marL="0">
+              <a:buNone/>
+            </a:pPr>
+            <a:r>
+              <a:rPr lang="en-US" sz="1700" dirty="0">
                 <a:solidFill>
                   <a:srgbClr val="1A1A1A"/>
                 </a:solidFill>
@@ -2929,22 +4401,22 @@
                 <a:ea typeface="Calibri" pitchFamily="34" charset="-122"/>
                 <a:cs typeface="Calibri" pitchFamily="34" charset="-120"/>
               </a:rPr>
-              <a:t>Central recorded the highest crime rate</a:t>
-            </a:r>
-            <a:endParaRPr lang="en-US" sz="1500" dirty="0"/>
-          </a:p>
-        </p:txBody>
-      </p:sp>
-      <p:sp>
-        <p:nvSpPr>
-          <p:cNvPr id="9" name="Shape 7"/>
-          <p:cNvSpPr/>
-          <p:nvPr/>
-        </p:nvSpPr>
-        <p:spPr>
-          <a:xfrm>
-            <a:off x="6309360" y="3154680"/>
-            <a:ext cx="5349240" cy="1417320"/>
+              <a:t>Add demographic and victim data for deeper analysis</a:t>
+            </a:r>
+            <a:endParaRPr lang="en-US" sz="1700" dirty="0"/>
+          </a:p>
+        </p:txBody>
+      </p:sp>
+      <p:sp>
+        <p:nvSpPr>
+          <p:cNvPr id="14" name="Shape 12"/>
+          <p:cNvSpPr/>
+          <p:nvPr/>
+        </p:nvSpPr>
+        <p:spPr>
+          <a:xfrm>
+            <a:off x="640080" y="5486400"/>
+            <a:ext cx="10908792" cy="1051560"/>
           </a:xfrm>
           <a:prstGeom prst="rect">
             <a:avLst/>
@@ -2954,24 +4426,17 @@
           </a:solidFill>
           <a:ln/>
         </p:spPr>
-        <p:txBody>
-          <a:bodyPr/>
-          <a:lstStyle/>
-          <a:p>
-            <a:endParaRPr lang="en-BH"/>
-          </a:p>
-        </p:txBody>
-      </p:sp>
-      <p:sp>
-        <p:nvSpPr>
-          <p:cNvPr id="10" name="Text 8"/>
-          <p:cNvSpPr/>
-          <p:nvPr/>
-        </p:nvSpPr>
-        <p:spPr>
-          <a:xfrm>
-            <a:off x="6629400" y="3154680"/>
-            <a:ext cx="4846320" cy="1417320"/>
+      </p:sp>
+      <p:sp>
+        <p:nvSpPr>
+          <p:cNvPr id="15" name="Text 13"/>
+          <p:cNvSpPr/>
+          <p:nvPr/>
+        </p:nvSpPr>
+        <p:spPr>
+          <a:xfrm>
+            <a:off x="868680" y="5486400"/>
+            <a:ext cx="822960" cy="1051560"/>
           </a:xfrm>
           <a:prstGeom prst="rect">
             <a:avLst/>
@@ -2983,11 +4448,50 @@
           <a:bodyPr wrap="square" rtlCol="0" anchor="ctr"/>
           <a:lstStyle/>
           <a:p>
-            <a:pPr marL="0" indent="0">
+            <a:pPr indent="0" marL="0">
               <a:buNone/>
             </a:pPr>
             <a:r>
-              <a:rPr lang="en-US" sz="1500" dirty="0">
+              <a:rPr lang="en-US" sz="3000" b="1" dirty="0">
+                <a:solidFill>
+                  <a:srgbClr val="8B0000"/>
+                </a:solidFill>
+                <a:latin typeface="Cambria" pitchFamily="34" charset="0"/>
+                <a:ea typeface="Cambria" pitchFamily="34" charset="-122"/>
+                <a:cs typeface="Cambria" pitchFamily="34" charset="-120"/>
+              </a:rPr>
+              <a:t>4</a:t>
+            </a:r>
+            <a:endParaRPr lang="en-US" sz="3000" dirty="0"/>
+          </a:p>
+        </p:txBody>
+      </p:sp>
+      <p:sp>
+        <p:nvSpPr>
+          <p:cNvPr id="16" name="Text 14"/>
+          <p:cNvSpPr/>
+          <p:nvPr/>
+        </p:nvSpPr>
+        <p:spPr>
+          <a:xfrm>
+            <a:off x="1828800" y="5486400"/>
+            <a:ext cx="9509760" cy="1051560"/>
+          </a:xfrm>
+          <a:prstGeom prst="rect">
+            <a:avLst/>
+          </a:prstGeom>
+          <a:noFill/>
+          <a:ln/>
+        </p:spPr>
+        <p:txBody>
+          <a:bodyPr wrap="square" rtlCol="0" anchor="ctr"/>
+          <a:lstStyle/>
+          <a:p>
+            <a:pPr indent="0" marL="0">
+              <a:buNone/>
+            </a:pPr>
+            <a:r>
+              <a:rPr lang="en-US" sz="1700" dirty="0">
                 <a:solidFill>
                   <a:srgbClr val="1A1A1A"/>
                 </a:solidFill>
@@ -2995,147 +4499,15 @@
                 <a:ea typeface="Calibri" pitchFamily="34" charset="-122"/>
                 <a:cs typeface="Calibri" pitchFamily="34" charset="-120"/>
               </a:rPr>
-              <a:t>Crime peaked in 2022</a:t>
-            </a:r>
-            <a:endParaRPr lang="en-US" sz="1500" dirty="0"/>
-          </a:p>
-        </p:txBody>
-      </p:sp>
-      <p:sp>
-        <p:nvSpPr>
-          <p:cNvPr id="11" name="Shape 9"/>
-          <p:cNvSpPr/>
-          <p:nvPr/>
-        </p:nvSpPr>
-        <p:spPr>
-          <a:xfrm>
-            <a:off x="640080" y="4892040"/>
-            <a:ext cx="5349240" cy="1417320"/>
-          </a:xfrm>
-          <a:prstGeom prst="rect">
-            <a:avLst/>
-          </a:prstGeom>
-          <a:solidFill>
-            <a:srgbClr val="F4F4F4"/>
-          </a:solidFill>
-          <a:ln/>
-        </p:spPr>
-        <p:txBody>
-          <a:bodyPr/>
-          <a:lstStyle/>
-          <a:p>
-            <a:endParaRPr lang="en-BH"/>
-          </a:p>
-        </p:txBody>
-      </p:sp>
-      <p:sp>
-        <p:nvSpPr>
-          <p:cNvPr id="12" name="Text 10"/>
-          <p:cNvSpPr/>
-          <p:nvPr/>
-        </p:nvSpPr>
-        <p:spPr>
-          <a:xfrm>
-            <a:off x="960120" y="4892040"/>
-            <a:ext cx="4846320" cy="1417320"/>
-          </a:xfrm>
-          <a:prstGeom prst="rect">
-            <a:avLst/>
-          </a:prstGeom>
-          <a:noFill/>
-          <a:ln/>
-        </p:spPr>
-        <p:txBody>
-          <a:bodyPr wrap="square" rtlCol="0" anchor="ctr"/>
-          <a:lstStyle/>
-          <a:p>
-            <a:pPr marL="0" indent="0">
-              <a:buNone/>
-            </a:pPr>
-            <a:r>
-              <a:rPr lang="en-US" sz="1500" dirty="0">
-                <a:solidFill>
-                  <a:srgbClr val="1A1A1A"/>
-                </a:solidFill>
-                <a:latin typeface="Calibri" pitchFamily="34" charset="0"/>
-                <a:ea typeface="Calibri" pitchFamily="34" charset="-122"/>
-                <a:cs typeface="Calibri" pitchFamily="34" charset="-120"/>
-              </a:rPr>
-              <a:t>Most crimes occurred at night</a:t>
-            </a:r>
-            <a:endParaRPr lang="en-US" sz="1500" dirty="0"/>
-          </a:p>
-        </p:txBody>
-      </p:sp>
-      <p:sp>
-        <p:nvSpPr>
-          <p:cNvPr id="13" name="Shape 11"/>
-          <p:cNvSpPr/>
-          <p:nvPr/>
-        </p:nvSpPr>
-        <p:spPr>
-          <a:xfrm>
-            <a:off x="6309360" y="4892040"/>
-            <a:ext cx="5349240" cy="1417320"/>
-          </a:xfrm>
-          <a:prstGeom prst="rect">
-            <a:avLst/>
-          </a:prstGeom>
-          <a:solidFill>
-            <a:srgbClr val="F4F4F4"/>
-          </a:solidFill>
-          <a:ln/>
-        </p:spPr>
-        <p:txBody>
-          <a:bodyPr/>
-          <a:lstStyle/>
-          <a:p>
-            <a:endParaRPr lang="en-BH"/>
-          </a:p>
-        </p:txBody>
-      </p:sp>
-      <p:sp>
-        <p:nvSpPr>
-          <p:cNvPr id="14" name="Text 12"/>
-          <p:cNvSpPr/>
-          <p:nvPr/>
-        </p:nvSpPr>
-        <p:spPr>
-          <a:xfrm>
-            <a:off x="6629400" y="4892040"/>
-            <a:ext cx="4846320" cy="1417320"/>
-          </a:xfrm>
-          <a:prstGeom prst="rect">
-            <a:avLst/>
-          </a:prstGeom>
-          <a:noFill/>
-          <a:ln/>
-        </p:spPr>
-        <p:txBody>
-          <a:bodyPr wrap="square" rtlCol="0" anchor="ctr"/>
-          <a:lstStyle/>
-          <a:p>
-            <a:pPr marL="0" indent="0">
-              <a:buNone/>
-            </a:pPr>
-            <a:r>
-              <a:rPr lang="en-US" sz="1500" dirty="0">
-                <a:solidFill>
-                  <a:srgbClr val="1A1A1A"/>
-                </a:solidFill>
-                <a:latin typeface="Calibri" pitchFamily="34" charset="0"/>
-                <a:ea typeface="Calibri" pitchFamily="34" charset="-122"/>
-                <a:cs typeface="Calibri" pitchFamily="34" charset="-120"/>
-              </a:rPr>
-              <a:t>Vehicle-related crimes were common in Central</a:t>
-            </a:r>
-            <a:endParaRPr lang="en-US" sz="1500" dirty="0"/>
-          </a:p>
-        </p:txBody>
-      </p:sp>
-      <p:sp>
-        <p:nvSpPr>
-          <p:cNvPr id="15" name="Text 13"/>
+              <a:t>Investigate what drives the summer crime spike</a:t>
+            </a:r>
+            <a:endParaRPr lang="en-US" sz="1700" dirty="0"/>
+          </a:p>
+        </p:txBody>
+      </p:sp>
+      <p:sp>
+        <p:nvSpPr>
+          <p:cNvPr id="17" name="Text 15"/>
           <p:cNvSpPr/>
           <p:nvPr/>
         </p:nvSpPr>
@@ -3154,7 +4526,7 @@
           <a:bodyPr wrap="square" rtlCol="0" anchor="ctr"/>
           <a:lstStyle/>
           <a:p>
-            <a:pPr marL="0" indent="0" algn="r">
+            <a:pPr algn="r" indent="0" marL="0">
               <a:buNone/>
             </a:pPr>
             <a:r>
@@ -3188,7 +4560,6 @@
         <a:solidFill>
           <a:srgbClr val="FFFFFF"/>
         </a:solidFill>
-        <a:effectLst/>
       </p:bgPr>
     </p:bg>
     <p:spTree>
@@ -3207,14 +4578,34 @@
       </p:grpSpPr>
       <p:sp>
         <p:nvSpPr>
-          <p:cNvPr id="2" name="Text 0"/>
-          <p:cNvSpPr/>
-          <p:nvPr/>
-        </p:nvSpPr>
-        <p:spPr>
-          <a:xfrm>
-            <a:off x="640080" y="457200"/>
-            <a:ext cx="10881360" cy="640080"/>
+          <p:cNvPr id="2" name="Shape 0"/>
+          <p:cNvSpPr/>
+          <p:nvPr/>
+        </p:nvSpPr>
+        <p:spPr>
+          <a:xfrm>
+            <a:off x="0" y="0"/>
+            <a:ext cx="12188952" cy="6858000"/>
+          </a:xfrm>
+          <a:prstGeom prst="rect">
+            <a:avLst/>
+          </a:prstGeom>
+          <a:solidFill>
+            <a:srgbClr val="8B0000"/>
+          </a:solidFill>
+          <a:ln/>
+        </p:spPr>
+      </p:sp>
+      <p:sp>
+        <p:nvSpPr>
+          <p:cNvPr id="3" name="Text 1"/>
+          <p:cNvSpPr/>
+          <p:nvPr/>
+        </p:nvSpPr>
+        <p:spPr>
+          <a:xfrm>
+            <a:off x="1188720" y="960120"/>
+            <a:ext cx="9811512" cy="457200"/>
           </a:xfrm>
           <a:prstGeom prst="rect">
             <a:avLst/>
@@ -3226,87 +4617,106 @@
           <a:bodyPr wrap="square" rtlCol="0" anchor="ctr"/>
           <a:lstStyle/>
           <a:p>
-            <a:pPr marL="0" indent="0">
+            <a:pPr indent="0" marL="0">
               <a:buNone/>
             </a:pPr>
             <a:r>
-              <a:rPr lang="en-US" sz="3200" b="1" dirty="0">
-                <a:solidFill>
-                  <a:srgbClr val="1A1A1A"/>
+              <a:rPr lang="en-US" sz="1500" b="1" spc="200" kern="0" dirty="0">
+                <a:solidFill>
+                  <a:srgbClr val="FFD6D6"/>
+                </a:solidFill>
+                <a:latin typeface="Calibri" pitchFamily="34" charset="0"/>
+                <a:ea typeface="Calibri" pitchFamily="34" charset="-122"/>
+                <a:cs typeface="Calibri" pitchFamily="34" charset="-120"/>
+              </a:rPr>
+              <a:t>CONCLUSION</a:t>
+            </a:r>
+            <a:endParaRPr lang="en-US" sz="1500" dirty="0"/>
+          </a:p>
+        </p:txBody>
+      </p:sp>
+      <p:sp>
+        <p:nvSpPr>
+          <p:cNvPr id="4" name="Text 2"/>
+          <p:cNvSpPr/>
+          <p:nvPr/>
+        </p:nvSpPr>
+        <p:spPr>
+          <a:xfrm>
+            <a:off x="1188720" y="1508760"/>
+            <a:ext cx="9811512" cy="2377440"/>
+          </a:xfrm>
+          <a:prstGeom prst="rect">
+            <a:avLst/>
+          </a:prstGeom>
+          <a:noFill/>
+          <a:ln/>
+        </p:spPr>
+        <p:txBody>
+          <a:bodyPr wrap="square" rtlCol="0" anchor="t"/>
+          <a:lstStyle/>
+          <a:p>
+            <a:pPr marL="342900" indent="-342900">
+              <a:spcAft>
+                <a:spcPts val="1600"/>
+              </a:spcAft>
+              <a:buSzPct val="100000"/>
+              <a:buChar char="•"/>
+            </a:pPr>
+            <a:r>
+              <a:rPr lang="en-US" sz="2100" dirty="0">
+                <a:solidFill>
+                  <a:srgbClr val="FFFFFF"/>
                 </a:solidFill>
                 <a:latin typeface="Cambria" pitchFamily="34" charset="0"/>
                 <a:ea typeface="Cambria" pitchFamily="34" charset="-122"/>
                 <a:cs typeface="Cambria" pitchFamily="34" charset="-120"/>
               </a:rPr>
-              <a:t>Recommendations</a:t>
-            </a:r>
-            <a:endParaRPr lang="en-US" sz="3200" dirty="0"/>
-          </a:p>
-        </p:txBody>
-      </p:sp>
-      <p:sp>
-        <p:nvSpPr>
-          <p:cNvPr id="3" name="Shape 1"/>
-          <p:cNvSpPr/>
-          <p:nvPr/>
-        </p:nvSpPr>
-        <p:spPr>
-          <a:xfrm>
-            <a:off x="640080" y="1645920"/>
-            <a:ext cx="10908792" cy="1051560"/>
-          </a:xfrm>
-          <a:prstGeom prst="rect">
-            <a:avLst/>
-          </a:prstGeom>
-          <a:solidFill>
-            <a:srgbClr val="F4F4F4"/>
-          </a:solidFill>
-          <a:ln/>
-        </p:spPr>
-        <p:txBody>
-          <a:bodyPr/>
-          <a:lstStyle/>
-          <a:p>
-            <a:endParaRPr lang="en-BH"/>
-          </a:p>
-        </p:txBody>
-      </p:sp>
-      <p:sp>
-        <p:nvSpPr>
-          <p:cNvPr id="4" name="Text 2"/>
-          <p:cNvSpPr/>
-          <p:nvPr/>
-        </p:nvSpPr>
-        <p:spPr>
-          <a:xfrm>
-            <a:off x="868680" y="1645920"/>
-            <a:ext cx="822960" cy="1051560"/>
-          </a:xfrm>
-          <a:prstGeom prst="rect">
-            <a:avLst/>
-          </a:prstGeom>
-          <a:noFill/>
-          <a:ln/>
-        </p:spPr>
-        <p:txBody>
-          <a:bodyPr wrap="square" rtlCol="0" anchor="ctr"/>
-          <a:lstStyle/>
-          <a:p>
-            <a:pPr marL="0" indent="0">
-              <a:buNone/>
-            </a:pPr>
-            <a:r>
-              <a:rPr lang="en-US" sz="3000" b="1" dirty="0">
-                <a:solidFill>
-                  <a:srgbClr val="8B0000"/>
+              <a:t>EDA can uncover real crime patterns from over a million records</a:t>
+            </a:r>
+            <a:endParaRPr lang="en-US" sz="2100" dirty="0"/>
+          </a:p>
+          <a:p>
+            <a:pPr marL="342900" indent="-342900">
+              <a:spcAft>
+                <a:spcPts val="1600"/>
+              </a:spcAft>
+              <a:buSzPct val="100000"/>
+              <a:buChar char="•"/>
+            </a:pPr>
+            <a:r>
+              <a:rPr lang="en-US" sz="2100" dirty="0">
+                <a:solidFill>
+                  <a:srgbClr val="FFFFFF"/>
                 </a:solidFill>
                 <a:latin typeface="Cambria" pitchFamily="34" charset="0"/>
                 <a:ea typeface="Cambria" pitchFamily="34" charset="-122"/>
                 <a:cs typeface="Cambria" pitchFamily="34" charset="-120"/>
               </a:rPr>
-              <a:t>1</a:t>
-            </a:r>
-            <a:endParaRPr lang="en-US" sz="3000" dirty="0"/>
+              <a:t>Findings point to clear priorities: Central, nighttime, vehicle crime, summer months</a:t>
+            </a:r>
+            <a:endParaRPr lang="en-US" sz="2100" dirty="0"/>
+          </a:p>
+          <a:p>
+            <a:pPr marL="342900" indent="-342900">
+              <a:spcAft>
+                <a:spcPts val="1600"/>
+              </a:spcAft>
+              <a:buSzPct val="100000"/>
+              <a:buChar char="•"/>
+            </a:pPr>
+            <a:r>
+              <a:rPr lang="en-US" sz="2100" dirty="0">
+                <a:solidFill>
+                  <a:srgbClr val="FFFFFF"/>
+                </a:solidFill>
+                <a:latin typeface="Cambria" pitchFamily="34" charset="0"/>
+                <a:ea typeface="Cambria" pitchFamily="34" charset="-122"/>
+                <a:cs typeface="Cambria" pitchFamily="34" charset="-120"/>
+              </a:rPr>
+              <a:t>Data-driven decisions support smarter resource allocation</a:t>
+            </a:r>
+            <a:endParaRPr lang="en-US" sz="2100" dirty="0"/>
           </a:p>
         </p:txBody>
       </p:sp>
@@ -3318,8 +4728,8 @@
         </p:nvSpPr>
         <p:spPr>
           <a:xfrm>
-            <a:off x="1828800" y="1645920"/>
-            <a:ext cx="9509760" cy="1051560"/>
+            <a:off x="1188720" y="5074920"/>
+            <a:ext cx="5486400" cy="457200"/>
           </a:xfrm>
           <a:prstGeom prst="rect">
             <a:avLst/>
@@ -3331,375 +4741,69 @@
           <a:bodyPr wrap="square" rtlCol="0" anchor="ctr"/>
           <a:lstStyle/>
           <a:p>
-            <a:pPr marL="0" indent="0">
+            <a:pPr indent="0" marL="0">
               <a:buNone/>
             </a:pPr>
             <a:r>
-              <a:rPr lang="en-US" sz="1700" dirty="0">
-                <a:solidFill>
-                  <a:srgbClr val="1A1A1A"/>
+              <a:rPr lang="en-US" sz="1800" i="1" dirty="0">
+                <a:solidFill>
+                  <a:srgbClr val="FFD6D6"/>
+                </a:solidFill>
+                <a:latin typeface="Cambria" pitchFamily="34" charset="0"/>
+                <a:ea typeface="Cambria" pitchFamily="34" charset="-122"/>
+                <a:cs typeface="Cambria" pitchFamily="34" charset="-120"/>
+              </a:rPr>
+              <a:t>Thank you</a:t>
+            </a:r>
+            <a:endParaRPr lang="en-US" sz="1800" dirty="0"/>
+          </a:p>
+        </p:txBody>
+      </p:sp>
+      <p:sp>
+        <p:nvSpPr>
+          <p:cNvPr id="6" name="Text 4">
+            <a:hlinkClick r:id="rId1" tooltip="View project on GitHub"/>
+          </p:cNvPr>
+          <p:cNvSpPr/>
+          <p:nvPr/>
+        </p:nvSpPr>
+        <p:spPr>
+          <a:xfrm>
+            <a:off x="1188720" y="5577840"/>
+            <a:ext cx="5486400" cy="365760"/>
+          </a:xfrm>
+          <a:prstGeom prst="rect">
+            <a:avLst/>
+          </a:prstGeom>
+          <a:noFill/>
+          <a:ln/>
+        </p:spPr>
+        <p:txBody>
+          <a:bodyPr wrap="square" rtlCol="0" anchor="ctr"/>
+          <a:lstStyle/>
+          <a:p>
+            <a:pPr indent="0" marL="0">
+              <a:buNone/>
+            </a:pPr>
+            <a:r>
+              <a:rPr lang="en-US" sz="1300" u="sng" dirty="0">
+                <a:solidFill>
+                  <a:srgbClr val="FFD6D6"/>
                 </a:solidFill>
                 <a:latin typeface="Calibri" pitchFamily="34" charset="0"/>
                 <a:ea typeface="Calibri" pitchFamily="34" charset="-122"/>
                 <a:cs typeface="Calibri" pitchFamily="34" charset="-120"/>
-              </a:rPr>
-              <a:t>Increase police patrols in Central</a:t>
-            </a:r>
-            <a:endParaRPr lang="en-US" sz="1700" dirty="0"/>
-          </a:p>
-        </p:txBody>
-      </p:sp>
-      <p:sp>
-        <p:nvSpPr>
-          <p:cNvPr id="6" name="Shape 4"/>
-          <p:cNvSpPr/>
-          <p:nvPr/>
-        </p:nvSpPr>
-        <p:spPr>
-          <a:xfrm>
-            <a:off x="640080" y="2926080"/>
-            <a:ext cx="10908792" cy="1051560"/>
-          </a:xfrm>
-          <a:prstGeom prst="rect">
-            <a:avLst/>
-          </a:prstGeom>
-          <a:solidFill>
-            <a:srgbClr val="F4F4F4"/>
-          </a:solidFill>
-          <a:ln/>
-        </p:spPr>
-        <p:txBody>
-          <a:bodyPr/>
-          <a:lstStyle/>
-          <a:p>
-            <a:endParaRPr lang="en-BH"/>
-          </a:p>
-        </p:txBody>
-      </p:sp>
-      <p:sp>
-        <p:nvSpPr>
-          <p:cNvPr id="7" name="Text 5"/>
-          <p:cNvSpPr/>
-          <p:nvPr/>
-        </p:nvSpPr>
-        <p:spPr>
-          <a:xfrm>
-            <a:off x="868680" y="2926080"/>
-            <a:ext cx="822960" cy="1051560"/>
-          </a:xfrm>
-          <a:prstGeom prst="rect">
-            <a:avLst/>
-          </a:prstGeom>
-          <a:noFill/>
-          <a:ln/>
-        </p:spPr>
-        <p:txBody>
-          <a:bodyPr wrap="square" rtlCol="0" anchor="ctr"/>
-          <a:lstStyle/>
-          <a:p>
-            <a:pPr marL="0" indent="0">
-              <a:buNone/>
-            </a:pPr>
-            <a:r>
-              <a:rPr lang="en-US" sz="3000" b="1" dirty="0">
-                <a:solidFill>
-                  <a:srgbClr val="8B0000"/>
-                </a:solidFill>
-                <a:latin typeface="Cambria" pitchFamily="34" charset="0"/>
-                <a:ea typeface="Cambria" pitchFamily="34" charset="-122"/>
-                <a:cs typeface="Cambria" pitchFamily="34" charset="-120"/>
-              </a:rPr>
-              <a:t>2</a:t>
-            </a:r>
-            <a:endParaRPr lang="en-US" sz="3000" dirty="0"/>
-          </a:p>
-        </p:txBody>
-      </p:sp>
-      <p:sp>
-        <p:nvSpPr>
-          <p:cNvPr id="8" name="Text 6"/>
-          <p:cNvSpPr/>
-          <p:nvPr/>
-        </p:nvSpPr>
-        <p:spPr>
-          <a:xfrm>
-            <a:off x="1828800" y="2926080"/>
-            <a:ext cx="9509760" cy="1051560"/>
-          </a:xfrm>
-          <a:prstGeom prst="rect">
-            <a:avLst/>
-          </a:prstGeom>
-          <a:noFill/>
-          <a:ln/>
-        </p:spPr>
-        <p:txBody>
-          <a:bodyPr wrap="square" rtlCol="0" anchor="ctr"/>
-          <a:lstStyle/>
-          <a:p>
-            <a:pPr marL="0" indent="0">
-              <a:buNone/>
-            </a:pPr>
-            <a:r>
-              <a:rPr lang="en-US" sz="1700" dirty="0">
-                <a:solidFill>
-                  <a:srgbClr val="1A1A1A"/>
-                </a:solidFill>
-                <a:latin typeface="Calibri" pitchFamily="34" charset="0"/>
-                <a:ea typeface="Calibri" pitchFamily="34" charset="-122"/>
-                <a:cs typeface="Calibri" pitchFamily="34" charset="-120"/>
-              </a:rPr>
-              <a:t>Improve vehicle theft prevention programs</a:t>
-            </a:r>
-            <a:endParaRPr lang="en-US" sz="1700" dirty="0"/>
-          </a:p>
-        </p:txBody>
-      </p:sp>
-      <p:sp>
-        <p:nvSpPr>
-          <p:cNvPr id="9" name="Shape 7"/>
-          <p:cNvSpPr/>
-          <p:nvPr/>
-        </p:nvSpPr>
-        <p:spPr>
-          <a:xfrm>
-            <a:off x="640080" y="4206240"/>
-            <a:ext cx="10908792" cy="1051560"/>
-          </a:xfrm>
-          <a:prstGeom prst="rect">
-            <a:avLst/>
-          </a:prstGeom>
-          <a:solidFill>
-            <a:srgbClr val="F4F4F4"/>
-          </a:solidFill>
-          <a:ln/>
-        </p:spPr>
-        <p:txBody>
-          <a:bodyPr/>
-          <a:lstStyle/>
-          <a:p>
-            <a:endParaRPr lang="en-BH"/>
-          </a:p>
-        </p:txBody>
-      </p:sp>
-      <p:sp>
-        <p:nvSpPr>
-          <p:cNvPr id="10" name="Text 8"/>
-          <p:cNvSpPr/>
-          <p:nvPr/>
-        </p:nvSpPr>
-        <p:spPr>
-          <a:xfrm>
-            <a:off x="868680" y="4206240"/>
-            <a:ext cx="822960" cy="1051560"/>
-          </a:xfrm>
-          <a:prstGeom prst="rect">
-            <a:avLst/>
-          </a:prstGeom>
-          <a:noFill/>
-          <a:ln/>
-        </p:spPr>
-        <p:txBody>
-          <a:bodyPr wrap="square" rtlCol="0" anchor="ctr"/>
-          <a:lstStyle/>
-          <a:p>
-            <a:pPr marL="0" indent="0">
-              <a:buNone/>
-            </a:pPr>
-            <a:r>
-              <a:rPr lang="en-US" sz="3000" b="1" dirty="0">
-                <a:solidFill>
-                  <a:srgbClr val="8B0000"/>
-                </a:solidFill>
-                <a:latin typeface="Cambria" pitchFamily="34" charset="0"/>
-                <a:ea typeface="Cambria" pitchFamily="34" charset="-122"/>
-                <a:cs typeface="Cambria" pitchFamily="34" charset="-120"/>
-              </a:rPr>
-              <a:t>3</a:t>
-            </a:r>
-            <a:endParaRPr lang="en-US" sz="3000" dirty="0"/>
-          </a:p>
-        </p:txBody>
-      </p:sp>
-      <p:sp>
-        <p:nvSpPr>
-          <p:cNvPr id="11" name="Text 9"/>
-          <p:cNvSpPr/>
-          <p:nvPr/>
-        </p:nvSpPr>
-        <p:spPr>
-          <a:xfrm>
-            <a:off x="1828800" y="4206240"/>
-            <a:ext cx="9509760" cy="1051560"/>
-          </a:xfrm>
-          <a:prstGeom prst="rect">
-            <a:avLst/>
-          </a:prstGeom>
-          <a:noFill/>
-          <a:ln/>
-        </p:spPr>
-        <p:txBody>
-          <a:bodyPr wrap="square" rtlCol="0" anchor="ctr"/>
-          <a:lstStyle/>
-          <a:p>
-            <a:pPr marL="0" indent="0">
-              <a:buNone/>
-            </a:pPr>
-            <a:r>
-              <a:rPr lang="en-US" sz="1700" dirty="0">
-                <a:solidFill>
-                  <a:srgbClr val="1A1A1A"/>
-                </a:solidFill>
-                <a:latin typeface="Calibri" pitchFamily="34" charset="0"/>
-                <a:ea typeface="Calibri" pitchFamily="34" charset="-122"/>
-                <a:cs typeface="Calibri" pitchFamily="34" charset="-120"/>
-              </a:rPr>
-              <a:t>Increase police presence during nighttime hours</a:t>
-            </a:r>
-            <a:endParaRPr lang="en-US" sz="1700" dirty="0"/>
-          </a:p>
-        </p:txBody>
-      </p:sp>
-      <p:sp>
-        <p:nvSpPr>
-          <p:cNvPr id="12" name="Shape 10"/>
-          <p:cNvSpPr/>
-          <p:nvPr/>
-        </p:nvSpPr>
-        <p:spPr>
-          <a:xfrm>
-            <a:off x="640080" y="5486400"/>
-            <a:ext cx="10908792" cy="1051560"/>
-          </a:xfrm>
-          <a:prstGeom prst="rect">
-            <a:avLst/>
-          </a:prstGeom>
-          <a:solidFill>
-            <a:srgbClr val="F4F4F4"/>
-          </a:solidFill>
-          <a:ln/>
-        </p:spPr>
-        <p:txBody>
-          <a:bodyPr/>
-          <a:lstStyle/>
-          <a:p>
-            <a:endParaRPr lang="en-BH"/>
-          </a:p>
-        </p:txBody>
-      </p:sp>
-      <p:sp>
-        <p:nvSpPr>
-          <p:cNvPr id="13" name="Text 11"/>
-          <p:cNvSpPr/>
-          <p:nvPr/>
-        </p:nvSpPr>
-        <p:spPr>
-          <a:xfrm>
-            <a:off x="868680" y="5486400"/>
-            <a:ext cx="822960" cy="1051560"/>
-          </a:xfrm>
-          <a:prstGeom prst="rect">
-            <a:avLst/>
-          </a:prstGeom>
-          <a:noFill/>
-          <a:ln/>
-        </p:spPr>
-        <p:txBody>
-          <a:bodyPr wrap="square" rtlCol="0" anchor="ctr"/>
-          <a:lstStyle/>
-          <a:p>
-            <a:pPr marL="0" indent="0">
-              <a:buNone/>
-            </a:pPr>
-            <a:r>
-              <a:rPr lang="en-US" sz="3000" b="1" dirty="0">
-                <a:solidFill>
-                  <a:srgbClr val="8B0000"/>
-                </a:solidFill>
-                <a:latin typeface="Cambria" pitchFamily="34" charset="0"/>
-                <a:ea typeface="Cambria" pitchFamily="34" charset="-122"/>
-                <a:cs typeface="Cambria" pitchFamily="34" charset="-120"/>
-              </a:rPr>
-              <a:t>4</a:t>
-            </a:r>
-            <a:endParaRPr lang="en-US" sz="3000" dirty="0"/>
-          </a:p>
-        </p:txBody>
-      </p:sp>
-      <p:sp>
-        <p:nvSpPr>
-          <p:cNvPr id="14" name="Text 12"/>
-          <p:cNvSpPr/>
-          <p:nvPr/>
-        </p:nvSpPr>
-        <p:spPr>
-          <a:xfrm>
-            <a:off x="1828800" y="5486400"/>
-            <a:ext cx="9509760" cy="1051560"/>
-          </a:xfrm>
-          <a:prstGeom prst="rect">
-            <a:avLst/>
-          </a:prstGeom>
-          <a:noFill/>
-          <a:ln/>
-        </p:spPr>
-        <p:txBody>
-          <a:bodyPr wrap="square" rtlCol="0" anchor="ctr"/>
-          <a:lstStyle/>
-          <a:p>
-            <a:pPr marL="0" indent="0">
-              <a:buNone/>
-            </a:pPr>
-            <a:r>
-              <a:rPr lang="en-US" sz="1700" dirty="0">
-                <a:solidFill>
-                  <a:srgbClr val="1A1A1A"/>
-                </a:solidFill>
-                <a:latin typeface="Calibri" pitchFamily="34" charset="0"/>
-                <a:ea typeface="Calibri" pitchFamily="34" charset="-122"/>
-                <a:cs typeface="Calibri" pitchFamily="34" charset="-120"/>
-              </a:rPr>
-              <a:t>Continue monitoring yearly crime trends</a:t>
-            </a:r>
-            <a:endParaRPr lang="en-US" sz="1700" dirty="0"/>
-          </a:p>
-        </p:txBody>
-      </p:sp>
-      <p:sp>
-        <p:nvSpPr>
-          <p:cNvPr id="15" name="Text 13"/>
-          <p:cNvSpPr/>
-          <p:nvPr/>
-        </p:nvSpPr>
-        <p:spPr>
-          <a:xfrm>
-            <a:off x="11475720" y="6446520"/>
-            <a:ext cx="457200" cy="320040"/>
-          </a:xfrm>
-          <a:prstGeom prst="rect">
-            <a:avLst/>
-          </a:prstGeom>
-          <a:noFill/>
-          <a:ln/>
-        </p:spPr>
-        <p:txBody>
-          <a:bodyPr wrap="square" rtlCol="0" anchor="ctr"/>
-          <a:lstStyle/>
-          <a:p>
-            <a:pPr marL="0" indent="0" algn="r">
-              <a:buNone/>
-            </a:pPr>
-            <a:r>
-              <a:rPr lang="en-US" sz="1000" dirty="0">
-                <a:solidFill>
-                  <a:srgbClr val="AAAAAA"/>
-                </a:solidFill>
-                <a:latin typeface="Calibri" pitchFamily="34" charset="0"/>
-                <a:ea typeface="Calibri" pitchFamily="34" charset="-122"/>
-                <a:cs typeface="Calibri" pitchFamily="34" charset="-120"/>
-              </a:rPr>
-              <a:t>15</a:t>
-            </a:r>
-            <a:endParaRPr lang="en-US" sz="1000" dirty="0"/>
+                <a:hlinkClick r:id="rId1" invalidUrl="" action="" tgtFrame="" tooltip="View project on GitHub" history="1" highlightClick="0" endSnd="0">
+                  <a:extLst>
+                    <a:ext uri="{A12FA001-AC4F-418D-AE19-62706E023703}">
+                      <ahyp:hlinkClr xmlns:ahyp="http://schemas.microsoft.com/office/drawing/2018/hyperlinkcolor" val="tx"/>
+                    </a:ext>
+                  </a:extLst>
+                </a:hlinkClick>
+              </a:rPr>
+              <a:t>GitHub Repository →</a:t>
+            </a:r>
+            <a:endParaRPr lang="en-US" sz="1300" dirty="0"/>
           </a:p>
         </p:txBody>
       </p:sp>
@@ -3711,15 +4815,14 @@
 </p:sld>
 </file>
 
-<file path=ppt/slides/slide16.xml><?xml version="1.0" encoding="utf-8"?>
+<file path=ppt/slides/slide2.xml><?xml version="1.0" encoding="utf-8"?>
 <p:sld xmlns:a="http://schemas.openxmlformats.org/drawingml/2006/main" xmlns:r="http://schemas.openxmlformats.org/officeDocument/2006/relationships" xmlns:p="http://schemas.openxmlformats.org/presentationml/2006/main">
-  <p:cSld name="Slide 17">
+  <p:cSld name="Slide 2">
     <p:bg>
       <p:bgPr>
         <a:solidFill>
           <a:srgbClr val="FFFFFF"/>
         </a:solidFill>
-        <a:effectLst/>
       </p:bgPr>
     </p:bg>
     <p:spTree>
@@ -3745,7 +4848,7 @@
         <p:spPr>
           <a:xfrm>
             <a:off x="0" y="0"/>
-            <a:ext cx="12188952" cy="6858000"/>
+            <a:ext cx="12188952" cy="128016"/>
           </a:xfrm>
           <a:prstGeom prst="rect">
             <a:avLst/>
@@ -3755,13 +4858,6 @@
           </a:solidFill>
           <a:ln/>
         </p:spPr>
-        <p:txBody>
-          <a:bodyPr/>
-          <a:lstStyle/>
-          <a:p>
-            <a:endParaRPr lang="en-BH"/>
-          </a:p>
-        </p:txBody>
       </p:sp>
       <p:sp>
         <p:nvSpPr>
@@ -3771,8 +4867,8 @@
         </p:nvSpPr>
         <p:spPr>
           <a:xfrm>
-            <a:off x="1188720" y="1051560"/>
-            <a:ext cx="9811512" cy="457200"/>
+            <a:off x="640080" y="457200"/>
+            <a:ext cx="10881360" cy="640080"/>
           </a:xfrm>
           <a:prstGeom prst="rect">
             <a:avLst/>
@@ -3784,119 +4880,192 @@
           <a:bodyPr wrap="square" rtlCol="0" anchor="ctr"/>
           <a:lstStyle/>
           <a:p>
-            <a:pPr marL="0" indent="0">
+            <a:pPr indent="0" marL="0">
               <a:buNone/>
             </a:pPr>
             <a:r>
-              <a:rPr lang="en-US" sz="1500" b="1" kern="0" spc="200" dirty="0">
-                <a:solidFill>
-                  <a:srgbClr val="FFD6D6"/>
+              <a:rPr lang="en-US" sz="3200" b="1" dirty="0">
+                <a:solidFill>
+                  <a:srgbClr val="1A1A1A"/>
+                </a:solidFill>
+                <a:latin typeface="Cambria" pitchFamily="34" charset="0"/>
+                <a:ea typeface="Cambria" pitchFamily="34" charset="-122"/>
+                <a:cs typeface="Cambria" pitchFamily="34" charset="-120"/>
+              </a:rPr>
+              <a:t>Introduction</a:t>
+            </a:r>
+            <a:endParaRPr lang="en-US" sz="3200" dirty="0"/>
+          </a:p>
+        </p:txBody>
+      </p:sp>
+      <p:sp>
+        <p:nvSpPr>
+          <p:cNvPr id="4" name="Shape 2"/>
+          <p:cNvSpPr/>
+          <p:nvPr/>
+        </p:nvSpPr>
+        <p:spPr>
+          <a:xfrm>
+            <a:off x="658368" y="1133856"/>
+            <a:ext cx="822960" cy="54864"/>
+          </a:xfrm>
+          <a:prstGeom prst="rect">
+            <a:avLst/>
+          </a:prstGeom>
+          <a:solidFill>
+            <a:srgbClr val="8B0000"/>
+          </a:solidFill>
+          <a:ln/>
+        </p:spPr>
+      </p:sp>
+      <p:sp>
+        <p:nvSpPr>
+          <p:cNvPr id="5" name="Shape 3"/>
+          <p:cNvSpPr/>
+          <p:nvPr/>
+        </p:nvSpPr>
+        <p:spPr>
+          <a:xfrm>
+            <a:off x="640080" y="1463040"/>
+            <a:ext cx="10908792" cy="4480560"/>
+          </a:xfrm>
+          <a:prstGeom prst="rect">
+            <a:avLst/>
+          </a:prstGeom>
+          <a:solidFill>
+            <a:srgbClr val="F4F4F4"/>
+          </a:solidFill>
+          <a:ln/>
+        </p:spPr>
+      </p:sp>
+      <p:sp>
+        <p:nvSpPr>
+          <p:cNvPr id="6" name="Text 4"/>
+          <p:cNvSpPr/>
+          <p:nvPr/>
+        </p:nvSpPr>
+        <p:spPr>
+          <a:xfrm>
+            <a:off x="1005840" y="1828800"/>
+            <a:ext cx="10177272" cy="3657600"/>
+          </a:xfrm>
+          <a:prstGeom prst="rect">
+            <a:avLst/>
+          </a:prstGeom>
+          <a:noFill/>
+          <a:ln/>
+        </p:spPr>
+        <p:txBody>
+          <a:bodyPr wrap="square" rtlCol="0" anchor="t"/>
+          <a:lstStyle/>
+          <a:p>
+            <a:pPr marL="342900" indent="-342900">
+              <a:lnSpc>
+                <a:spcPct val="115000"/>
+              </a:lnSpc>
+              <a:spcAft>
+                <a:spcPts val="2200"/>
+              </a:spcAft>
+              <a:buSzPct val="100000"/>
+              <a:buChar char="•"/>
+            </a:pPr>
+            <a:r>
+              <a:rPr lang="en-US" sz="1900" dirty="0">
+                <a:solidFill>
+                  <a:srgbClr val="1A1A1A"/>
                 </a:solidFill>
                 <a:latin typeface="Calibri" pitchFamily="34" charset="0"/>
                 <a:ea typeface="Calibri" pitchFamily="34" charset="-122"/>
                 <a:cs typeface="Calibri" pitchFamily="34" charset="-120"/>
               </a:rPr>
-              <a:t>CONCLUSION</a:t>
-            </a:r>
-            <a:endParaRPr lang="en-US" sz="1500" dirty="0"/>
-          </a:p>
-        </p:txBody>
-      </p:sp>
-      <p:sp>
-        <p:nvSpPr>
-          <p:cNvPr id="4" name="Text 2"/>
-          <p:cNvSpPr/>
-          <p:nvPr/>
-        </p:nvSpPr>
-        <p:spPr>
-          <a:xfrm>
-            <a:off x="1188720" y="1600200"/>
-            <a:ext cx="9811512" cy="2377440"/>
-          </a:xfrm>
-          <a:prstGeom prst="rect">
-            <a:avLst/>
-          </a:prstGeom>
-          <a:noFill/>
-          <a:ln/>
-        </p:spPr>
-        <p:txBody>
-          <a:bodyPr wrap="square" rtlCol="0" anchor="t"/>
-          <a:lstStyle/>
+              <a:t>Crime affects communities, public safety, and decision-making every day</a:t>
+            </a:r>
+            <a:endParaRPr lang="en-US" sz="1900" dirty="0"/>
+          </a:p>
           <a:p>
             <a:pPr marL="342900" indent="-342900">
+              <a:lnSpc>
+                <a:spcPct val="115000"/>
+              </a:lnSpc>
               <a:spcAft>
-                <a:spcPts val="1600"/>
+                <a:spcPts val="2200"/>
               </a:spcAft>
               <a:buSzPct val="100000"/>
               <a:buChar char="•"/>
             </a:pPr>
             <a:r>
-              <a:rPr lang="en-US" sz="2200" dirty="0">
-                <a:solidFill>
-                  <a:srgbClr val="FFFFFF"/>
-                </a:solidFill>
-                <a:latin typeface="Cambria" pitchFamily="34" charset="0"/>
-                <a:ea typeface="Cambria" pitchFamily="34" charset="-122"/>
-                <a:cs typeface="Cambria" pitchFamily="34" charset="-120"/>
-              </a:rPr>
-              <a:t>EDA can uncover real crime patterns from over a million records</a:t>
-            </a:r>
-            <a:endParaRPr lang="en-US" sz="2200" dirty="0"/>
+              <a:rPr lang="en-US" sz="1900" dirty="0">
+                <a:solidFill>
+                  <a:srgbClr val="1A1A1A"/>
+                </a:solidFill>
+                <a:latin typeface="Calibri" pitchFamily="34" charset="0"/>
+                <a:ea typeface="Calibri" pitchFamily="34" charset="-122"/>
+                <a:cs typeface="Calibri" pitchFamily="34" charset="-120"/>
+              </a:rPr>
+              <a:t>This project analyzes crime incidents reported by the LAPD between 2020 and 2024</a:t>
+            </a:r>
+            <a:endParaRPr lang="en-US" sz="1900" dirty="0"/>
           </a:p>
           <a:p>
             <a:pPr marL="342900" indent="-342900">
+              <a:lnSpc>
+                <a:spcPct val="115000"/>
+              </a:lnSpc>
               <a:spcAft>
-                <a:spcPts val="1600"/>
+                <a:spcPts val="2200"/>
               </a:spcAft>
               <a:buSzPct val="100000"/>
               <a:buChar char="•"/>
             </a:pPr>
             <a:r>
-              <a:rPr lang="en-US" sz="2200" dirty="0">
-                <a:solidFill>
-                  <a:srgbClr val="FFFFFF"/>
-                </a:solidFill>
-                <a:latin typeface="Cambria" pitchFamily="34" charset="0"/>
-                <a:ea typeface="Cambria" pitchFamily="34" charset="-122"/>
-                <a:cs typeface="Cambria" pitchFamily="34" charset="-120"/>
-              </a:rPr>
-              <a:t>Findings point to clear priorities: Central, nighttime, vehicle crime</a:t>
-            </a:r>
-            <a:endParaRPr lang="en-US" sz="2200" dirty="0"/>
+              <a:rPr lang="en-US" sz="1900" dirty="0">
+                <a:solidFill>
+                  <a:srgbClr val="1A1A1A"/>
+                </a:solidFill>
+                <a:latin typeface="Calibri" pitchFamily="34" charset="0"/>
+                <a:ea typeface="Calibri" pitchFamily="34" charset="-122"/>
+                <a:cs typeface="Calibri" pitchFamily="34" charset="-120"/>
+              </a:rPr>
+              <a:t>The dataset includes the date, time, area, and type of each reported crime</a:t>
+            </a:r>
+            <a:endParaRPr lang="en-US" sz="1900" dirty="0"/>
           </a:p>
           <a:p>
             <a:pPr marL="342900" indent="-342900">
+              <a:lnSpc>
+                <a:spcPct val="115000"/>
+              </a:lnSpc>
               <a:spcAft>
-                <a:spcPts val="1600"/>
+                <a:spcPts val="2200"/>
               </a:spcAft>
               <a:buSzPct val="100000"/>
               <a:buChar char="•"/>
             </a:pPr>
             <a:r>
-              <a:rPr lang="en-US" sz="2200" dirty="0">
-                <a:solidFill>
-                  <a:srgbClr val="FFFFFF"/>
-                </a:solidFill>
-                <a:latin typeface="Cambria" pitchFamily="34" charset="0"/>
-                <a:ea typeface="Cambria" pitchFamily="34" charset="-122"/>
-                <a:cs typeface="Cambria" pitchFamily="34" charset="-120"/>
-              </a:rPr>
-              <a:t>Data-driven decisions support smarter resource allocation</a:t>
-            </a:r>
-            <a:endParaRPr lang="en-US" sz="2200" dirty="0"/>
-          </a:p>
-        </p:txBody>
-      </p:sp>
-      <p:sp>
-        <p:nvSpPr>
-          <p:cNvPr id="5" name="Text 3"/>
-          <p:cNvSpPr/>
-          <p:nvPr/>
-        </p:nvSpPr>
-        <p:spPr>
-          <a:xfrm>
-            <a:off x="1188720" y="5394960"/>
-            <a:ext cx="5486400" cy="457200"/>
+              <a:rPr lang="en-US" sz="1900" dirty="0">
+                <a:solidFill>
+                  <a:srgbClr val="1A1A1A"/>
+                </a:solidFill>
+                <a:latin typeface="Calibri" pitchFamily="34" charset="0"/>
+                <a:ea typeface="Calibri" pitchFamily="34" charset="-122"/>
+                <a:cs typeface="Calibri" pitchFamily="34" charset="-120"/>
+              </a:rPr>
+              <a:t>Goal: identify crime patterns that support better public safety decisions</a:t>
+            </a:r>
+            <a:endParaRPr lang="en-US" sz="1900" dirty="0"/>
+          </a:p>
+        </p:txBody>
+      </p:sp>
+      <p:sp>
+        <p:nvSpPr>
+          <p:cNvPr id="7" name="Text 5"/>
+          <p:cNvSpPr/>
+          <p:nvPr/>
+        </p:nvSpPr>
+        <p:spPr>
+          <a:xfrm>
+            <a:off x="11475720" y="6446520"/>
+            <a:ext cx="457200" cy="320040"/>
           </a:xfrm>
           <a:prstGeom prst="rect">
             <a:avLst/>
@@ -3908,21 +5077,21 @@
           <a:bodyPr wrap="square" rtlCol="0" anchor="ctr"/>
           <a:lstStyle/>
           <a:p>
-            <a:pPr marL="0" indent="0">
+            <a:pPr algn="r" indent="0" marL="0">
               <a:buNone/>
             </a:pPr>
             <a:r>
-              <a:rPr lang="en-US" sz="1800" i="1" dirty="0">
-                <a:solidFill>
-                  <a:srgbClr val="FFD6D6"/>
-                </a:solidFill>
-                <a:latin typeface="Cambria" pitchFamily="34" charset="0"/>
-                <a:ea typeface="Cambria" pitchFamily="34" charset="-122"/>
-                <a:cs typeface="Cambria" pitchFamily="34" charset="-120"/>
-              </a:rPr>
-              <a:t>Thank you</a:t>
-            </a:r>
-            <a:endParaRPr lang="en-US" sz="1800" dirty="0"/>
+              <a:rPr lang="en-US" sz="1000" dirty="0">
+                <a:solidFill>
+                  <a:srgbClr val="AAAAAA"/>
+                </a:solidFill>
+                <a:latin typeface="Calibri" pitchFamily="34" charset="0"/>
+                <a:ea typeface="Calibri" pitchFamily="34" charset="-122"/>
+                <a:cs typeface="Calibri" pitchFamily="34" charset="-120"/>
+              </a:rPr>
+              <a:t>2</a:t>
+            </a:r>
+            <a:endParaRPr lang="en-US" sz="1000" dirty="0"/>
           </a:p>
         </p:txBody>
       </p:sp>
@@ -3934,15 +5103,14 @@
 </p:sld>
 </file>
 
-<file path=ppt/slides/slide2.xml><?xml version="1.0" encoding="utf-8"?>
+<file path=ppt/slides/slide3.xml><?xml version="1.0" encoding="utf-8"?>
 <p:sld xmlns:a="http://schemas.openxmlformats.org/drawingml/2006/main" xmlns:r="http://schemas.openxmlformats.org/officeDocument/2006/relationships" xmlns:p="http://schemas.openxmlformats.org/presentationml/2006/main">
-  <p:cSld name="Slide 2">
+  <p:cSld name="Slide 3">
     <p:bg>
       <p:bgPr>
         <a:solidFill>
           <a:srgbClr val="FFFFFF"/>
         </a:solidFill>
-        <a:effectLst/>
       </p:bgPr>
     </p:bg>
     <p:spTree>
@@ -3961,7 +5129,27 @@
       </p:grpSpPr>
       <p:sp>
         <p:nvSpPr>
-          <p:cNvPr id="2" name="Text 0"/>
+          <p:cNvPr id="2" name="Shape 0"/>
+          <p:cNvSpPr/>
+          <p:nvPr/>
+        </p:nvSpPr>
+        <p:spPr>
+          <a:xfrm>
+            <a:off x="0" y="0"/>
+            <a:ext cx="12188952" cy="128016"/>
+          </a:xfrm>
+          <a:prstGeom prst="rect">
+            <a:avLst/>
+          </a:prstGeom>
+          <a:solidFill>
+            <a:srgbClr val="8B0000"/>
+          </a:solidFill>
+          <a:ln/>
+        </p:spPr>
+      </p:sp>
+      <p:sp>
+        <p:nvSpPr>
+          <p:cNvPr id="3" name="Text 1"/>
           <p:cNvSpPr/>
           <p:nvPr/>
         </p:nvSpPr>
@@ -3980,7 +5168,7 @@
           <a:bodyPr wrap="square" rtlCol="0" anchor="ctr"/>
           <a:lstStyle/>
           <a:p>
-            <a:pPr marL="0" indent="0">
+            <a:pPr indent="0" marL="0">
               <a:buNone/>
             </a:pPr>
             <a:r>
@@ -3992,7 +5180,7 @@
                 <a:ea typeface="Cambria" pitchFamily="34" charset="-122"/>
                 <a:cs typeface="Cambria" pitchFamily="34" charset="-120"/>
               </a:rPr>
-              <a:t>Introduction &amp; Objectives</a:t>
+              <a:t>Problem Statement</a:t>
             </a:r>
             <a:endParaRPr lang="en-US" sz="3200" dirty="0"/>
           </a:p>
@@ -4000,41 +5188,54 @@
       </p:sp>
       <p:sp>
         <p:nvSpPr>
-          <p:cNvPr id="3" name="Shape 1"/>
-          <p:cNvSpPr/>
-          <p:nvPr/>
-        </p:nvSpPr>
-        <p:spPr>
-          <a:xfrm>
-            <a:off x="640080" y="1371600"/>
-            <a:ext cx="5349240" cy="4846320"/>
-          </a:xfrm>
-          <a:prstGeom prst="rect">
-            <a:avLst/>
-          </a:prstGeom>
-          <a:solidFill>
-            <a:srgbClr val="F4F4F4"/>
-          </a:solidFill>
-          <a:ln/>
-        </p:spPr>
-        <p:txBody>
-          <a:bodyPr/>
-          <a:lstStyle/>
-          <a:p>
-            <a:endParaRPr lang="en-BH"/>
-          </a:p>
-        </p:txBody>
-      </p:sp>
-      <p:sp>
-        <p:nvSpPr>
-          <p:cNvPr id="4" name="Text 2"/>
-          <p:cNvSpPr/>
-          <p:nvPr/>
-        </p:nvSpPr>
-        <p:spPr>
-          <a:xfrm>
-            <a:off x="914400" y="1600200"/>
-            <a:ext cx="4846320" cy="365760"/>
+          <p:cNvPr id="4" name="Shape 2"/>
+          <p:cNvSpPr/>
+          <p:nvPr/>
+        </p:nvSpPr>
+        <p:spPr>
+          <a:xfrm>
+            <a:off x="658368" y="1133856"/>
+            <a:ext cx="822960" cy="54864"/>
+          </a:xfrm>
+          <a:prstGeom prst="rect">
+            <a:avLst/>
+          </a:prstGeom>
+          <a:solidFill>
+            <a:srgbClr val="8B0000"/>
+          </a:solidFill>
+          <a:ln/>
+        </p:spPr>
+      </p:sp>
+      <p:sp>
+        <p:nvSpPr>
+          <p:cNvPr id="5" name="Shape 3"/>
+          <p:cNvSpPr/>
+          <p:nvPr/>
+        </p:nvSpPr>
+        <p:spPr>
+          <a:xfrm>
+            <a:off x="640080" y="1463040"/>
+            <a:ext cx="3566160" cy="1828800"/>
+          </a:xfrm>
+          <a:prstGeom prst="rect">
+            <a:avLst/>
+          </a:prstGeom>
+          <a:solidFill>
+            <a:srgbClr val="8B0000"/>
+          </a:solidFill>
+          <a:ln/>
+        </p:spPr>
+      </p:sp>
+      <p:sp>
+        <p:nvSpPr>
+          <p:cNvPr id="6" name="Text 4"/>
+          <p:cNvSpPr/>
+          <p:nvPr/>
+        </p:nvSpPr>
+        <p:spPr>
+          <a:xfrm>
+            <a:off x="640080" y="1600200"/>
+            <a:ext cx="3566160" cy="822960"/>
           </a:xfrm>
           <a:prstGeom prst="rect">
             <a:avLst/>
@@ -4046,34 +5247,73 @@
           <a:bodyPr wrap="square" rtlCol="0" anchor="ctr"/>
           <a:lstStyle/>
           <a:p>
-            <a:pPr marL="0" indent="0">
+            <a:pPr algn="ctr" indent="0" marL="0">
               <a:buNone/>
             </a:pPr>
             <a:r>
-              <a:rPr lang="en-US" sz="1800" b="1" dirty="0">
-                <a:solidFill>
-                  <a:srgbClr val="8B0000"/>
+              <a:rPr lang="en-US" sz="3200" b="1" dirty="0">
+                <a:solidFill>
+                  <a:srgbClr val="FFFFFF"/>
                 </a:solidFill>
                 <a:latin typeface="Cambria" pitchFamily="34" charset="0"/>
                 <a:ea typeface="Cambria" pitchFamily="34" charset="-122"/>
                 <a:cs typeface="Cambria" pitchFamily="34" charset="-120"/>
               </a:rPr>
-              <a:t>Introduction</a:t>
-            </a:r>
-            <a:endParaRPr lang="en-US" sz="1800" dirty="0"/>
-          </a:p>
-        </p:txBody>
-      </p:sp>
-      <p:sp>
-        <p:nvSpPr>
-          <p:cNvPr id="5" name="Text 3"/>
-          <p:cNvSpPr/>
-          <p:nvPr/>
-        </p:nvSpPr>
-        <p:spPr>
-          <a:xfrm>
-            <a:off x="914400" y="2011680"/>
-            <a:ext cx="4846320" cy="1371600"/>
+              <a:t>1,004,904</a:t>
+            </a:r>
+            <a:endParaRPr lang="en-US" sz="3200" dirty="0"/>
+          </a:p>
+        </p:txBody>
+      </p:sp>
+      <p:sp>
+        <p:nvSpPr>
+          <p:cNvPr id="7" name="Text 5"/>
+          <p:cNvSpPr/>
+          <p:nvPr/>
+        </p:nvSpPr>
+        <p:spPr>
+          <a:xfrm>
+            <a:off x="640080" y="2423160"/>
+            <a:ext cx="3566160" cy="548640"/>
+          </a:xfrm>
+          <a:prstGeom prst="rect">
+            <a:avLst/>
+          </a:prstGeom>
+          <a:noFill/>
+          <a:ln/>
+        </p:spPr>
+        <p:txBody>
+          <a:bodyPr wrap="square" rtlCol="0" anchor="ctr"/>
+          <a:lstStyle/>
+          <a:p>
+            <a:pPr algn="ctr" indent="0" marL="0">
+              <a:buNone/>
+            </a:pPr>
+            <a:r>
+              <a:rPr lang="en-US" sz="1250" spc="100" kern="0" dirty="0">
+                <a:solidFill>
+                  <a:srgbClr val="FFD6D6"/>
+                </a:solidFill>
+                <a:latin typeface="Calibri" pitchFamily="34" charset="0"/>
+                <a:ea typeface="Calibri" pitchFamily="34" charset="-122"/>
+                <a:cs typeface="Calibri" pitchFamily="34" charset="-120"/>
+              </a:rPr>
+              <a:t>CRIME INCIDENTS — LA, 2020–2024</a:t>
+            </a:r>
+            <a:endParaRPr lang="en-US" sz="1250" dirty="0"/>
+          </a:p>
+        </p:txBody>
+      </p:sp>
+      <p:sp>
+        <p:nvSpPr>
+          <p:cNvPr id="8" name="Text 6"/>
+          <p:cNvSpPr/>
+          <p:nvPr/>
+        </p:nvSpPr>
+        <p:spPr>
+          <a:xfrm>
+            <a:off x="4526280" y="1508760"/>
+            <a:ext cx="7040880" cy="3566160"/>
           </a:xfrm>
           <a:prstGeom prst="rect">
             <a:avLst/>
@@ -4086,14 +5326,17 @@
           <a:lstStyle/>
           <a:p>
             <a:pPr marL="342900" indent="-342900">
+              <a:lnSpc>
+                <a:spcPct val="115000"/>
+              </a:lnSpc>
               <a:spcAft>
-                <a:spcPts val="1000"/>
+                <a:spcPts val="1800"/>
               </a:spcAft>
               <a:buSzPct val="100000"/>
               <a:buChar char="•"/>
             </a:pPr>
             <a:r>
-              <a:rPr lang="en-US" sz="1400" dirty="0">
+              <a:rPr lang="en-US" sz="1700" dirty="0">
                 <a:solidFill>
                   <a:srgbClr val="1A1A1A"/>
                 </a:solidFill>
@@ -4101,20 +5344,23 @@
                 <a:ea typeface="Calibri" pitchFamily="34" charset="-122"/>
                 <a:cs typeface="Calibri" pitchFamily="34" charset="-120"/>
               </a:rPr>
-              <a:t>Crime affects public safety and community decisions every day</a:t>
-            </a:r>
-            <a:endParaRPr lang="en-US" sz="1400" dirty="0"/>
+              <a:t>With this much data, it's difficult to pinpoint which crime types, areas, and time periods need the most attention</a:t>
+            </a:r>
+            <a:endParaRPr lang="en-US" sz="1700" dirty="0"/>
           </a:p>
           <a:p>
             <a:pPr marL="342900" indent="-342900">
+              <a:lnSpc>
+                <a:spcPct val="115000"/>
+              </a:lnSpc>
               <a:spcAft>
-                <a:spcPts val="1000"/>
+                <a:spcPts val="1800"/>
               </a:spcAft>
               <a:buSzPct val="100000"/>
               <a:buChar char="•"/>
             </a:pPr>
             <a:r>
-              <a:rPr lang="en-US" sz="1400" dirty="0">
+              <a:rPr lang="en-US" sz="1700" dirty="0">
                 <a:solidFill>
                   <a:srgbClr val="1A1A1A"/>
                 </a:solidFill>
@@ -4122,20 +5368,23 @@
                 <a:ea typeface="Calibri" pitchFamily="34" charset="-122"/>
                 <a:cs typeface="Calibri" pitchFamily="34" charset="-120"/>
               </a:rPr>
-              <a:t>This project analyzes LAPD crime incidents from 2020–2025</a:t>
-            </a:r>
-            <a:endParaRPr lang="en-US" sz="1400" dirty="0"/>
+              <a:t>Without clear patterns, public safety planning and resource allocation become harder</a:t>
+            </a:r>
+            <a:endParaRPr lang="en-US" sz="1700" dirty="0"/>
           </a:p>
           <a:p>
             <a:pPr marL="342900" indent="-342900">
+              <a:lnSpc>
+                <a:spcPct val="115000"/>
+              </a:lnSpc>
               <a:spcAft>
-                <a:spcPts val="1000"/>
+                <a:spcPts val="1800"/>
               </a:spcAft>
               <a:buSzPct val="100000"/>
               <a:buChar char="•"/>
             </a:pPr>
             <a:r>
-              <a:rPr lang="en-US" sz="1400" dirty="0">
+              <a:rPr lang="en-US" sz="1700" dirty="0">
                 <a:solidFill>
                   <a:srgbClr val="1A1A1A"/>
                 </a:solidFill>
@@ -4143,22 +5392,22 @@
                 <a:ea typeface="Calibri" pitchFamily="34" charset="-122"/>
                 <a:cs typeface="Calibri" pitchFamily="34" charset="-120"/>
               </a:rPr>
-              <a:t>Goal: uncover patterns that support public safety decisions</a:t>
-            </a:r>
-            <a:endParaRPr lang="en-US" sz="1400" dirty="0"/>
-          </a:p>
-        </p:txBody>
-      </p:sp>
-      <p:sp>
-        <p:nvSpPr>
-          <p:cNvPr id="6" name="Text 4"/>
-          <p:cNvSpPr/>
-          <p:nvPr/>
-        </p:nvSpPr>
-        <p:spPr>
-          <a:xfrm>
-            <a:off x="914400" y="3520440"/>
-            <a:ext cx="4846320" cy="365760"/>
+              <a:t>This project uses Exploratory Data Analysis (EDA) to uncover these patterns and support data-driven decisions</a:t>
+            </a:r>
+            <a:endParaRPr lang="en-US" sz="1700" dirty="0"/>
+          </a:p>
+        </p:txBody>
+      </p:sp>
+      <p:sp>
+        <p:nvSpPr>
+          <p:cNvPr id="9" name="Text 7"/>
+          <p:cNvSpPr/>
+          <p:nvPr/>
+        </p:nvSpPr>
+        <p:spPr>
+          <a:xfrm>
+            <a:off x="11475720" y="6446520"/>
+            <a:ext cx="457200" cy="320040"/>
           </a:xfrm>
           <a:prstGeom prst="rect">
             <a:avLst/>
@@ -4170,315 +5419,19 @@
           <a:bodyPr wrap="square" rtlCol="0" anchor="ctr"/>
           <a:lstStyle/>
           <a:p>
-            <a:pPr marL="0" indent="0">
+            <a:pPr algn="r" indent="0" marL="0">
               <a:buNone/>
             </a:pPr>
             <a:r>
-              <a:rPr lang="en-US" sz="1800" b="1" dirty="0">
-                <a:solidFill>
-                  <a:srgbClr val="8B0000"/>
-                </a:solidFill>
-                <a:latin typeface="Cambria" pitchFamily="34" charset="0"/>
-                <a:ea typeface="Cambria" pitchFamily="34" charset="-122"/>
-                <a:cs typeface="Cambria" pitchFamily="34" charset="-120"/>
-              </a:rPr>
-              <a:t>Problem Statement</a:t>
-            </a:r>
-            <a:endParaRPr lang="en-US" sz="1800" dirty="0"/>
-          </a:p>
-        </p:txBody>
-      </p:sp>
-      <p:sp>
-        <p:nvSpPr>
-          <p:cNvPr id="7" name="Text 5"/>
-          <p:cNvSpPr/>
-          <p:nvPr/>
-        </p:nvSpPr>
-        <p:spPr>
-          <a:xfrm>
-            <a:off x="914400" y="3931920"/>
-            <a:ext cx="4846320" cy="1828800"/>
-          </a:xfrm>
-          <a:prstGeom prst="rect">
-            <a:avLst/>
-          </a:prstGeom>
-          <a:noFill/>
-          <a:ln/>
-        </p:spPr>
-        <p:txBody>
-          <a:bodyPr wrap="square" rtlCol="0" anchor="t"/>
-          <a:lstStyle/>
-          <a:p>
-            <a:pPr marL="342900" indent="-342900">
-              <a:spcAft>
-                <a:spcPts val="1000"/>
-              </a:spcAft>
-              <a:buSzPct val="100000"/>
-              <a:buChar char="•"/>
-            </a:pPr>
-            <a:r>
-              <a:rPr lang="en-US" sz="1400" dirty="0">
-                <a:solidFill>
-                  <a:srgbClr val="1A1A1A"/>
+              <a:rPr lang="en-US" sz="1000" dirty="0">
+                <a:solidFill>
+                  <a:srgbClr val="AAAAAA"/>
                 </a:solidFill>
                 <a:latin typeface="Calibri" pitchFamily="34" charset="0"/>
                 <a:ea typeface="Calibri" pitchFamily="34" charset="-122"/>
                 <a:cs typeface="Calibri" pitchFamily="34" charset="-120"/>
               </a:rPr>
-              <a:t>1M+ crime incidents reported across 21 LA areas (2020–2025)</a:t>
-            </a:r>
-            <a:endParaRPr lang="en-US" sz="1400" dirty="0"/>
-          </a:p>
-          <a:p>
-            <a:pPr marL="342900" indent="-342900">
-              <a:spcAft>
-                <a:spcPts val="1000"/>
-              </a:spcAft>
-              <a:buSzPct val="100000"/>
-              <a:buChar char="•"/>
-            </a:pPr>
-            <a:r>
-              <a:rPr lang="en-US" sz="1400" dirty="0">
-                <a:solidFill>
-                  <a:srgbClr val="1A1A1A"/>
-                </a:solidFill>
-                <a:latin typeface="Calibri" pitchFamily="34" charset="0"/>
-                <a:ea typeface="Calibri" pitchFamily="34" charset="-122"/>
-                <a:cs typeface="Calibri" pitchFamily="34" charset="-120"/>
-              </a:rPr>
-              <a:t>Hard to identify which areas, times &amp; crime types need attention</a:t>
-            </a:r>
-            <a:endParaRPr lang="en-US" sz="1400" dirty="0"/>
-          </a:p>
-        </p:txBody>
-      </p:sp>
-      <p:sp>
-        <p:nvSpPr>
-          <p:cNvPr id="8" name="Shape 6"/>
-          <p:cNvSpPr/>
-          <p:nvPr/>
-        </p:nvSpPr>
-        <p:spPr>
-          <a:xfrm>
-            <a:off x="6199632" y="1371600"/>
-            <a:ext cx="5349240" cy="4846320"/>
-          </a:xfrm>
-          <a:prstGeom prst="rect">
-            <a:avLst/>
-          </a:prstGeom>
-          <a:solidFill>
-            <a:srgbClr val="F4F4F4"/>
-          </a:solidFill>
-          <a:ln/>
-        </p:spPr>
-        <p:txBody>
-          <a:bodyPr/>
-          <a:lstStyle/>
-          <a:p>
-            <a:endParaRPr lang="en-BH"/>
-          </a:p>
-        </p:txBody>
-      </p:sp>
-      <p:sp>
-        <p:nvSpPr>
-          <p:cNvPr id="9" name="Text 7"/>
-          <p:cNvSpPr/>
-          <p:nvPr/>
-        </p:nvSpPr>
-        <p:spPr>
-          <a:xfrm>
-            <a:off x="6473952" y="1600200"/>
-            <a:ext cx="4846320" cy="365760"/>
-          </a:xfrm>
-          <a:prstGeom prst="rect">
-            <a:avLst/>
-          </a:prstGeom>
-          <a:noFill/>
-          <a:ln/>
-        </p:spPr>
-        <p:txBody>
-          <a:bodyPr wrap="square" rtlCol="0" anchor="ctr"/>
-          <a:lstStyle/>
-          <a:p>
-            <a:pPr marL="0" indent="0">
-              <a:buNone/>
-            </a:pPr>
-            <a:r>
-              <a:rPr lang="en-US" sz="1800" b="1" dirty="0">
-                <a:solidFill>
-                  <a:srgbClr val="8B0000"/>
-                </a:solidFill>
-                <a:latin typeface="Cambria" pitchFamily="34" charset="0"/>
-                <a:ea typeface="Cambria" pitchFamily="34" charset="-122"/>
-                <a:cs typeface="Cambria" pitchFamily="34" charset="-120"/>
-              </a:rPr>
-              <a:t>Objectives</a:t>
-            </a:r>
-            <a:endParaRPr lang="en-US" sz="1800" dirty="0"/>
-          </a:p>
-        </p:txBody>
-      </p:sp>
-      <p:sp>
-        <p:nvSpPr>
-          <p:cNvPr id="10" name="Text 8"/>
-          <p:cNvSpPr/>
-          <p:nvPr/>
-        </p:nvSpPr>
-        <p:spPr>
-          <a:xfrm>
-            <a:off x="6473952" y="2057400"/>
-            <a:ext cx="4846320" cy="3200400"/>
-          </a:xfrm>
-          <a:prstGeom prst="rect">
-            <a:avLst/>
-          </a:prstGeom>
-          <a:noFill/>
-          <a:ln/>
-        </p:spPr>
-        <p:txBody>
-          <a:bodyPr wrap="square" rtlCol="0" anchor="t"/>
-          <a:lstStyle/>
-          <a:p>
-            <a:pPr marL="342900" indent="-342900">
-              <a:spcAft>
-                <a:spcPts val="1400"/>
-              </a:spcAft>
-              <a:buSzPct val="100000"/>
-              <a:buChar char="•"/>
-            </a:pPr>
-            <a:r>
-              <a:rPr lang="en-US" sz="1400" dirty="0">
-                <a:solidFill>
-                  <a:srgbClr val="1A1A1A"/>
-                </a:solidFill>
-                <a:latin typeface="Calibri" pitchFamily="34" charset="0"/>
-                <a:ea typeface="Calibri" pitchFamily="34" charset="-122"/>
-                <a:cs typeface="Calibri" pitchFamily="34" charset="-120"/>
-              </a:rPr>
-              <a:t>Identify the most common crime types</a:t>
-            </a:r>
-            <a:endParaRPr lang="en-US" sz="1400" dirty="0"/>
-          </a:p>
-          <a:p>
-            <a:pPr marL="342900" indent="-342900">
-              <a:spcAft>
-                <a:spcPts val="1400"/>
-              </a:spcAft>
-              <a:buSzPct val="100000"/>
-              <a:buChar char="•"/>
-            </a:pPr>
-            <a:r>
-              <a:rPr lang="en-US" sz="1400" dirty="0">
-                <a:solidFill>
-                  <a:srgbClr val="1A1A1A"/>
-                </a:solidFill>
-                <a:latin typeface="Calibri" pitchFamily="34" charset="0"/>
-                <a:ea typeface="Calibri" pitchFamily="34" charset="-122"/>
-                <a:cs typeface="Calibri" pitchFamily="34" charset="-120"/>
-              </a:rPr>
-              <a:t>Determine which areas record the most crime</a:t>
-            </a:r>
-            <a:endParaRPr lang="en-US" sz="1400" dirty="0"/>
-          </a:p>
-          <a:p>
-            <a:pPr marL="342900" indent="-342900">
-              <a:spcAft>
-                <a:spcPts val="1400"/>
-              </a:spcAft>
-              <a:buSzPct val="100000"/>
-              <a:buChar char="•"/>
-            </a:pPr>
-            <a:r>
-              <a:rPr lang="en-US" sz="1400" dirty="0">
-                <a:solidFill>
-                  <a:srgbClr val="1A1A1A"/>
-                </a:solidFill>
-                <a:latin typeface="Calibri" pitchFamily="34" charset="0"/>
-                <a:ea typeface="Calibri" pitchFamily="34" charset="-122"/>
-                <a:cs typeface="Calibri" pitchFamily="34" charset="-120"/>
-              </a:rPr>
-              <a:t>Analyze yearly crime trends</a:t>
-            </a:r>
-            <a:endParaRPr lang="en-US" sz="1400" dirty="0"/>
-          </a:p>
-          <a:p>
-            <a:pPr marL="342900" indent="-342900">
-              <a:spcAft>
-                <a:spcPts val="1400"/>
-              </a:spcAft>
-              <a:buSzPct val="100000"/>
-              <a:buChar char="•"/>
-            </a:pPr>
-            <a:r>
-              <a:rPr lang="en-US" sz="1400" dirty="0">
-                <a:solidFill>
-                  <a:srgbClr val="1A1A1A"/>
-                </a:solidFill>
-                <a:latin typeface="Calibri" pitchFamily="34" charset="0"/>
-                <a:ea typeface="Calibri" pitchFamily="34" charset="-122"/>
-                <a:cs typeface="Calibri" pitchFamily="34" charset="-120"/>
-              </a:rPr>
-              <a:t>Identify peak times of day for crime</a:t>
-            </a:r>
-            <a:endParaRPr lang="en-US" sz="1400" dirty="0"/>
-          </a:p>
-          <a:p>
-            <a:pPr marL="342900" indent="-342900">
-              <a:spcAft>
-                <a:spcPts val="1400"/>
-              </a:spcAft>
-              <a:buSzPct val="100000"/>
-              <a:buChar char="•"/>
-            </a:pPr>
-            <a:r>
-              <a:rPr lang="en-US" sz="1400" dirty="0">
-                <a:solidFill>
-                  <a:srgbClr val="1A1A1A"/>
-                </a:solidFill>
-                <a:latin typeface="Calibri" pitchFamily="34" charset="0"/>
-                <a:ea typeface="Calibri" pitchFamily="34" charset="-122"/>
-                <a:cs typeface="Calibri" pitchFamily="34" charset="-120"/>
-              </a:rPr>
-              <a:t>Find the top crime types in the highest-crime area</a:t>
-            </a:r>
-            <a:endParaRPr lang="en-US" sz="1400" dirty="0"/>
-          </a:p>
-        </p:txBody>
-      </p:sp>
-      <p:sp>
-        <p:nvSpPr>
-          <p:cNvPr id="11" name="Text 9"/>
-          <p:cNvSpPr/>
-          <p:nvPr/>
-        </p:nvSpPr>
-        <p:spPr>
-          <a:xfrm>
-            <a:off x="11475720" y="6446520"/>
-            <a:ext cx="457200" cy="320040"/>
-          </a:xfrm>
-          <a:prstGeom prst="rect">
-            <a:avLst/>
-          </a:prstGeom>
-          <a:noFill/>
-          <a:ln/>
-        </p:spPr>
-        <p:txBody>
-          <a:bodyPr wrap="square" rtlCol="0" anchor="ctr"/>
-          <a:lstStyle/>
-          <a:p>
-            <a:pPr marL="0" indent="0" algn="r">
-              <a:buNone/>
-            </a:pPr>
-            <a:r>
-              <a:rPr lang="en-US" sz="1000" dirty="0">
-                <a:solidFill>
-                  <a:srgbClr val="AAAAAA"/>
-                </a:solidFill>
-                <a:latin typeface="Calibri" pitchFamily="34" charset="0"/>
-                <a:ea typeface="Calibri" pitchFamily="34" charset="-122"/>
-                <a:cs typeface="Calibri" pitchFamily="34" charset="-120"/>
-              </a:rPr>
-              <a:t>2</a:t>
+              <a:t>3</a:t>
             </a:r>
             <a:endParaRPr lang="en-US" sz="1000" dirty="0"/>
           </a:p>
@@ -4492,15 +5445,14 @@
 </p:sld>
 </file>
 
-<file path=ppt/slides/slide3.xml><?xml version="1.0" encoding="utf-8"?>
+<file path=ppt/slides/slide4.xml><?xml version="1.0" encoding="utf-8"?>
 <p:sld xmlns:a="http://schemas.openxmlformats.org/drawingml/2006/main" xmlns:r="http://schemas.openxmlformats.org/officeDocument/2006/relationships" xmlns:p="http://schemas.openxmlformats.org/presentationml/2006/main">
-  <p:cSld name="Slide 3">
+  <p:cSld name="Slide 4">
     <p:bg>
       <p:bgPr>
         <a:solidFill>
           <a:srgbClr val="FFFFFF"/>
         </a:solidFill>
-        <a:effectLst/>
       </p:bgPr>
     </p:bg>
     <p:spTree>
@@ -4519,7 +5471,27 @@
       </p:grpSpPr>
       <p:sp>
         <p:nvSpPr>
-          <p:cNvPr id="2" name="Text 0"/>
+          <p:cNvPr id="2" name="Shape 0"/>
+          <p:cNvSpPr/>
+          <p:nvPr/>
+        </p:nvSpPr>
+        <p:spPr>
+          <a:xfrm>
+            <a:off x="0" y="0"/>
+            <a:ext cx="12188952" cy="128016"/>
+          </a:xfrm>
+          <a:prstGeom prst="rect">
+            <a:avLst/>
+          </a:prstGeom>
+          <a:solidFill>
+            <a:srgbClr val="8B0000"/>
+          </a:solidFill>
+          <a:ln/>
+        </p:spPr>
+      </p:sp>
+      <p:sp>
+        <p:nvSpPr>
+          <p:cNvPr id="3" name="Text 1"/>
           <p:cNvSpPr/>
           <p:nvPr/>
         </p:nvSpPr>
@@ -4538,7 +5510,7 @@
           <a:bodyPr wrap="square" rtlCol="0" anchor="ctr"/>
           <a:lstStyle/>
           <a:p>
-            <a:pPr marL="0" indent="0">
+            <a:pPr indent="0" marL="0">
               <a:buNone/>
             </a:pPr>
             <a:r>
@@ -4550,7 +5522,7 @@
                 <a:ea typeface="Cambria" pitchFamily="34" charset="-122"/>
                 <a:cs typeface="Cambria" pitchFamily="34" charset="-120"/>
               </a:rPr>
-              <a:t>Dataset Overview</a:t>
+              <a:t>Objectives</a:t>
             </a:r>
             <a:endParaRPr lang="en-US" sz="3200" dirty="0"/>
           </a:p>
@@ -4558,13 +5530,33 @@
       </p:sp>
       <p:sp>
         <p:nvSpPr>
-          <p:cNvPr id="3" name="Text 1"/>
-          <p:cNvSpPr/>
-          <p:nvPr/>
-        </p:nvSpPr>
-        <p:spPr>
-          <a:xfrm>
-            <a:off x="640080" y="1051560"/>
+          <p:cNvPr id="4" name="Shape 2"/>
+          <p:cNvSpPr/>
+          <p:nvPr/>
+        </p:nvSpPr>
+        <p:spPr>
+          <a:xfrm>
+            <a:off x="658368" y="1133856"/>
+            <a:ext cx="822960" cy="54864"/>
+          </a:xfrm>
+          <a:prstGeom prst="rect">
+            <a:avLst/>
+          </a:prstGeom>
+          <a:solidFill>
+            <a:srgbClr val="8B0000"/>
+          </a:solidFill>
+          <a:ln/>
+        </p:spPr>
+      </p:sp>
+      <p:sp>
+        <p:nvSpPr>
+          <p:cNvPr id="5" name="Text 3"/>
+          <p:cNvSpPr/>
+          <p:nvPr/>
+        </p:nvSpPr>
+        <p:spPr>
+          <a:xfrm>
+            <a:off x="640080" y="1234440"/>
             <a:ext cx="10881360" cy="365760"/>
           </a:xfrm>
           <a:prstGeom prst="rect">
@@ -4577,11 +5569,11 @@
           <a:bodyPr wrap="square" rtlCol="0" anchor="ctr"/>
           <a:lstStyle/>
           <a:p>
-            <a:pPr marL="0" indent="0">
+            <a:pPr indent="0" marL="0">
               <a:buNone/>
             </a:pPr>
             <a:r>
-              <a:rPr lang="en-US" sz="1500" i="1" dirty="0">
+              <a:rPr lang="en-US" sz="1400" i="1" dirty="0">
                 <a:solidFill>
                   <a:srgbClr val="5A5A5A"/>
                 </a:solidFill>
@@ -4589,22 +5581,22 @@
                 <a:ea typeface="Calibri" pitchFamily="34" charset="-122"/>
                 <a:cs typeface="Calibri" pitchFamily="34" charset="-120"/>
               </a:rPr>
-              <a:t>LAPD Crime Data, 2020–2025</a:t>
-            </a:r>
-            <a:endParaRPr lang="en-US" sz="1500" dirty="0"/>
-          </a:p>
-        </p:txBody>
-      </p:sp>
-      <p:sp>
-        <p:nvSpPr>
-          <p:cNvPr id="4" name="Shape 2"/>
-          <p:cNvSpPr/>
-          <p:nvPr/>
-        </p:nvSpPr>
-        <p:spPr>
-          <a:xfrm>
-            <a:off x="630936" y="1965960"/>
-            <a:ext cx="3429000" cy="1828800"/>
+              <a:t>Questions guiding this analysis:</a:t>
+            </a:r>
+            <a:endParaRPr lang="en-US" sz="1400" dirty="0"/>
+          </a:p>
+        </p:txBody>
+      </p:sp>
+      <p:sp>
+        <p:nvSpPr>
+          <p:cNvPr id="6" name="Shape 4"/>
+          <p:cNvSpPr/>
+          <p:nvPr/>
+        </p:nvSpPr>
+        <p:spPr>
+          <a:xfrm>
+            <a:off x="640080" y="1783080"/>
+            <a:ext cx="10908792" cy="841248"/>
           </a:xfrm>
           <a:prstGeom prst="rect">
             <a:avLst/>
@@ -4614,24 +5606,17 @@
           </a:solidFill>
           <a:ln/>
         </p:spPr>
-        <p:txBody>
-          <a:bodyPr/>
-          <a:lstStyle/>
-          <a:p>
-            <a:endParaRPr lang="en-BH"/>
-          </a:p>
-        </p:txBody>
-      </p:sp>
-      <p:sp>
-        <p:nvSpPr>
-          <p:cNvPr id="5" name="Text 3"/>
-          <p:cNvSpPr/>
-          <p:nvPr/>
-        </p:nvSpPr>
-        <p:spPr>
-          <a:xfrm>
-            <a:off x="630936" y="2194560"/>
-            <a:ext cx="3429000" cy="868680"/>
+      </p:sp>
+      <p:sp>
+        <p:nvSpPr>
+          <p:cNvPr id="7" name="Text 5"/>
+          <p:cNvSpPr/>
+          <p:nvPr/>
+        </p:nvSpPr>
+        <p:spPr>
+          <a:xfrm>
+            <a:off x="868680" y="1783080"/>
+            <a:ext cx="640080" cy="841248"/>
           </a:xfrm>
           <a:prstGeom prst="rect">
             <a:avLst/>
@@ -4643,11 +5628,11 @@
           <a:bodyPr wrap="square" rtlCol="0" anchor="ctr"/>
           <a:lstStyle/>
           <a:p>
-            <a:pPr marL="0" indent="0" algn="ctr">
+            <a:pPr indent="0" marL="0">
               <a:buNone/>
             </a:pPr>
             <a:r>
-              <a:rPr lang="en-US" sz="3000" b="1" dirty="0">
+              <a:rPr lang="en-US" sz="2400" b="1" dirty="0">
                 <a:solidFill>
                   <a:srgbClr val="8B0000"/>
                 </a:solidFill>
@@ -4655,22 +5640,22 @@
                 <a:ea typeface="Cambria" pitchFamily="34" charset="-122"/>
                 <a:cs typeface="Cambria" pitchFamily="34" charset="-120"/>
               </a:rPr>
-              <a:t>1,005,198</a:t>
-            </a:r>
-            <a:endParaRPr lang="en-US" sz="3000" dirty="0"/>
-          </a:p>
-        </p:txBody>
-      </p:sp>
-      <p:sp>
-        <p:nvSpPr>
-          <p:cNvPr id="6" name="Text 4"/>
-          <p:cNvSpPr/>
-          <p:nvPr/>
-        </p:nvSpPr>
-        <p:spPr>
-          <a:xfrm>
-            <a:off x="630936" y="3108960"/>
-            <a:ext cx="3429000" cy="457200"/>
+              <a:t>1</a:t>
+            </a:r>
+            <a:endParaRPr lang="en-US" sz="2400" dirty="0"/>
+          </a:p>
+        </p:txBody>
+      </p:sp>
+      <p:sp>
+        <p:nvSpPr>
+          <p:cNvPr id="8" name="Text 6"/>
+          <p:cNvSpPr/>
+          <p:nvPr/>
+        </p:nvSpPr>
+        <p:spPr>
+          <a:xfrm>
+            <a:off x="1600200" y="1783080"/>
+            <a:ext cx="9692640" cy="841248"/>
           </a:xfrm>
           <a:prstGeom prst="rect">
             <a:avLst/>
@@ -4682,11 +5667,11 @@
           <a:bodyPr wrap="square" rtlCol="0" anchor="ctr"/>
           <a:lstStyle/>
           <a:p>
-            <a:pPr marL="0" indent="0" algn="ctr">
+            <a:pPr indent="0" marL="0">
               <a:buNone/>
             </a:pPr>
             <a:r>
-              <a:rPr lang="en-US" sz="1250" kern="0" spc="100" dirty="0">
+              <a:rPr lang="en-US" sz="1550" dirty="0">
                 <a:solidFill>
                   <a:srgbClr val="1A1A1A"/>
                 </a:solidFill>
@@ -4694,22 +5679,22 @@
                 <a:ea typeface="Calibri" pitchFamily="34" charset="-122"/>
                 <a:cs typeface="Calibri" pitchFamily="34" charset="-120"/>
               </a:rPr>
-              <a:t>CRIME RECORDS</a:t>
-            </a:r>
-            <a:endParaRPr lang="en-US" sz="1250" dirty="0"/>
-          </a:p>
-        </p:txBody>
-      </p:sp>
-      <p:sp>
-        <p:nvSpPr>
-          <p:cNvPr id="7" name="Shape 5"/>
-          <p:cNvSpPr/>
-          <p:nvPr/>
-        </p:nvSpPr>
-        <p:spPr>
-          <a:xfrm>
-            <a:off x="4379976" y="1965960"/>
-            <a:ext cx="3429000" cy="1828800"/>
+              <a:t>What are the most common types of crimes reported in Los Angeles?</a:t>
+            </a:r>
+            <a:endParaRPr lang="en-US" sz="1550" dirty="0"/>
+          </a:p>
+        </p:txBody>
+      </p:sp>
+      <p:sp>
+        <p:nvSpPr>
+          <p:cNvPr id="9" name="Shape 7"/>
+          <p:cNvSpPr/>
+          <p:nvPr/>
+        </p:nvSpPr>
+        <p:spPr>
+          <a:xfrm>
+            <a:off x="640080" y="2752344"/>
+            <a:ext cx="10908792" cy="841248"/>
           </a:xfrm>
           <a:prstGeom prst="rect">
             <a:avLst/>
@@ -4719,24 +5704,17 @@
           </a:solidFill>
           <a:ln/>
         </p:spPr>
-        <p:txBody>
-          <a:bodyPr/>
-          <a:lstStyle/>
-          <a:p>
-            <a:endParaRPr lang="en-BH"/>
-          </a:p>
-        </p:txBody>
-      </p:sp>
-      <p:sp>
-        <p:nvSpPr>
-          <p:cNvPr id="8" name="Text 6"/>
-          <p:cNvSpPr/>
-          <p:nvPr/>
-        </p:nvSpPr>
-        <p:spPr>
-          <a:xfrm>
-            <a:off x="4379976" y="2194560"/>
-            <a:ext cx="3429000" cy="868680"/>
+      </p:sp>
+      <p:sp>
+        <p:nvSpPr>
+          <p:cNvPr id="10" name="Text 8"/>
+          <p:cNvSpPr/>
+          <p:nvPr/>
+        </p:nvSpPr>
+        <p:spPr>
+          <a:xfrm>
+            <a:off x="868680" y="2752344"/>
+            <a:ext cx="640080" cy="841248"/>
           </a:xfrm>
           <a:prstGeom prst="rect">
             <a:avLst/>
@@ -4748,11 +5726,11 @@
           <a:bodyPr wrap="square" rtlCol="0" anchor="ctr"/>
           <a:lstStyle/>
           <a:p>
-            <a:pPr marL="0" indent="0" algn="ctr">
+            <a:pPr indent="0" marL="0">
               <a:buNone/>
             </a:pPr>
             <a:r>
-              <a:rPr lang="en-US" sz="3000" b="1" dirty="0">
+              <a:rPr lang="en-US" sz="2400" b="1" dirty="0">
                 <a:solidFill>
                   <a:srgbClr val="8B0000"/>
                 </a:solidFill>
@@ -4760,22 +5738,22 @@
                 <a:ea typeface="Cambria" pitchFamily="34" charset="-122"/>
                 <a:cs typeface="Cambria" pitchFamily="34" charset="-120"/>
               </a:rPr>
-              <a:t>10</a:t>
-            </a:r>
-            <a:endParaRPr lang="en-US" sz="3000" dirty="0"/>
-          </a:p>
-        </p:txBody>
-      </p:sp>
-      <p:sp>
-        <p:nvSpPr>
-          <p:cNvPr id="9" name="Text 7"/>
-          <p:cNvSpPr/>
-          <p:nvPr/>
-        </p:nvSpPr>
-        <p:spPr>
-          <a:xfrm>
-            <a:off x="4379976" y="3108960"/>
-            <a:ext cx="3429000" cy="457200"/>
+              <a:t>2</a:t>
+            </a:r>
+            <a:endParaRPr lang="en-US" sz="2400" dirty="0"/>
+          </a:p>
+        </p:txBody>
+      </p:sp>
+      <p:sp>
+        <p:nvSpPr>
+          <p:cNvPr id="11" name="Text 9"/>
+          <p:cNvSpPr/>
+          <p:nvPr/>
+        </p:nvSpPr>
+        <p:spPr>
+          <a:xfrm>
+            <a:off x="1600200" y="2752344"/>
+            <a:ext cx="9692640" cy="841248"/>
           </a:xfrm>
           <a:prstGeom prst="rect">
             <a:avLst/>
@@ -4787,11 +5765,11 @@
           <a:bodyPr wrap="square" rtlCol="0" anchor="ctr"/>
           <a:lstStyle/>
           <a:p>
-            <a:pPr marL="0" indent="0" algn="ctr">
+            <a:pPr indent="0" marL="0">
               <a:buNone/>
             </a:pPr>
             <a:r>
-              <a:rPr lang="en-US" sz="1250" kern="0" spc="100" dirty="0">
+              <a:rPr lang="en-US" sz="1550" dirty="0">
                 <a:solidFill>
                   <a:srgbClr val="1A1A1A"/>
                 </a:solidFill>
@@ -4799,22 +5777,22 @@
                 <a:ea typeface="Calibri" pitchFamily="34" charset="-122"/>
                 <a:cs typeface="Calibri" pitchFamily="34" charset="-120"/>
               </a:rPr>
-              <a:t>VARIABLES</a:t>
-            </a:r>
-            <a:endParaRPr lang="en-US" sz="1250" dirty="0"/>
-          </a:p>
-        </p:txBody>
-      </p:sp>
-      <p:sp>
-        <p:nvSpPr>
-          <p:cNvPr id="10" name="Shape 8"/>
-          <p:cNvSpPr/>
-          <p:nvPr/>
-        </p:nvSpPr>
-        <p:spPr>
-          <a:xfrm>
-            <a:off x="8129016" y="1965960"/>
-            <a:ext cx="3429000" cy="1828800"/>
+              <a:t>Which areas recorded the highest number of crime incidents?</a:t>
+            </a:r>
+            <a:endParaRPr lang="en-US" sz="1550" dirty="0"/>
+          </a:p>
+        </p:txBody>
+      </p:sp>
+      <p:sp>
+        <p:nvSpPr>
+          <p:cNvPr id="12" name="Shape 10"/>
+          <p:cNvSpPr/>
+          <p:nvPr/>
+        </p:nvSpPr>
+        <p:spPr>
+          <a:xfrm>
+            <a:off x="640080" y="3721608"/>
+            <a:ext cx="10908792" cy="841248"/>
           </a:xfrm>
           <a:prstGeom prst="rect">
             <a:avLst/>
@@ -4824,24 +5802,17 @@
           </a:solidFill>
           <a:ln/>
         </p:spPr>
-        <p:txBody>
-          <a:bodyPr/>
-          <a:lstStyle/>
-          <a:p>
-            <a:endParaRPr lang="en-BH"/>
-          </a:p>
-        </p:txBody>
-      </p:sp>
-      <p:sp>
-        <p:nvSpPr>
-          <p:cNvPr id="11" name="Text 9"/>
-          <p:cNvSpPr/>
-          <p:nvPr/>
-        </p:nvSpPr>
-        <p:spPr>
-          <a:xfrm>
-            <a:off x="8129016" y="2194560"/>
-            <a:ext cx="3429000" cy="868680"/>
+      </p:sp>
+      <p:sp>
+        <p:nvSpPr>
+          <p:cNvPr id="13" name="Text 11"/>
+          <p:cNvSpPr/>
+          <p:nvPr/>
+        </p:nvSpPr>
+        <p:spPr>
+          <a:xfrm>
+            <a:off x="868680" y="3721608"/>
+            <a:ext cx="640080" cy="841248"/>
           </a:xfrm>
           <a:prstGeom prst="rect">
             <a:avLst/>
@@ -4853,11 +5824,11 @@
           <a:bodyPr wrap="square" rtlCol="0" anchor="ctr"/>
           <a:lstStyle/>
           <a:p>
-            <a:pPr marL="0" indent="0" algn="ctr">
+            <a:pPr indent="0" marL="0">
               <a:buNone/>
             </a:pPr>
             <a:r>
-              <a:rPr lang="en-US" sz="3000" b="1" dirty="0">
+              <a:rPr lang="en-US" sz="2400" b="1" dirty="0">
                 <a:solidFill>
                   <a:srgbClr val="8B0000"/>
                 </a:solidFill>
@@ -4865,22 +5836,22 @@
                 <a:ea typeface="Cambria" pitchFamily="34" charset="-122"/>
                 <a:cs typeface="Cambria" pitchFamily="34" charset="-120"/>
               </a:rPr>
-              <a:t>2020–2025</a:t>
-            </a:r>
-            <a:endParaRPr lang="en-US" sz="3000" dirty="0"/>
-          </a:p>
-        </p:txBody>
-      </p:sp>
-      <p:sp>
-        <p:nvSpPr>
-          <p:cNvPr id="12" name="Text 10"/>
-          <p:cNvSpPr/>
-          <p:nvPr/>
-        </p:nvSpPr>
-        <p:spPr>
-          <a:xfrm>
-            <a:off x="8129016" y="3108960"/>
-            <a:ext cx="3429000" cy="457200"/>
+              <a:t>3</a:t>
+            </a:r>
+            <a:endParaRPr lang="en-US" sz="2400" dirty="0"/>
+          </a:p>
+        </p:txBody>
+      </p:sp>
+      <p:sp>
+        <p:nvSpPr>
+          <p:cNvPr id="14" name="Text 12"/>
+          <p:cNvSpPr/>
+          <p:nvPr/>
+        </p:nvSpPr>
+        <p:spPr>
+          <a:xfrm>
+            <a:off x="1600200" y="3721608"/>
+            <a:ext cx="9692640" cy="841248"/>
           </a:xfrm>
           <a:prstGeom prst="rect">
             <a:avLst/>
@@ -4892,11 +5863,11 @@
           <a:bodyPr wrap="square" rtlCol="0" anchor="ctr"/>
           <a:lstStyle/>
           <a:p>
-            <a:pPr marL="0" indent="0" algn="ctr">
+            <a:pPr indent="0" marL="0">
               <a:buNone/>
             </a:pPr>
             <a:r>
-              <a:rPr lang="en-US" sz="1250" kern="0" spc="100" dirty="0">
+              <a:rPr lang="en-US" sz="1550" dirty="0">
                 <a:solidFill>
                   <a:srgbClr val="1A1A1A"/>
                 </a:solidFill>
@@ -4904,22 +5875,22 @@
                 <a:ea typeface="Calibri" pitchFamily="34" charset="-122"/>
                 <a:cs typeface="Calibri" pitchFamily="34" charset="-120"/>
               </a:rPr>
-              <a:t>TIME COVERAGE</a:t>
-            </a:r>
-            <a:endParaRPr lang="en-US" sz="1250" dirty="0"/>
-          </a:p>
-        </p:txBody>
-      </p:sp>
-      <p:sp>
-        <p:nvSpPr>
-          <p:cNvPr id="13" name="Shape 11"/>
-          <p:cNvSpPr/>
-          <p:nvPr/>
-        </p:nvSpPr>
-        <p:spPr>
-          <a:xfrm>
-            <a:off x="630936" y="4114800"/>
-            <a:ext cx="3429000" cy="1828800"/>
+              <a:t>How have crime incidents changed between 2020 and 2024?</a:t>
+            </a:r>
+            <a:endParaRPr lang="en-US" sz="1550" dirty="0"/>
+          </a:p>
+        </p:txBody>
+      </p:sp>
+      <p:sp>
+        <p:nvSpPr>
+          <p:cNvPr id="15" name="Shape 13"/>
+          <p:cNvSpPr/>
+          <p:nvPr/>
+        </p:nvSpPr>
+        <p:spPr>
+          <a:xfrm>
+            <a:off x="640080" y="4690872"/>
+            <a:ext cx="10908792" cy="841248"/>
           </a:xfrm>
           <a:prstGeom prst="rect">
             <a:avLst/>
@@ -4929,24 +5900,17 @@
           </a:solidFill>
           <a:ln/>
         </p:spPr>
-        <p:txBody>
-          <a:bodyPr/>
-          <a:lstStyle/>
-          <a:p>
-            <a:endParaRPr lang="en-BH"/>
-          </a:p>
-        </p:txBody>
-      </p:sp>
-      <p:sp>
-        <p:nvSpPr>
-          <p:cNvPr id="14" name="Text 12"/>
-          <p:cNvSpPr/>
-          <p:nvPr/>
-        </p:nvSpPr>
-        <p:spPr>
-          <a:xfrm>
-            <a:off x="630936" y="4343400"/>
-            <a:ext cx="3429000" cy="868680"/>
+      </p:sp>
+      <p:sp>
+        <p:nvSpPr>
+          <p:cNvPr id="16" name="Text 14"/>
+          <p:cNvSpPr/>
+          <p:nvPr/>
+        </p:nvSpPr>
+        <p:spPr>
+          <a:xfrm>
+            <a:off x="868680" y="4690872"/>
+            <a:ext cx="640080" cy="841248"/>
           </a:xfrm>
           <a:prstGeom prst="rect">
             <a:avLst/>
@@ -4958,11 +5922,11 @@
           <a:bodyPr wrap="square" rtlCol="0" anchor="ctr"/>
           <a:lstStyle/>
           <a:p>
-            <a:pPr marL="0" indent="0" algn="ctr">
+            <a:pPr indent="0" marL="0">
               <a:buNone/>
             </a:pPr>
             <a:r>
-              <a:rPr lang="en-US" sz="3000" b="1" dirty="0">
+              <a:rPr lang="en-US" sz="2400" b="1" dirty="0">
                 <a:solidFill>
                   <a:srgbClr val="8B0000"/>
                 </a:solidFill>
@@ -4970,22 +5934,22 @@
                 <a:ea typeface="Cambria" pitchFamily="34" charset="-122"/>
                 <a:cs typeface="Cambria" pitchFamily="34" charset="-120"/>
               </a:rPr>
-              <a:t>Los Angeles</a:t>
-            </a:r>
-            <a:endParaRPr lang="en-US" sz="3000" dirty="0"/>
-          </a:p>
-        </p:txBody>
-      </p:sp>
-      <p:sp>
-        <p:nvSpPr>
-          <p:cNvPr id="15" name="Text 13"/>
-          <p:cNvSpPr/>
-          <p:nvPr/>
-        </p:nvSpPr>
-        <p:spPr>
-          <a:xfrm>
-            <a:off x="630936" y="5257800"/>
-            <a:ext cx="3429000" cy="457200"/>
+              <a:t>4</a:t>
+            </a:r>
+            <a:endParaRPr lang="en-US" sz="2400" dirty="0"/>
+          </a:p>
+        </p:txBody>
+      </p:sp>
+      <p:sp>
+        <p:nvSpPr>
+          <p:cNvPr id="17" name="Text 15"/>
+          <p:cNvSpPr/>
+          <p:nvPr/>
+        </p:nvSpPr>
+        <p:spPr>
+          <a:xfrm>
+            <a:off x="1600200" y="4690872"/>
+            <a:ext cx="9692640" cy="841248"/>
           </a:xfrm>
           <a:prstGeom prst="rect">
             <a:avLst/>
@@ -4997,11 +5961,11 @@
           <a:bodyPr wrap="square" rtlCol="0" anchor="ctr"/>
           <a:lstStyle/>
           <a:p>
-            <a:pPr marL="0" indent="0" algn="ctr">
+            <a:pPr indent="0" marL="0">
               <a:buNone/>
             </a:pPr>
             <a:r>
-              <a:rPr lang="en-US" sz="1250" kern="0" spc="100" dirty="0">
+              <a:rPr lang="en-US" sz="1550" dirty="0">
                 <a:solidFill>
                   <a:srgbClr val="1A1A1A"/>
                 </a:solidFill>
@@ -5009,22 +5973,22 @@
                 <a:ea typeface="Calibri" pitchFamily="34" charset="-122"/>
                 <a:cs typeface="Calibri" pitchFamily="34" charset="-120"/>
               </a:rPr>
-              <a:t>LOCATION</a:t>
-            </a:r>
-            <a:endParaRPr lang="en-US" sz="1250" dirty="0"/>
-          </a:p>
-        </p:txBody>
-      </p:sp>
-      <p:sp>
-        <p:nvSpPr>
-          <p:cNvPr id="16" name="Shape 14"/>
-          <p:cNvSpPr/>
-          <p:nvPr/>
-        </p:nvSpPr>
-        <p:spPr>
-          <a:xfrm>
-            <a:off x="4379976" y="4114800"/>
-            <a:ext cx="3429000" cy="1828800"/>
+              <a:t>At what times of day are crimes reported most frequently?</a:t>
+            </a:r>
+            <a:endParaRPr lang="en-US" sz="1550" dirty="0"/>
+          </a:p>
+        </p:txBody>
+      </p:sp>
+      <p:sp>
+        <p:nvSpPr>
+          <p:cNvPr id="18" name="Shape 16"/>
+          <p:cNvSpPr/>
+          <p:nvPr/>
+        </p:nvSpPr>
+        <p:spPr>
+          <a:xfrm>
+            <a:off x="640080" y="5660136"/>
+            <a:ext cx="10908792" cy="841248"/>
           </a:xfrm>
           <a:prstGeom prst="rect">
             <a:avLst/>
@@ -5034,24 +5998,17 @@
           </a:solidFill>
           <a:ln/>
         </p:spPr>
-        <p:txBody>
-          <a:bodyPr/>
-          <a:lstStyle/>
-          <a:p>
-            <a:endParaRPr lang="en-BH"/>
-          </a:p>
-        </p:txBody>
-      </p:sp>
-      <p:sp>
-        <p:nvSpPr>
-          <p:cNvPr id="17" name="Text 15"/>
-          <p:cNvSpPr/>
-          <p:nvPr/>
-        </p:nvSpPr>
-        <p:spPr>
-          <a:xfrm>
-            <a:off x="4379976" y="4343400"/>
-            <a:ext cx="3429000" cy="868680"/>
+      </p:sp>
+      <p:sp>
+        <p:nvSpPr>
+          <p:cNvPr id="19" name="Text 17"/>
+          <p:cNvSpPr/>
+          <p:nvPr/>
+        </p:nvSpPr>
+        <p:spPr>
+          <a:xfrm>
+            <a:off x="868680" y="5660136"/>
+            <a:ext cx="640080" cy="841248"/>
           </a:xfrm>
           <a:prstGeom prst="rect">
             <a:avLst/>
@@ -5063,11 +6020,11 @@
           <a:bodyPr wrap="square" rtlCol="0" anchor="ctr"/>
           <a:lstStyle/>
           <a:p>
-            <a:pPr marL="0" indent="0" algn="ctr">
+            <a:pPr indent="0" marL="0">
               <a:buNone/>
             </a:pPr>
             <a:r>
-              <a:rPr lang="en-US" sz="3000" b="1" dirty="0">
+              <a:rPr lang="en-US" sz="2400" b="1" dirty="0">
                 <a:solidFill>
                   <a:srgbClr val="8B0000"/>
                 </a:solidFill>
@@ -5075,22 +6032,22 @@
                 <a:ea typeface="Cambria" pitchFamily="34" charset="-122"/>
                 <a:cs typeface="Cambria" pitchFamily="34" charset="-120"/>
               </a:rPr>
-              <a:t>0</a:t>
-            </a:r>
-            <a:endParaRPr lang="en-US" sz="3000" dirty="0"/>
-          </a:p>
-        </p:txBody>
-      </p:sp>
-      <p:sp>
-        <p:nvSpPr>
-          <p:cNvPr id="18" name="Text 16"/>
-          <p:cNvSpPr/>
-          <p:nvPr/>
-        </p:nvSpPr>
-        <p:spPr>
-          <a:xfrm>
-            <a:off x="4379976" y="5257800"/>
-            <a:ext cx="3429000" cy="457200"/>
+              <a:t>5</a:t>
+            </a:r>
+            <a:endParaRPr lang="en-US" sz="2400" dirty="0"/>
+          </a:p>
+        </p:txBody>
+      </p:sp>
+      <p:sp>
+        <p:nvSpPr>
+          <p:cNvPr id="20" name="Text 18"/>
+          <p:cNvSpPr/>
+          <p:nvPr/>
+        </p:nvSpPr>
+        <p:spPr>
+          <a:xfrm>
+            <a:off x="1600200" y="5660136"/>
+            <a:ext cx="9692640" cy="841248"/>
           </a:xfrm>
           <a:prstGeom prst="rect">
             <a:avLst/>
@@ -5102,11 +6059,11 @@
           <a:bodyPr wrap="square" rtlCol="0" anchor="ctr"/>
           <a:lstStyle/>
           <a:p>
-            <a:pPr marL="0" indent="0" algn="ctr">
+            <a:pPr indent="0" marL="0">
               <a:buNone/>
             </a:pPr>
             <a:r>
-              <a:rPr lang="en-US" sz="1250" kern="0" spc="100" dirty="0">
+              <a:rPr lang="en-US" sz="1550" dirty="0">
                 <a:solidFill>
                   <a:srgbClr val="1A1A1A"/>
                 </a:solidFill>
@@ -5114,49 +6071,22 @@
                 <a:ea typeface="Calibri" pitchFamily="34" charset="-122"/>
                 <a:cs typeface="Calibri" pitchFamily="34" charset="-120"/>
               </a:rPr>
-              <a:t>MISSING VALUES</a:t>
-            </a:r>
-            <a:endParaRPr lang="en-US" sz="1250" dirty="0"/>
-          </a:p>
-        </p:txBody>
-      </p:sp>
-      <p:sp>
-        <p:nvSpPr>
-          <p:cNvPr id="19" name="Shape 17"/>
-          <p:cNvSpPr/>
-          <p:nvPr/>
-        </p:nvSpPr>
-        <p:spPr>
-          <a:xfrm>
-            <a:off x="8129016" y="4114800"/>
-            <a:ext cx="3429000" cy="1828800"/>
-          </a:xfrm>
-          <a:prstGeom prst="rect">
-            <a:avLst/>
-          </a:prstGeom>
-          <a:solidFill>
-            <a:srgbClr val="F4F4F4"/>
-          </a:solidFill>
-          <a:ln/>
-        </p:spPr>
-        <p:txBody>
-          <a:bodyPr/>
-          <a:lstStyle/>
-          <a:p>
-            <a:endParaRPr lang="en-BH"/>
-          </a:p>
-        </p:txBody>
-      </p:sp>
-      <p:sp>
-        <p:nvSpPr>
-          <p:cNvPr id="20" name="Text 18"/>
-          <p:cNvSpPr/>
-          <p:nvPr/>
-        </p:nvSpPr>
-        <p:spPr>
-          <a:xfrm>
-            <a:off x="8129016" y="4343400"/>
-            <a:ext cx="3429000" cy="868680"/>
+              <a:t>What are the most common crime types within the highest-crime area?</a:t>
+            </a:r>
+            <a:endParaRPr lang="en-US" sz="1550" dirty="0"/>
+          </a:p>
+        </p:txBody>
+      </p:sp>
+      <p:sp>
+        <p:nvSpPr>
+          <p:cNvPr id="21" name="Text 19"/>
+          <p:cNvSpPr/>
+          <p:nvPr/>
+        </p:nvSpPr>
+        <p:spPr>
+          <a:xfrm>
+            <a:off x="11475720" y="6446520"/>
+            <a:ext cx="457200" cy="320040"/>
           </a:xfrm>
           <a:prstGeom prst="rect">
             <a:avLst/>
@@ -5168,97 +6098,19 @@
           <a:bodyPr wrap="square" rtlCol="0" anchor="ctr"/>
           <a:lstStyle/>
           <a:p>
-            <a:pPr marL="0" indent="0" algn="ctr">
+            <a:pPr algn="r" indent="0" marL="0">
               <a:buNone/>
             </a:pPr>
             <a:r>
-              <a:rPr lang="en-US" sz="3000" b="1" dirty="0">
-                <a:solidFill>
-                  <a:srgbClr val="8B0000"/>
-                </a:solidFill>
-                <a:latin typeface="Cambria" pitchFamily="34" charset="0"/>
-                <a:ea typeface="Cambria" pitchFamily="34" charset="-122"/>
-                <a:cs typeface="Cambria" pitchFamily="34" charset="-120"/>
-              </a:rPr>
-              <a:t>0</a:t>
-            </a:r>
-            <a:endParaRPr lang="en-US" sz="3000" dirty="0"/>
-          </a:p>
-        </p:txBody>
-      </p:sp>
-      <p:sp>
-        <p:nvSpPr>
-          <p:cNvPr id="21" name="Text 19"/>
-          <p:cNvSpPr/>
-          <p:nvPr/>
-        </p:nvSpPr>
-        <p:spPr>
-          <a:xfrm>
-            <a:off x="8129016" y="5257800"/>
-            <a:ext cx="3429000" cy="457200"/>
-          </a:xfrm>
-          <a:prstGeom prst="rect">
-            <a:avLst/>
-          </a:prstGeom>
-          <a:noFill/>
-          <a:ln/>
-        </p:spPr>
-        <p:txBody>
-          <a:bodyPr wrap="square" rtlCol="0" anchor="ctr"/>
-          <a:lstStyle/>
-          <a:p>
-            <a:pPr marL="0" indent="0" algn="ctr">
-              <a:buNone/>
-            </a:pPr>
-            <a:r>
-              <a:rPr lang="en-US" sz="1250" kern="0" spc="100" dirty="0">
-                <a:solidFill>
-                  <a:srgbClr val="1A1A1A"/>
+              <a:rPr lang="en-US" sz="1000" dirty="0">
+                <a:solidFill>
+                  <a:srgbClr val="AAAAAA"/>
                 </a:solidFill>
                 <a:latin typeface="Calibri" pitchFamily="34" charset="0"/>
                 <a:ea typeface="Calibri" pitchFamily="34" charset="-122"/>
                 <a:cs typeface="Calibri" pitchFamily="34" charset="-120"/>
               </a:rPr>
-              <a:t>DUPLICATE RECORDS</a:t>
-            </a:r>
-            <a:endParaRPr lang="en-US" sz="1250" dirty="0"/>
-          </a:p>
-        </p:txBody>
-      </p:sp>
-      <p:sp>
-        <p:nvSpPr>
-          <p:cNvPr id="22" name="Text 20"/>
-          <p:cNvSpPr/>
-          <p:nvPr/>
-        </p:nvSpPr>
-        <p:spPr>
-          <a:xfrm>
-            <a:off x="11475720" y="6446520"/>
-            <a:ext cx="457200" cy="320040"/>
-          </a:xfrm>
-          <a:prstGeom prst="rect">
-            <a:avLst/>
-          </a:prstGeom>
-          <a:noFill/>
-          <a:ln/>
-        </p:spPr>
-        <p:txBody>
-          <a:bodyPr wrap="square" rtlCol="0" anchor="ctr"/>
-          <a:lstStyle/>
-          <a:p>
-            <a:pPr marL="0" indent="0" algn="r">
-              <a:buNone/>
-            </a:pPr>
-            <a:r>
-              <a:rPr lang="en-US" sz="1000" dirty="0">
-                <a:solidFill>
-                  <a:srgbClr val="AAAAAA"/>
-                </a:solidFill>
-                <a:latin typeface="Calibri" pitchFamily="34" charset="0"/>
-                <a:ea typeface="Calibri" pitchFamily="34" charset="-122"/>
-                <a:cs typeface="Calibri" pitchFamily="34" charset="-120"/>
-              </a:rPr>
-              <a:t>3</a:t>
+              <a:t>4</a:t>
             </a:r>
             <a:endParaRPr lang="en-US" sz="1000" dirty="0"/>
           </a:p>
@@ -5272,15 +6124,14 @@
 </p:sld>
 </file>
 
-<file path=ppt/slides/slide4.xml><?xml version="1.0" encoding="utf-8"?>
+<file path=ppt/slides/slide5.xml><?xml version="1.0" encoding="utf-8"?>
 <p:sld xmlns:a="http://schemas.openxmlformats.org/drawingml/2006/main" xmlns:r="http://schemas.openxmlformats.org/officeDocument/2006/relationships" xmlns:p="http://schemas.openxmlformats.org/presentationml/2006/main">
-  <p:cSld name="Slide 4">
+  <p:cSld name="Slide 5">
     <p:bg>
       <p:bgPr>
         <a:solidFill>
           <a:srgbClr val="FFFFFF"/>
         </a:solidFill>
-        <a:effectLst/>
       </p:bgPr>
     </p:bg>
     <p:spTree>
@@ -5297,30 +6148,751 @@
           <a:chExt cx="0" cy="0"/>
         </a:xfrm>
       </p:grpSpPr>
-      <p:pic>
-        <p:nvPicPr>
-          <p:cNvPr id="2" name="Image 0" descr="top10_crime_types.png"/>
-          <p:cNvPicPr>
-            <a:picLocks noChangeAspect="1"/>
-          </p:cNvPicPr>
-          <p:nvPr/>
-        </p:nvPicPr>
-        <p:blipFill>
-          <a:blip r:embed="rId3"/>
-          <a:stretch>
-            <a:fillRect/>
-          </a:stretch>
-        </p:blipFill>
-        <p:spPr>
-          <a:xfrm>
-            <a:off x="0" y="1235416"/>
-            <a:ext cx="11640312" cy="5170941"/>
-          </a:xfrm>
-          <a:prstGeom prst="rect">
-            <a:avLst/>
-          </a:prstGeom>
-        </p:spPr>
-      </p:pic>
+      <p:sp>
+        <p:nvSpPr>
+          <p:cNvPr id="2" name="Shape 0"/>
+          <p:cNvSpPr/>
+          <p:nvPr/>
+        </p:nvSpPr>
+        <p:spPr>
+          <a:xfrm>
+            <a:off x="0" y="0"/>
+            <a:ext cx="12188952" cy="128016"/>
+          </a:xfrm>
+          <a:prstGeom prst="rect">
+            <a:avLst/>
+          </a:prstGeom>
+          <a:solidFill>
+            <a:srgbClr val="8B0000"/>
+          </a:solidFill>
+          <a:ln/>
+        </p:spPr>
+      </p:sp>
+      <p:sp>
+        <p:nvSpPr>
+          <p:cNvPr id="3" name="Text 1"/>
+          <p:cNvSpPr/>
+          <p:nvPr/>
+        </p:nvSpPr>
+        <p:spPr>
+          <a:xfrm>
+            <a:off x="640080" y="457200"/>
+            <a:ext cx="10881360" cy="640080"/>
+          </a:xfrm>
+          <a:prstGeom prst="rect">
+            <a:avLst/>
+          </a:prstGeom>
+          <a:noFill/>
+          <a:ln/>
+        </p:spPr>
+        <p:txBody>
+          <a:bodyPr wrap="square" rtlCol="0" anchor="ctr"/>
+          <a:lstStyle/>
+          <a:p>
+            <a:pPr indent="0" marL="0">
+              <a:buNone/>
+            </a:pPr>
+            <a:r>
+              <a:rPr lang="en-US" sz="3200" b="1" dirty="0">
+                <a:solidFill>
+                  <a:srgbClr val="1A1A1A"/>
+                </a:solidFill>
+                <a:latin typeface="Cambria" pitchFamily="34" charset="0"/>
+                <a:ea typeface="Cambria" pitchFamily="34" charset="-122"/>
+                <a:cs typeface="Cambria" pitchFamily="34" charset="-120"/>
+              </a:rPr>
+              <a:t>Dataset Overview</a:t>
+            </a:r>
+            <a:endParaRPr lang="en-US" sz="3200" dirty="0"/>
+          </a:p>
+        </p:txBody>
+      </p:sp>
+      <p:sp>
+        <p:nvSpPr>
+          <p:cNvPr id="4" name="Shape 2"/>
+          <p:cNvSpPr/>
+          <p:nvPr/>
+        </p:nvSpPr>
+        <p:spPr>
+          <a:xfrm>
+            <a:off x="658368" y="1133856"/>
+            <a:ext cx="822960" cy="54864"/>
+          </a:xfrm>
+          <a:prstGeom prst="rect">
+            <a:avLst/>
+          </a:prstGeom>
+          <a:solidFill>
+            <a:srgbClr val="8B0000"/>
+          </a:solidFill>
+          <a:ln/>
+        </p:spPr>
+      </p:sp>
+      <p:sp>
+        <p:nvSpPr>
+          <p:cNvPr id="5" name="Text 3"/>
+          <p:cNvSpPr/>
+          <p:nvPr/>
+        </p:nvSpPr>
+        <p:spPr>
+          <a:xfrm>
+            <a:off x="640080" y="1051560"/>
+            <a:ext cx="10881360" cy="365760"/>
+          </a:xfrm>
+          <a:prstGeom prst="rect">
+            <a:avLst/>
+          </a:prstGeom>
+          <a:noFill/>
+          <a:ln/>
+        </p:spPr>
+        <p:txBody>
+          <a:bodyPr wrap="square" rtlCol="0" anchor="ctr"/>
+          <a:lstStyle/>
+          <a:p>
+            <a:pPr indent="0" marL="0">
+              <a:buNone/>
+            </a:pPr>
+            <a:r>
+              <a:rPr lang="en-US" sz="1500" i="1" dirty="0">
+                <a:solidFill>
+                  <a:srgbClr val="5A5A5A"/>
+                </a:solidFill>
+                <a:latin typeface="Calibri" pitchFamily="34" charset="0"/>
+                <a:ea typeface="Calibri" pitchFamily="34" charset="-122"/>
+                <a:cs typeface="Calibri" pitchFamily="34" charset="-120"/>
+              </a:rPr>
+              <a:t>LAPD Crime Data, 2020–2024</a:t>
+            </a:r>
+            <a:endParaRPr lang="en-US" sz="1500" dirty="0"/>
+          </a:p>
+        </p:txBody>
+      </p:sp>
+      <p:sp>
+        <p:nvSpPr>
+          <p:cNvPr id="6" name="Shape 4"/>
+          <p:cNvSpPr/>
+          <p:nvPr/>
+        </p:nvSpPr>
+        <p:spPr>
+          <a:xfrm>
+            <a:off x="630936" y="1965960"/>
+            <a:ext cx="3429000" cy="1828800"/>
+          </a:xfrm>
+          <a:prstGeom prst="rect">
+            <a:avLst/>
+          </a:prstGeom>
+          <a:solidFill>
+            <a:srgbClr val="F4F4F4"/>
+          </a:solidFill>
+          <a:ln/>
+        </p:spPr>
+      </p:sp>
+      <p:sp>
+        <p:nvSpPr>
+          <p:cNvPr id="7" name="Text 5"/>
+          <p:cNvSpPr/>
+          <p:nvPr/>
+        </p:nvSpPr>
+        <p:spPr>
+          <a:xfrm>
+            <a:off x="630936" y="2194560"/>
+            <a:ext cx="3429000" cy="868680"/>
+          </a:xfrm>
+          <a:prstGeom prst="rect">
+            <a:avLst/>
+          </a:prstGeom>
+          <a:noFill/>
+          <a:ln/>
+        </p:spPr>
+        <p:txBody>
+          <a:bodyPr wrap="square" rtlCol="0" anchor="ctr"/>
+          <a:lstStyle/>
+          <a:p>
+            <a:pPr algn="ctr" indent="0" marL="0">
+              <a:buNone/>
+            </a:pPr>
+            <a:r>
+              <a:rPr lang="en-US" sz="3000" b="1" dirty="0">
+                <a:solidFill>
+                  <a:srgbClr val="8B0000"/>
+                </a:solidFill>
+                <a:latin typeface="Cambria" pitchFamily="34" charset="0"/>
+                <a:ea typeface="Cambria" pitchFamily="34" charset="-122"/>
+                <a:cs typeface="Cambria" pitchFamily="34" charset="-120"/>
+              </a:rPr>
+              <a:t>1,004,904</a:t>
+            </a:r>
+            <a:endParaRPr lang="en-US" sz="3000" dirty="0"/>
+          </a:p>
+        </p:txBody>
+      </p:sp>
+      <p:sp>
+        <p:nvSpPr>
+          <p:cNvPr id="8" name="Text 6"/>
+          <p:cNvSpPr/>
+          <p:nvPr/>
+        </p:nvSpPr>
+        <p:spPr>
+          <a:xfrm>
+            <a:off x="630936" y="3108960"/>
+            <a:ext cx="3429000" cy="457200"/>
+          </a:xfrm>
+          <a:prstGeom prst="rect">
+            <a:avLst/>
+          </a:prstGeom>
+          <a:noFill/>
+          <a:ln/>
+        </p:spPr>
+        <p:txBody>
+          <a:bodyPr wrap="square" rtlCol="0" anchor="ctr"/>
+          <a:lstStyle/>
+          <a:p>
+            <a:pPr algn="ctr" indent="0" marL="0">
+              <a:buNone/>
+            </a:pPr>
+            <a:r>
+              <a:rPr lang="en-US" sz="1250" spc="100" kern="0" dirty="0">
+                <a:solidFill>
+                  <a:srgbClr val="1A1A1A"/>
+                </a:solidFill>
+                <a:latin typeface="Calibri" pitchFamily="34" charset="0"/>
+                <a:ea typeface="Calibri" pitchFamily="34" charset="-122"/>
+                <a:cs typeface="Calibri" pitchFamily="34" charset="-120"/>
+              </a:rPr>
+              <a:t>CRIME RECORDS</a:t>
+            </a:r>
+            <a:endParaRPr lang="en-US" sz="1250" dirty="0"/>
+          </a:p>
+        </p:txBody>
+      </p:sp>
+      <p:sp>
+        <p:nvSpPr>
+          <p:cNvPr id="9" name="Shape 7"/>
+          <p:cNvSpPr/>
+          <p:nvPr/>
+        </p:nvSpPr>
+        <p:spPr>
+          <a:xfrm>
+            <a:off x="4379976" y="1965960"/>
+            <a:ext cx="3429000" cy="1828800"/>
+          </a:xfrm>
+          <a:prstGeom prst="rect">
+            <a:avLst/>
+          </a:prstGeom>
+          <a:solidFill>
+            <a:srgbClr val="F4F4F4"/>
+          </a:solidFill>
+          <a:ln/>
+        </p:spPr>
+      </p:sp>
+      <p:sp>
+        <p:nvSpPr>
+          <p:cNvPr id="10" name="Text 8"/>
+          <p:cNvSpPr/>
+          <p:nvPr/>
+        </p:nvSpPr>
+        <p:spPr>
+          <a:xfrm>
+            <a:off x="4379976" y="2194560"/>
+            <a:ext cx="3429000" cy="868680"/>
+          </a:xfrm>
+          <a:prstGeom prst="rect">
+            <a:avLst/>
+          </a:prstGeom>
+          <a:noFill/>
+          <a:ln/>
+        </p:spPr>
+        <p:txBody>
+          <a:bodyPr wrap="square" rtlCol="0" anchor="ctr"/>
+          <a:lstStyle/>
+          <a:p>
+            <a:pPr algn="ctr" indent="0" marL="0">
+              <a:buNone/>
+            </a:pPr>
+            <a:r>
+              <a:rPr lang="en-US" sz="3000" b="1" dirty="0">
+                <a:solidFill>
+                  <a:srgbClr val="8B0000"/>
+                </a:solidFill>
+                <a:latin typeface="Cambria" pitchFamily="34" charset="0"/>
+                <a:ea typeface="Cambria" pitchFamily="34" charset="-122"/>
+                <a:cs typeface="Cambria" pitchFamily="34" charset="-120"/>
+              </a:rPr>
+              <a:t>10</a:t>
+            </a:r>
+            <a:endParaRPr lang="en-US" sz="3000" dirty="0"/>
+          </a:p>
+        </p:txBody>
+      </p:sp>
+      <p:sp>
+        <p:nvSpPr>
+          <p:cNvPr id="11" name="Text 9"/>
+          <p:cNvSpPr/>
+          <p:nvPr/>
+        </p:nvSpPr>
+        <p:spPr>
+          <a:xfrm>
+            <a:off x="4379976" y="3108960"/>
+            <a:ext cx="3429000" cy="457200"/>
+          </a:xfrm>
+          <a:prstGeom prst="rect">
+            <a:avLst/>
+          </a:prstGeom>
+          <a:noFill/>
+          <a:ln/>
+        </p:spPr>
+        <p:txBody>
+          <a:bodyPr wrap="square" rtlCol="0" anchor="ctr"/>
+          <a:lstStyle/>
+          <a:p>
+            <a:pPr algn="ctr" indent="0" marL="0">
+              <a:buNone/>
+            </a:pPr>
+            <a:r>
+              <a:rPr lang="en-US" sz="1250" spc="100" kern="0" dirty="0">
+                <a:solidFill>
+                  <a:srgbClr val="1A1A1A"/>
+                </a:solidFill>
+                <a:latin typeface="Calibri" pitchFamily="34" charset="0"/>
+                <a:ea typeface="Calibri" pitchFamily="34" charset="-122"/>
+                <a:cs typeface="Calibri" pitchFamily="34" charset="-120"/>
+              </a:rPr>
+              <a:t>VARIABLES</a:t>
+            </a:r>
+            <a:endParaRPr lang="en-US" sz="1250" dirty="0"/>
+          </a:p>
+        </p:txBody>
+      </p:sp>
+      <p:sp>
+        <p:nvSpPr>
+          <p:cNvPr id="12" name="Shape 10"/>
+          <p:cNvSpPr/>
+          <p:nvPr/>
+        </p:nvSpPr>
+        <p:spPr>
+          <a:xfrm>
+            <a:off x="8129016" y="1965960"/>
+            <a:ext cx="3429000" cy="1828800"/>
+          </a:xfrm>
+          <a:prstGeom prst="rect">
+            <a:avLst/>
+          </a:prstGeom>
+          <a:solidFill>
+            <a:srgbClr val="F4F4F4"/>
+          </a:solidFill>
+          <a:ln/>
+        </p:spPr>
+      </p:sp>
+      <p:sp>
+        <p:nvSpPr>
+          <p:cNvPr id="13" name="Text 11"/>
+          <p:cNvSpPr/>
+          <p:nvPr/>
+        </p:nvSpPr>
+        <p:spPr>
+          <a:xfrm>
+            <a:off x="8129016" y="2194560"/>
+            <a:ext cx="3429000" cy="868680"/>
+          </a:xfrm>
+          <a:prstGeom prst="rect">
+            <a:avLst/>
+          </a:prstGeom>
+          <a:noFill/>
+          <a:ln/>
+        </p:spPr>
+        <p:txBody>
+          <a:bodyPr wrap="square" rtlCol="0" anchor="ctr"/>
+          <a:lstStyle/>
+          <a:p>
+            <a:pPr algn="ctr" indent="0" marL="0">
+              <a:buNone/>
+            </a:pPr>
+            <a:r>
+              <a:rPr lang="en-US" sz="3000" b="1" dirty="0">
+                <a:solidFill>
+                  <a:srgbClr val="8B0000"/>
+                </a:solidFill>
+                <a:latin typeface="Cambria" pitchFamily="34" charset="0"/>
+                <a:ea typeface="Cambria" pitchFamily="34" charset="-122"/>
+                <a:cs typeface="Cambria" pitchFamily="34" charset="-120"/>
+              </a:rPr>
+              <a:t>2020–2024</a:t>
+            </a:r>
+            <a:endParaRPr lang="en-US" sz="3000" dirty="0"/>
+          </a:p>
+        </p:txBody>
+      </p:sp>
+      <p:sp>
+        <p:nvSpPr>
+          <p:cNvPr id="14" name="Text 12"/>
+          <p:cNvSpPr/>
+          <p:nvPr/>
+        </p:nvSpPr>
+        <p:spPr>
+          <a:xfrm>
+            <a:off x="8129016" y="3108960"/>
+            <a:ext cx="3429000" cy="457200"/>
+          </a:xfrm>
+          <a:prstGeom prst="rect">
+            <a:avLst/>
+          </a:prstGeom>
+          <a:noFill/>
+          <a:ln/>
+        </p:spPr>
+        <p:txBody>
+          <a:bodyPr wrap="square" rtlCol="0" anchor="ctr"/>
+          <a:lstStyle/>
+          <a:p>
+            <a:pPr algn="ctr" indent="0" marL="0">
+              <a:buNone/>
+            </a:pPr>
+            <a:r>
+              <a:rPr lang="en-US" sz="1250" spc="100" kern="0" dirty="0">
+                <a:solidFill>
+                  <a:srgbClr val="1A1A1A"/>
+                </a:solidFill>
+                <a:latin typeface="Calibri" pitchFamily="34" charset="0"/>
+                <a:ea typeface="Calibri" pitchFamily="34" charset="-122"/>
+                <a:cs typeface="Calibri" pitchFamily="34" charset="-120"/>
+              </a:rPr>
+              <a:t>TIME COVERAGE</a:t>
+            </a:r>
+            <a:endParaRPr lang="en-US" sz="1250" dirty="0"/>
+          </a:p>
+        </p:txBody>
+      </p:sp>
+      <p:sp>
+        <p:nvSpPr>
+          <p:cNvPr id="15" name="Shape 13"/>
+          <p:cNvSpPr/>
+          <p:nvPr/>
+        </p:nvSpPr>
+        <p:spPr>
+          <a:xfrm>
+            <a:off x="630936" y="4114800"/>
+            <a:ext cx="3429000" cy="1828800"/>
+          </a:xfrm>
+          <a:prstGeom prst="rect">
+            <a:avLst/>
+          </a:prstGeom>
+          <a:solidFill>
+            <a:srgbClr val="F4F4F4"/>
+          </a:solidFill>
+          <a:ln/>
+        </p:spPr>
+      </p:sp>
+      <p:sp>
+        <p:nvSpPr>
+          <p:cNvPr id="16" name="Text 14"/>
+          <p:cNvSpPr/>
+          <p:nvPr/>
+        </p:nvSpPr>
+        <p:spPr>
+          <a:xfrm>
+            <a:off x="630936" y="4343400"/>
+            <a:ext cx="3429000" cy="868680"/>
+          </a:xfrm>
+          <a:prstGeom prst="rect">
+            <a:avLst/>
+          </a:prstGeom>
+          <a:noFill/>
+          <a:ln/>
+        </p:spPr>
+        <p:txBody>
+          <a:bodyPr wrap="square" rtlCol="0" anchor="ctr"/>
+          <a:lstStyle/>
+          <a:p>
+            <a:pPr algn="ctr" indent="0" marL="0">
+              <a:buNone/>
+            </a:pPr>
+            <a:r>
+              <a:rPr lang="en-US" sz="3000" b="1" dirty="0">
+                <a:solidFill>
+                  <a:srgbClr val="8B0000"/>
+                </a:solidFill>
+                <a:latin typeface="Cambria" pitchFamily="34" charset="0"/>
+                <a:ea typeface="Cambria" pitchFamily="34" charset="-122"/>
+                <a:cs typeface="Cambria" pitchFamily="34" charset="-120"/>
+              </a:rPr>
+              <a:t>Los Angeles</a:t>
+            </a:r>
+            <a:endParaRPr lang="en-US" sz="3000" dirty="0"/>
+          </a:p>
+        </p:txBody>
+      </p:sp>
+      <p:sp>
+        <p:nvSpPr>
+          <p:cNvPr id="17" name="Text 15"/>
+          <p:cNvSpPr/>
+          <p:nvPr/>
+        </p:nvSpPr>
+        <p:spPr>
+          <a:xfrm>
+            <a:off x="630936" y="5257800"/>
+            <a:ext cx="3429000" cy="457200"/>
+          </a:xfrm>
+          <a:prstGeom prst="rect">
+            <a:avLst/>
+          </a:prstGeom>
+          <a:noFill/>
+          <a:ln/>
+        </p:spPr>
+        <p:txBody>
+          <a:bodyPr wrap="square" rtlCol="0" anchor="ctr"/>
+          <a:lstStyle/>
+          <a:p>
+            <a:pPr algn="ctr" indent="0" marL="0">
+              <a:buNone/>
+            </a:pPr>
+            <a:r>
+              <a:rPr lang="en-US" sz="1250" spc="100" kern="0" dirty="0">
+                <a:solidFill>
+                  <a:srgbClr val="1A1A1A"/>
+                </a:solidFill>
+                <a:latin typeface="Calibri" pitchFamily="34" charset="0"/>
+                <a:ea typeface="Calibri" pitchFamily="34" charset="-122"/>
+                <a:cs typeface="Calibri" pitchFamily="34" charset="-120"/>
+              </a:rPr>
+              <a:t>LOCATION</a:t>
+            </a:r>
+            <a:endParaRPr lang="en-US" sz="1250" dirty="0"/>
+          </a:p>
+        </p:txBody>
+      </p:sp>
+      <p:sp>
+        <p:nvSpPr>
+          <p:cNvPr id="18" name="Shape 16"/>
+          <p:cNvSpPr/>
+          <p:nvPr/>
+        </p:nvSpPr>
+        <p:spPr>
+          <a:xfrm>
+            <a:off x="4379976" y="4114800"/>
+            <a:ext cx="3429000" cy="1828800"/>
+          </a:xfrm>
+          <a:prstGeom prst="rect">
+            <a:avLst/>
+          </a:prstGeom>
+          <a:solidFill>
+            <a:srgbClr val="F4F4F4"/>
+          </a:solidFill>
+          <a:ln/>
+        </p:spPr>
+      </p:sp>
+      <p:sp>
+        <p:nvSpPr>
+          <p:cNvPr id="19" name="Text 17"/>
+          <p:cNvSpPr/>
+          <p:nvPr/>
+        </p:nvSpPr>
+        <p:spPr>
+          <a:xfrm>
+            <a:off x="4379976" y="4343400"/>
+            <a:ext cx="3429000" cy="868680"/>
+          </a:xfrm>
+          <a:prstGeom prst="rect">
+            <a:avLst/>
+          </a:prstGeom>
+          <a:noFill/>
+          <a:ln/>
+        </p:spPr>
+        <p:txBody>
+          <a:bodyPr wrap="square" rtlCol="0" anchor="ctr"/>
+          <a:lstStyle/>
+          <a:p>
+            <a:pPr algn="ctr" indent="0" marL="0">
+              <a:buNone/>
+            </a:pPr>
+            <a:r>
+              <a:rPr lang="en-US" sz="3000" b="1" dirty="0">
+                <a:solidFill>
+                  <a:srgbClr val="8B0000"/>
+                </a:solidFill>
+                <a:latin typeface="Cambria" pitchFamily="34" charset="0"/>
+                <a:ea typeface="Cambria" pitchFamily="34" charset="-122"/>
+                <a:cs typeface="Cambria" pitchFamily="34" charset="-120"/>
+              </a:rPr>
+              <a:t>0</a:t>
+            </a:r>
+            <a:endParaRPr lang="en-US" sz="3000" dirty="0"/>
+          </a:p>
+        </p:txBody>
+      </p:sp>
+      <p:sp>
+        <p:nvSpPr>
+          <p:cNvPr id="20" name="Text 18"/>
+          <p:cNvSpPr/>
+          <p:nvPr/>
+        </p:nvSpPr>
+        <p:spPr>
+          <a:xfrm>
+            <a:off x="4379976" y="5257800"/>
+            <a:ext cx="3429000" cy="457200"/>
+          </a:xfrm>
+          <a:prstGeom prst="rect">
+            <a:avLst/>
+          </a:prstGeom>
+          <a:noFill/>
+          <a:ln/>
+        </p:spPr>
+        <p:txBody>
+          <a:bodyPr wrap="square" rtlCol="0" anchor="ctr"/>
+          <a:lstStyle/>
+          <a:p>
+            <a:pPr algn="ctr" indent="0" marL="0">
+              <a:buNone/>
+            </a:pPr>
+            <a:r>
+              <a:rPr lang="en-US" sz="1250" spc="100" kern="0" dirty="0">
+                <a:solidFill>
+                  <a:srgbClr val="1A1A1A"/>
+                </a:solidFill>
+                <a:latin typeface="Calibri" pitchFamily="34" charset="0"/>
+                <a:ea typeface="Calibri" pitchFamily="34" charset="-122"/>
+                <a:cs typeface="Calibri" pitchFamily="34" charset="-120"/>
+              </a:rPr>
+              <a:t>MISSING VALUES</a:t>
+            </a:r>
+            <a:endParaRPr lang="en-US" sz="1250" dirty="0"/>
+          </a:p>
+        </p:txBody>
+      </p:sp>
+      <p:sp>
+        <p:nvSpPr>
+          <p:cNvPr id="21" name="Shape 19"/>
+          <p:cNvSpPr/>
+          <p:nvPr/>
+        </p:nvSpPr>
+        <p:spPr>
+          <a:xfrm>
+            <a:off x="8129016" y="4114800"/>
+            <a:ext cx="3429000" cy="1828800"/>
+          </a:xfrm>
+          <a:prstGeom prst="rect">
+            <a:avLst/>
+          </a:prstGeom>
+          <a:solidFill>
+            <a:srgbClr val="F4F4F4"/>
+          </a:solidFill>
+          <a:ln/>
+        </p:spPr>
+      </p:sp>
+      <p:sp>
+        <p:nvSpPr>
+          <p:cNvPr id="22" name="Text 20"/>
+          <p:cNvSpPr/>
+          <p:nvPr/>
+        </p:nvSpPr>
+        <p:spPr>
+          <a:xfrm>
+            <a:off x="8129016" y="4343400"/>
+            <a:ext cx="3429000" cy="868680"/>
+          </a:xfrm>
+          <a:prstGeom prst="rect">
+            <a:avLst/>
+          </a:prstGeom>
+          <a:noFill/>
+          <a:ln/>
+        </p:spPr>
+        <p:txBody>
+          <a:bodyPr wrap="square" rtlCol="0" anchor="ctr"/>
+          <a:lstStyle/>
+          <a:p>
+            <a:pPr algn="ctr" indent="0" marL="0">
+              <a:buNone/>
+            </a:pPr>
+            <a:r>
+              <a:rPr lang="en-US" sz="3000" b="1" dirty="0">
+                <a:solidFill>
+                  <a:srgbClr val="8B0000"/>
+                </a:solidFill>
+                <a:latin typeface="Cambria" pitchFamily="34" charset="0"/>
+                <a:ea typeface="Cambria" pitchFamily="34" charset="-122"/>
+                <a:cs typeface="Cambria" pitchFamily="34" charset="-120"/>
+              </a:rPr>
+              <a:t>0</a:t>
+            </a:r>
+            <a:endParaRPr lang="en-US" sz="3000" dirty="0"/>
+          </a:p>
+        </p:txBody>
+      </p:sp>
+      <p:sp>
+        <p:nvSpPr>
+          <p:cNvPr id="23" name="Text 21"/>
+          <p:cNvSpPr/>
+          <p:nvPr/>
+        </p:nvSpPr>
+        <p:spPr>
+          <a:xfrm>
+            <a:off x="8129016" y="5257800"/>
+            <a:ext cx="3429000" cy="457200"/>
+          </a:xfrm>
+          <a:prstGeom prst="rect">
+            <a:avLst/>
+          </a:prstGeom>
+          <a:noFill/>
+          <a:ln/>
+        </p:spPr>
+        <p:txBody>
+          <a:bodyPr wrap="square" rtlCol="0" anchor="ctr"/>
+          <a:lstStyle/>
+          <a:p>
+            <a:pPr algn="ctr" indent="0" marL="0">
+              <a:buNone/>
+            </a:pPr>
+            <a:r>
+              <a:rPr lang="en-US" sz="1250" spc="100" kern="0" dirty="0">
+                <a:solidFill>
+                  <a:srgbClr val="1A1A1A"/>
+                </a:solidFill>
+                <a:latin typeface="Calibri" pitchFamily="34" charset="0"/>
+                <a:ea typeface="Calibri" pitchFamily="34" charset="-122"/>
+                <a:cs typeface="Calibri" pitchFamily="34" charset="-120"/>
+              </a:rPr>
+              <a:t>DUPLICATE RECORDS</a:t>
+            </a:r>
+            <a:endParaRPr lang="en-US" sz="1250" dirty="0"/>
+          </a:p>
+        </p:txBody>
+      </p:sp>
+      <p:sp>
+        <p:nvSpPr>
+          <p:cNvPr id="24" name="Text 22"/>
+          <p:cNvSpPr/>
+          <p:nvPr/>
+        </p:nvSpPr>
+        <p:spPr>
+          <a:xfrm>
+            <a:off x="11475720" y="6446520"/>
+            <a:ext cx="457200" cy="320040"/>
+          </a:xfrm>
+          <a:prstGeom prst="rect">
+            <a:avLst/>
+          </a:prstGeom>
+          <a:noFill/>
+          <a:ln/>
+        </p:spPr>
+        <p:txBody>
+          <a:bodyPr wrap="square" rtlCol="0" anchor="ctr"/>
+          <a:lstStyle/>
+          <a:p>
+            <a:pPr algn="r" indent="0" marL="0">
+              <a:buNone/>
+            </a:pPr>
+            <a:r>
+              <a:rPr lang="en-US" sz="1000" dirty="0">
+                <a:solidFill>
+                  <a:srgbClr val="AAAAAA"/>
+                </a:solidFill>
+                <a:latin typeface="Calibri" pitchFamily="34" charset="0"/>
+                <a:ea typeface="Calibri" pitchFamily="34" charset="-122"/>
+                <a:cs typeface="Calibri" pitchFamily="34" charset="-120"/>
+              </a:rPr>
+              <a:t>5</a:t>
+            </a:r>
+            <a:endParaRPr lang="en-US" sz="1000" dirty="0"/>
+          </a:p>
+        </p:txBody>
+      </p:sp>
     </p:spTree>
   </p:cSld>
   <p:clrMapOvr>
@@ -5329,15 +6901,14 @@
 </p:sld>
 </file>
 
-<file path=ppt/slides/slide5.xml><?xml version="1.0" encoding="utf-8"?>
+<file path=ppt/slides/slide6.xml><?xml version="1.0" encoding="utf-8"?>
 <p:sld xmlns:a="http://schemas.openxmlformats.org/drawingml/2006/main" xmlns:r="http://schemas.openxmlformats.org/officeDocument/2006/relationships" xmlns:p="http://schemas.openxmlformats.org/presentationml/2006/main">
-  <p:cSld name="Slide 5">
+  <p:cSld name="Slide 6">
     <p:bg>
       <p:bgPr>
         <a:solidFill>
           <a:srgbClr val="FFFFFF"/>
         </a:solidFill>
-        <a:effectLst/>
       </p:bgPr>
     </p:bg>
     <p:spTree>
@@ -5363,7 +6934,7 @@
         <p:spPr>
           <a:xfrm>
             <a:off x="0" y="0"/>
-            <a:ext cx="12188952" cy="6858000"/>
+            <a:ext cx="12188952" cy="128016"/>
           </a:xfrm>
           <a:prstGeom prst="rect">
             <a:avLst/>
@@ -5373,24 +6944,81 @@
           </a:solidFill>
           <a:ln/>
         </p:spPr>
-        <p:txBody>
-          <a:bodyPr/>
-          <a:lstStyle/>
-          <a:p>
-            <a:endParaRPr lang="en-BH"/>
-          </a:p>
-        </p:txBody>
-      </p:sp>
-      <p:sp>
-        <p:nvSpPr>
-          <p:cNvPr id="3" name="Text 1"/>
-          <p:cNvSpPr/>
-          <p:nvPr/>
-        </p:nvSpPr>
-        <p:spPr>
-          <a:xfrm>
-            <a:off x="1188720" y="2011680"/>
-            <a:ext cx="9811512" cy="502920"/>
+      </p:sp>
+      <p:pic>
+        <p:nvPicPr>
+          <p:cNvPr id="3" name="Image 0" descr="v2_top10_crime_types.png">    </p:cNvPr>
+          <p:cNvPicPr>
+            <a:picLocks noChangeAspect="1"/>
+          </p:cNvPicPr>
+          <p:nvPr/>
+        </p:nvPicPr>
+        <p:blipFill>
+          <a:blip r:embed="rId1"/>
+          <a:stretch>
+            <a:fillRect/>
+          </a:stretch>
+        </p:blipFill>
+        <p:spPr>
+          <a:xfrm>
+            <a:off x="365760" y="2198087"/>
+            <a:ext cx="7589520" cy="2461826"/>
+          </a:xfrm>
+          <a:prstGeom prst="rect">
+            <a:avLst/>
+          </a:prstGeom>
+        </p:spPr>
+      </p:pic>
+      <p:sp>
+        <p:nvSpPr>
+          <p:cNvPr id="4" name="Shape 1"/>
+          <p:cNvSpPr/>
+          <p:nvPr/>
+        </p:nvSpPr>
+        <p:spPr>
+          <a:xfrm>
+            <a:off x="8229600" y="1874520"/>
+            <a:ext cx="3566160" cy="3108960"/>
+          </a:xfrm>
+          <a:prstGeom prst="rect">
+            <a:avLst/>
+          </a:prstGeom>
+          <a:solidFill>
+            <a:srgbClr val="F4F4F4"/>
+          </a:solidFill>
+          <a:ln/>
+        </p:spPr>
+      </p:sp>
+      <p:sp>
+        <p:nvSpPr>
+          <p:cNvPr id="5" name="Shape 2"/>
+          <p:cNvSpPr/>
+          <p:nvPr/>
+        </p:nvSpPr>
+        <p:spPr>
+          <a:xfrm>
+            <a:off x="8229600" y="1874520"/>
+            <a:ext cx="1737360" cy="420624"/>
+          </a:xfrm>
+          <a:prstGeom prst="rect">
+            <a:avLst/>
+          </a:prstGeom>
+          <a:solidFill>
+            <a:srgbClr val="8B0000"/>
+          </a:solidFill>
+          <a:ln/>
+        </p:spPr>
+      </p:sp>
+      <p:sp>
+        <p:nvSpPr>
+          <p:cNvPr id="6" name="Text 3"/>
+          <p:cNvSpPr/>
+          <p:nvPr/>
+        </p:nvSpPr>
+        <p:spPr>
+          <a:xfrm>
+            <a:off x="8229600" y="1874520"/>
+            <a:ext cx="1737360" cy="420624"/>
           </a:xfrm>
           <a:prstGeom prst="rect">
             <a:avLst/>
@@ -5402,34 +7030,34 @@
           <a:bodyPr wrap="square" rtlCol="0" anchor="ctr"/>
           <a:lstStyle/>
           <a:p>
-            <a:pPr marL="0" indent="0">
+            <a:pPr algn="ctr" indent="0" marL="0">
               <a:buNone/>
             </a:pPr>
             <a:r>
-              <a:rPr lang="en-US" sz="1500" b="1" kern="0" spc="200" dirty="0">
-                <a:solidFill>
-                  <a:srgbClr val="FFD6D6"/>
+              <a:rPr lang="en-US" sz="1250" b="1" spc="100" kern="0" dirty="0">
+                <a:solidFill>
+                  <a:srgbClr val="FFFFFF"/>
                 </a:solidFill>
                 <a:latin typeface="Calibri" pitchFamily="34" charset="0"/>
                 <a:ea typeface="Calibri" pitchFamily="34" charset="-122"/>
                 <a:cs typeface="Calibri" pitchFamily="34" charset="-120"/>
               </a:rPr>
-              <a:t>FINDING</a:t>
-            </a:r>
-            <a:endParaRPr lang="en-US" sz="1500" dirty="0"/>
-          </a:p>
-        </p:txBody>
-      </p:sp>
-      <p:sp>
-        <p:nvSpPr>
-          <p:cNvPr id="4" name="Text 2"/>
-          <p:cNvSpPr/>
-          <p:nvPr/>
-        </p:nvSpPr>
-        <p:spPr>
-          <a:xfrm>
-            <a:off x="1188720" y="2606040"/>
-            <a:ext cx="9811512" cy="2377440"/>
+              <a:t>KEY FINDING</a:t>
+            </a:r>
+            <a:endParaRPr lang="en-US" sz="1250" dirty="0"/>
+          </a:p>
+        </p:txBody>
+      </p:sp>
+      <p:sp>
+        <p:nvSpPr>
+          <p:cNvPr id="7" name="Text 4"/>
+          <p:cNvSpPr/>
+          <p:nvPr/>
+        </p:nvSpPr>
+        <p:spPr>
+          <a:xfrm>
+            <a:off x="8503920" y="2651760"/>
+            <a:ext cx="3017520" cy="2103120"/>
           </a:xfrm>
           <a:prstGeom prst="rect">
             <a:avLst/>
@@ -5441,61 +7069,89 @@
           <a:bodyPr wrap="square" rtlCol="0" anchor="t"/>
           <a:lstStyle/>
           <a:p>
-            <a:pPr marL="0" indent="0">
+            <a:pPr marL="342900" indent="-342900">
               <a:lnSpc>
-                <a:spcPct val="125000"/>
+                <a:spcPct val="115000"/>
               </a:lnSpc>
-              <a:buNone/>
-            </a:pPr>
-            <a:r>
-              <a:rPr lang="en-US" sz="2600" dirty="0">
-                <a:solidFill>
-                  <a:srgbClr val="FFFFFF"/>
-                </a:solidFill>
-                <a:latin typeface="Cambria" pitchFamily="34" charset="0"/>
-                <a:ea typeface="Cambria" pitchFamily="34" charset="-122"/>
-                <a:cs typeface="Cambria" pitchFamily="34" charset="-120"/>
-              </a:rPr>
-              <a:t>Vehicle Theft was the most frequently reported crime, followed by Battery – Simple Assault and Burglary from Vehicle.</a:t>
-            </a:r>
-            <a:endParaRPr lang="en-US" sz="2600" dirty="0"/>
-          </a:p>
-        </p:txBody>
-      </p:sp>
-      <p:sp>
-        <p:nvSpPr>
-          <p:cNvPr id="5" name="Text 3"/>
-          <p:cNvSpPr/>
-          <p:nvPr/>
-        </p:nvSpPr>
-        <p:spPr>
-          <a:xfrm>
-            <a:off x="11475720" y="6446520"/>
-            <a:ext cx="457200" cy="320040"/>
-          </a:xfrm>
-          <a:prstGeom prst="rect">
-            <a:avLst/>
-          </a:prstGeom>
-          <a:noFill/>
-          <a:ln/>
-        </p:spPr>
-        <p:txBody>
-          <a:bodyPr wrap="square" rtlCol="0" anchor="ctr"/>
-          <a:lstStyle/>
-          <a:p>
-            <a:pPr marL="0" indent="0" algn="r">
-              <a:buNone/>
-            </a:pPr>
-            <a:r>
-              <a:rPr lang="en-US" sz="1000" dirty="0">
-                <a:solidFill>
-                  <a:srgbClr val="FFFFFF"/>
+              <a:spcAft>
+                <a:spcPts val="1200"/>
+              </a:spcAft>
+              <a:buSzPct val="100000"/>
+              <a:buChar char="•"/>
+            </a:pPr>
+            <a:r>
+              <a:rPr lang="en-US" sz="1450" dirty="0">
+                <a:solidFill>
+                  <a:srgbClr val="1A1A1A"/>
                 </a:solidFill>
                 <a:latin typeface="Calibri" pitchFamily="34" charset="0"/>
                 <a:ea typeface="Calibri" pitchFamily="34" charset="-122"/>
                 <a:cs typeface="Calibri" pitchFamily="34" charset="-120"/>
               </a:rPr>
-              <a:t>5</a:t>
+              <a:t>Vehicle Theft was the most frequently reported crime (~115.5K incidents)</a:t>
+            </a:r>
+            <a:endParaRPr lang="en-US" sz="1450" dirty="0"/>
+          </a:p>
+          <a:p>
+            <a:pPr marL="342900" indent="-342900">
+              <a:lnSpc>
+                <a:spcPct val="115000"/>
+              </a:lnSpc>
+              <a:spcAft>
+                <a:spcPts val="1200"/>
+              </a:spcAft>
+              <a:buSzPct val="100000"/>
+              <a:buChar char="•"/>
+            </a:pPr>
+            <a:r>
+              <a:rPr lang="en-US" sz="1450" dirty="0">
+                <a:solidFill>
+                  <a:srgbClr val="1A1A1A"/>
+                </a:solidFill>
+                <a:latin typeface="Calibri" pitchFamily="34" charset="0"/>
+                <a:ea typeface="Calibri" pitchFamily="34" charset="-122"/>
+                <a:cs typeface="Calibri" pitchFamily="34" charset="-120"/>
+              </a:rPr>
+              <a:t>Followed by Battery – Simple Assault and Burglary from Vehicle</a:t>
+            </a:r>
+            <a:endParaRPr lang="en-US" sz="1450" dirty="0"/>
+          </a:p>
+        </p:txBody>
+      </p:sp>
+      <p:sp>
+        <p:nvSpPr>
+          <p:cNvPr id="8" name="Text 5"/>
+          <p:cNvSpPr/>
+          <p:nvPr/>
+        </p:nvSpPr>
+        <p:spPr>
+          <a:xfrm>
+            <a:off x="11475720" y="6446520"/>
+            <a:ext cx="457200" cy="320040"/>
+          </a:xfrm>
+          <a:prstGeom prst="rect">
+            <a:avLst/>
+          </a:prstGeom>
+          <a:noFill/>
+          <a:ln/>
+        </p:spPr>
+        <p:txBody>
+          <a:bodyPr wrap="square" rtlCol="0" anchor="ctr"/>
+          <a:lstStyle/>
+          <a:p>
+            <a:pPr algn="r" indent="0" marL="0">
+              <a:buNone/>
+            </a:pPr>
+            <a:r>
+              <a:rPr lang="en-US" sz="1000" dirty="0">
+                <a:solidFill>
+                  <a:srgbClr val="AAAAAA"/>
+                </a:solidFill>
+                <a:latin typeface="Calibri" pitchFamily="34" charset="0"/>
+                <a:ea typeface="Calibri" pitchFamily="34" charset="-122"/>
+                <a:cs typeface="Calibri" pitchFamily="34" charset="-120"/>
+              </a:rPr>
+              <a:t>6</a:t>
             </a:r>
             <a:endParaRPr lang="en-US" sz="1000" dirty="0"/>
           </a:p>
@@ -5509,15 +7165,14 @@
 </p:sld>
 </file>
 
-<file path=ppt/slides/slide6.xml><?xml version="1.0" encoding="utf-8"?>
+<file path=ppt/slides/slide7.xml><?xml version="1.0" encoding="utf-8"?>
 <p:sld xmlns:a="http://schemas.openxmlformats.org/drawingml/2006/main" xmlns:r="http://schemas.openxmlformats.org/officeDocument/2006/relationships" xmlns:p="http://schemas.openxmlformats.org/presentationml/2006/main">
-  <p:cSld name="Slide 6">
+  <p:cSld name="Slide 7">
     <p:bg>
       <p:bgPr>
         <a:solidFill>
           <a:srgbClr val="FFFFFF"/>
         </a:solidFill>
-        <a:effectLst/>
       </p:bgPr>
     </p:bg>
     <p:spTree>
@@ -5534,30 +7189,238 @@
           <a:chExt cx="0" cy="0"/>
         </a:xfrm>
       </p:grpSpPr>
+      <p:sp>
+        <p:nvSpPr>
+          <p:cNvPr id="2" name="Shape 0"/>
+          <p:cNvSpPr/>
+          <p:nvPr/>
+        </p:nvSpPr>
+        <p:spPr>
+          <a:xfrm>
+            <a:off x="0" y="0"/>
+            <a:ext cx="12188952" cy="128016"/>
+          </a:xfrm>
+          <a:prstGeom prst="rect">
+            <a:avLst/>
+          </a:prstGeom>
+          <a:solidFill>
+            <a:srgbClr val="8B0000"/>
+          </a:solidFill>
+          <a:ln/>
+        </p:spPr>
+      </p:sp>
       <p:pic>
         <p:nvPicPr>
-          <p:cNvPr id="2" name="Image 0" descr="top10_areas.png"/>
+          <p:cNvPr id="3" name="Image 0" descr="v2_top10_areas.png">    </p:cNvPr>
           <p:cNvPicPr>
             <a:picLocks noChangeAspect="1"/>
           </p:cNvPicPr>
           <p:nvPr/>
         </p:nvPicPr>
         <p:blipFill>
-          <a:blip r:embed="rId3"/>
+          <a:blip r:embed="rId1"/>
           <a:stretch>
             <a:fillRect/>
           </a:stretch>
         </p:blipFill>
         <p:spPr>
           <a:xfrm>
-            <a:off x="1689042" y="274320"/>
-            <a:ext cx="8810868" cy="6309360"/>
+            <a:off x="365760" y="1514245"/>
+            <a:ext cx="7589520" cy="3829511"/>
           </a:xfrm>
           <a:prstGeom prst="rect">
             <a:avLst/>
           </a:prstGeom>
         </p:spPr>
       </p:pic>
+      <p:sp>
+        <p:nvSpPr>
+          <p:cNvPr id="4" name="Shape 1"/>
+          <p:cNvSpPr/>
+          <p:nvPr/>
+        </p:nvSpPr>
+        <p:spPr>
+          <a:xfrm>
+            <a:off x="8229600" y="1874520"/>
+            <a:ext cx="3566160" cy="3108960"/>
+          </a:xfrm>
+          <a:prstGeom prst="rect">
+            <a:avLst/>
+          </a:prstGeom>
+          <a:solidFill>
+            <a:srgbClr val="F4F4F4"/>
+          </a:solidFill>
+          <a:ln/>
+        </p:spPr>
+      </p:sp>
+      <p:sp>
+        <p:nvSpPr>
+          <p:cNvPr id="5" name="Shape 2"/>
+          <p:cNvSpPr/>
+          <p:nvPr/>
+        </p:nvSpPr>
+        <p:spPr>
+          <a:xfrm>
+            <a:off x="8229600" y="1874520"/>
+            <a:ext cx="1737360" cy="420624"/>
+          </a:xfrm>
+          <a:prstGeom prst="rect">
+            <a:avLst/>
+          </a:prstGeom>
+          <a:solidFill>
+            <a:srgbClr val="8B0000"/>
+          </a:solidFill>
+          <a:ln/>
+        </p:spPr>
+      </p:sp>
+      <p:sp>
+        <p:nvSpPr>
+          <p:cNvPr id="6" name="Text 3"/>
+          <p:cNvSpPr/>
+          <p:nvPr/>
+        </p:nvSpPr>
+        <p:spPr>
+          <a:xfrm>
+            <a:off x="8229600" y="1874520"/>
+            <a:ext cx="1737360" cy="420624"/>
+          </a:xfrm>
+          <a:prstGeom prst="rect">
+            <a:avLst/>
+          </a:prstGeom>
+          <a:noFill/>
+          <a:ln/>
+        </p:spPr>
+        <p:txBody>
+          <a:bodyPr wrap="square" rtlCol="0" anchor="ctr"/>
+          <a:lstStyle/>
+          <a:p>
+            <a:pPr algn="ctr" indent="0" marL="0">
+              <a:buNone/>
+            </a:pPr>
+            <a:r>
+              <a:rPr lang="en-US" sz="1250" b="1" spc="100" kern="0" dirty="0">
+                <a:solidFill>
+                  <a:srgbClr val="FFFFFF"/>
+                </a:solidFill>
+                <a:latin typeface="Calibri" pitchFamily="34" charset="0"/>
+                <a:ea typeface="Calibri" pitchFamily="34" charset="-122"/>
+                <a:cs typeface="Calibri" pitchFamily="34" charset="-120"/>
+              </a:rPr>
+              <a:t>KEY FINDING</a:t>
+            </a:r>
+            <a:endParaRPr lang="en-US" sz="1250" dirty="0"/>
+          </a:p>
+        </p:txBody>
+      </p:sp>
+      <p:sp>
+        <p:nvSpPr>
+          <p:cNvPr id="7" name="Text 4"/>
+          <p:cNvSpPr/>
+          <p:nvPr/>
+        </p:nvSpPr>
+        <p:spPr>
+          <a:xfrm>
+            <a:off x="8503920" y="2651760"/>
+            <a:ext cx="3017520" cy="2103120"/>
+          </a:xfrm>
+          <a:prstGeom prst="rect">
+            <a:avLst/>
+          </a:prstGeom>
+          <a:noFill/>
+          <a:ln/>
+        </p:spPr>
+        <p:txBody>
+          <a:bodyPr wrap="square" rtlCol="0" anchor="t"/>
+          <a:lstStyle/>
+          <a:p>
+            <a:pPr marL="342900" indent="-342900">
+              <a:lnSpc>
+                <a:spcPct val="115000"/>
+              </a:lnSpc>
+              <a:spcAft>
+                <a:spcPts val="1200"/>
+              </a:spcAft>
+              <a:buSzPct val="100000"/>
+              <a:buChar char="•"/>
+            </a:pPr>
+            <a:r>
+              <a:rPr lang="en-US" sz="1450" dirty="0">
+                <a:solidFill>
+                  <a:srgbClr val="1A1A1A"/>
+                </a:solidFill>
+                <a:latin typeface="Calibri" pitchFamily="34" charset="0"/>
+                <a:ea typeface="Calibri" pitchFamily="34" charset="-122"/>
+                <a:cs typeface="Calibri" pitchFamily="34" charset="-120"/>
+              </a:rPr>
+              <a:t>Central recorded the highest number of reported crimes</a:t>
+            </a:r>
+            <a:endParaRPr lang="en-US" sz="1450" dirty="0"/>
+          </a:p>
+          <a:p>
+            <a:pPr marL="342900" indent="-342900">
+              <a:lnSpc>
+                <a:spcPct val="115000"/>
+              </a:lnSpc>
+              <a:spcAft>
+                <a:spcPts val="1200"/>
+              </a:spcAft>
+              <a:buSzPct val="100000"/>
+              <a:buChar char="•"/>
+            </a:pPr>
+            <a:r>
+              <a:rPr lang="en-US" sz="1450" dirty="0">
+                <a:solidFill>
+                  <a:srgbClr val="1A1A1A"/>
+                </a:solidFill>
+                <a:latin typeface="Calibri" pitchFamily="34" charset="0"/>
+                <a:ea typeface="Calibri" pitchFamily="34" charset="-122"/>
+                <a:cs typeface="Calibri" pitchFamily="34" charset="-120"/>
+              </a:rPr>
+              <a:t>Followed by 77th Street and Pacific</a:t>
+            </a:r>
+            <a:endParaRPr lang="en-US" sz="1450" dirty="0"/>
+          </a:p>
+        </p:txBody>
+      </p:sp>
+      <p:sp>
+        <p:nvSpPr>
+          <p:cNvPr id="8" name="Text 5"/>
+          <p:cNvSpPr/>
+          <p:nvPr/>
+        </p:nvSpPr>
+        <p:spPr>
+          <a:xfrm>
+            <a:off x="11475720" y="6446520"/>
+            <a:ext cx="457200" cy="320040"/>
+          </a:xfrm>
+          <a:prstGeom prst="rect">
+            <a:avLst/>
+          </a:prstGeom>
+          <a:noFill/>
+          <a:ln/>
+        </p:spPr>
+        <p:txBody>
+          <a:bodyPr wrap="square" rtlCol="0" anchor="ctr"/>
+          <a:lstStyle/>
+          <a:p>
+            <a:pPr algn="r" indent="0" marL="0">
+              <a:buNone/>
+            </a:pPr>
+            <a:r>
+              <a:rPr lang="en-US" sz="1000" dirty="0">
+                <a:solidFill>
+                  <a:srgbClr val="AAAAAA"/>
+                </a:solidFill>
+                <a:latin typeface="Calibri" pitchFamily="34" charset="0"/>
+                <a:ea typeface="Calibri" pitchFamily="34" charset="-122"/>
+                <a:cs typeface="Calibri" pitchFamily="34" charset="-120"/>
+              </a:rPr>
+              <a:t>7</a:t>
+            </a:r>
+            <a:endParaRPr lang="en-US" sz="1000" dirty="0"/>
+          </a:p>
+        </p:txBody>
+      </p:sp>
     </p:spTree>
   </p:cSld>
   <p:clrMapOvr>
@@ -5566,15 +7429,14 @@
 </p:sld>
 </file>
 
-<file path=ppt/slides/slide7.xml><?xml version="1.0" encoding="utf-8"?>
+<file path=ppt/slides/slide8.xml><?xml version="1.0" encoding="utf-8"?>
 <p:sld xmlns:a="http://schemas.openxmlformats.org/drawingml/2006/main" xmlns:r="http://schemas.openxmlformats.org/officeDocument/2006/relationships" xmlns:p="http://schemas.openxmlformats.org/presentationml/2006/main">
-  <p:cSld name="Slide 7">
+  <p:cSld name="Slide 8">
     <p:bg>
       <p:bgPr>
         <a:solidFill>
           <a:srgbClr val="FFFFFF"/>
         </a:solidFill>
-        <a:effectLst/>
       </p:bgPr>
     </p:bg>
     <p:spTree>
@@ -5600,7 +7462,7 @@
         <p:spPr>
           <a:xfrm>
             <a:off x="0" y="0"/>
-            <a:ext cx="12188952" cy="6858000"/>
+            <a:ext cx="12188952" cy="128016"/>
           </a:xfrm>
           <a:prstGeom prst="rect">
             <a:avLst/>
@@ -5610,24 +7472,81 @@
           </a:solidFill>
           <a:ln/>
         </p:spPr>
-        <p:txBody>
-          <a:bodyPr/>
-          <a:lstStyle/>
-          <a:p>
-            <a:endParaRPr lang="en-BH"/>
-          </a:p>
-        </p:txBody>
-      </p:sp>
-      <p:sp>
-        <p:nvSpPr>
-          <p:cNvPr id="3" name="Text 1"/>
-          <p:cNvSpPr/>
-          <p:nvPr/>
-        </p:nvSpPr>
-        <p:spPr>
-          <a:xfrm>
-            <a:off x="1188720" y="2011680"/>
-            <a:ext cx="9811512" cy="502920"/>
+      </p:sp>
+      <p:pic>
+        <p:nvPicPr>
+          <p:cNvPr id="3" name="Image 0" descr="v2_crime_by_year.png">    </p:cNvPr>
+          <p:cNvPicPr>
+            <a:picLocks noChangeAspect="1"/>
+          </p:cNvPicPr>
+          <p:nvPr/>
+        </p:nvPicPr>
+        <p:blipFill>
+          <a:blip r:embed="rId1"/>
+          <a:stretch>
+            <a:fillRect/>
+          </a:stretch>
+        </p:blipFill>
+        <p:spPr>
+          <a:xfrm>
+            <a:off x="365760" y="1409502"/>
+            <a:ext cx="7589520" cy="4038995"/>
+          </a:xfrm>
+          <a:prstGeom prst="rect">
+            <a:avLst/>
+          </a:prstGeom>
+        </p:spPr>
+      </p:pic>
+      <p:sp>
+        <p:nvSpPr>
+          <p:cNvPr id="4" name="Shape 1"/>
+          <p:cNvSpPr/>
+          <p:nvPr/>
+        </p:nvSpPr>
+        <p:spPr>
+          <a:xfrm>
+            <a:off x="8229600" y="1874520"/>
+            <a:ext cx="3566160" cy="3108960"/>
+          </a:xfrm>
+          <a:prstGeom prst="rect">
+            <a:avLst/>
+          </a:prstGeom>
+          <a:solidFill>
+            <a:srgbClr val="F4F4F4"/>
+          </a:solidFill>
+          <a:ln/>
+        </p:spPr>
+      </p:sp>
+      <p:sp>
+        <p:nvSpPr>
+          <p:cNvPr id="5" name="Shape 2"/>
+          <p:cNvSpPr/>
+          <p:nvPr/>
+        </p:nvSpPr>
+        <p:spPr>
+          <a:xfrm>
+            <a:off x="8229600" y="1874520"/>
+            <a:ext cx="1737360" cy="420624"/>
+          </a:xfrm>
+          <a:prstGeom prst="rect">
+            <a:avLst/>
+          </a:prstGeom>
+          <a:solidFill>
+            <a:srgbClr val="8B0000"/>
+          </a:solidFill>
+          <a:ln/>
+        </p:spPr>
+      </p:sp>
+      <p:sp>
+        <p:nvSpPr>
+          <p:cNvPr id="6" name="Text 3"/>
+          <p:cNvSpPr/>
+          <p:nvPr/>
+        </p:nvSpPr>
+        <p:spPr>
+          <a:xfrm>
+            <a:off x="8229600" y="1874520"/>
+            <a:ext cx="1737360" cy="420624"/>
           </a:xfrm>
           <a:prstGeom prst="rect">
             <a:avLst/>
@@ -5639,34 +7558,34 @@
           <a:bodyPr wrap="square" rtlCol="0" anchor="ctr"/>
           <a:lstStyle/>
           <a:p>
-            <a:pPr marL="0" indent="0">
+            <a:pPr algn="ctr" indent="0" marL="0">
               <a:buNone/>
             </a:pPr>
             <a:r>
-              <a:rPr lang="en-US" sz="1500" b="1" kern="0" spc="200" dirty="0">
-                <a:solidFill>
-                  <a:srgbClr val="FFD6D6"/>
+              <a:rPr lang="en-US" sz="1250" b="1" spc="100" kern="0" dirty="0">
+                <a:solidFill>
+                  <a:srgbClr val="FFFFFF"/>
                 </a:solidFill>
                 <a:latin typeface="Calibri" pitchFamily="34" charset="0"/>
                 <a:ea typeface="Calibri" pitchFamily="34" charset="-122"/>
                 <a:cs typeface="Calibri" pitchFamily="34" charset="-120"/>
               </a:rPr>
-              <a:t>FINDING</a:t>
-            </a:r>
-            <a:endParaRPr lang="en-US" sz="1500" dirty="0"/>
-          </a:p>
-        </p:txBody>
-      </p:sp>
-      <p:sp>
-        <p:nvSpPr>
-          <p:cNvPr id="4" name="Text 2"/>
-          <p:cNvSpPr/>
-          <p:nvPr/>
-        </p:nvSpPr>
-        <p:spPr>
-          <a:xfrm>
-            <a:off x="1188720" y="2606040"/>
-            <a:ext cx="9811512" cy="2377440"/>
+              <a:t>KEY FINDING</a:t>
+            </a:r>
+            <a:endParaRPr lang="en-US" sz="1250" dirty="0"/>
+          </a:p>
+        </p:txBody>
+      </p:sp>
+      <p:sp>
+        <p:nvSpPr>
+          <p:cNvPr id="7" name="Text 4"/>
+          <p:cNvSpPr/>
+          <p:nvPr/>
+        </p:nvSpPr>
+        <p:spPr>
+          <a:xfrm>
+            <a:off x="8503920" y="2651760"/>
+            <a:ext cx="3017520" cy="2103120"/>
           </a:xfrm>
           <a:prstGeom prst="rect">
             <a:avLst/>
@@ -5678,61 +7597,89 @@
           <a:bodyPr wrap="square" rtlCol="0" anchor="t"/>
           <a:lstStyle/>
           <a:p>
-            <a:pPr marL="0" indent="0">
+            <a:pPr marL="342900" indent="-342900">
               <a:lnSpc>
-                <a:spcPct val="125000"/>
+                <a:spcPct val="115000"/>
               </a:lnSpc>
-              <a:buNone/>
-            </a:pPr>
-            <a:r>
-              <a:rPr lang="en-US" sz="2600" dirty="0">
-                <a:solidFill>
-                  <a:srgbClr val="FFFFFF"/>
-                </a:solidFill>
-                <a:latin typeface="Cambria" pitchFamily="34" charset="0"/>
-                <a:ea typeface="Cambria" pitchFamily="34" charset="-122"/>
-                <a:cs typeface="Cambria" pitchFamily="34" charset="-120"/>
-              </a:rPr>
-              <a:t>Central recorded the highest number of crime incidents, followed by 77th Street and Pacific.</a:t>
-            </a:r>
-            <a:endParaRPr lang="en-US" sz="2600" dirty="0"/>
-          </a:p>
-        </p:txBody>
-      </p:sp>
-      <p:sp>
-        <p:nvSpPr>
-          <p:cNvPr id="5" name="Text 3"/>
-          <p:cNvSpPr/>
-          <p:nvPr/>
-        </p:nvSpPr>
-        <p:spPr>
-          <a:xfrm>
-            <a:off x="11475720" y="6446520"/>
-            <a:ext cx="457200" cy="320040"/>
-          </a:xfrm>
-          <a:prstGeom prst="rect">
-            <a:avLst/>
-          </a:prstGeom>
-          <a:noFill/>
-          <a:ln/>
-        </p:spPr>
-        <p:txBody>
-          <a:bodyPr wrap="square" rtlCol="0" anchor="ctr"/>
-          <a:lstStyle/>
-          <a:p>
-            <a:pPr marL="0" indent="0" algn="r">
-              <a:buNone/>
-            </a:pPr>
-            <a:r>
-              <a:rPr lang="en-US" sz="1000" dirty="0">
-                <a:solidFill>
-                  <a:srgbClr val="FFFFFF"/>
+              <a:spcAft>
+                <a:spcPts val="1200"/>
+              </a:spcAft>
+              <a:buSzPct val="100000"/>
+              <a:buChar char="•"/>
+            </a:pPr>
+            <a:r>
+              <a:rPr lang="en-US" sz="1450" dirty="0">
+                <a:solidFill>
+                  <a:srgbClr val="1A1A1A"/>
                 </a:solidFill>
                 <a:latin typeface="Calibri" pitchFamily="34" charset="0"/>
                 <a:ea typeface="Calibri" pitchFamily="34" charset="-122"/>
                 <a:cs typeface="Calibri" pitchFamily="34" charset="-120"/>
               </a:rPr>
-              <a:t>7</a:t>
+              <a:t>Crime incidents rose from 2020 to 2022, the peak year</a:t>
+            </a:r>
+            <a:endParaRPr lang="en-US" sz="1450" dirty="0"/>
+          </a:p>
+          <a:p>
+            <a:pPr marL="342900" indent="-342900">
+              <a:lnSpc>
+                <a:spcPct val="115000"/>
+              </a:lnSpc>
+              <a:spcAft>
+                <a:spcPts val="1200"/>
+              </a:spcAft>
+              <a:buSzPct val="100000"/>
+              <a:buChar char="•"/>
+            </a:pPr>
+            <a:r>
+              <a:rPr lang="en-US" sz="1450" dirty="0">
+                <a:solidFill>
+                  <a:srgbClr val="1A1A1A"/>
+                </a:solidFill>
+                <a:latin typeface="Calibri" pitchFamily="34" charset="0"/>
+                <a:ea typeface="Calibri" pitchFamily="34" charset="-122"/>
+                <a:cs typeface="Calibri" pitchFamily="34" charset="-120"/>
+              </a:rPr>
+              <a:t>Remained high in 2023, then declined in 2024</a:t>
+            </a:r>
+            <a:endParaRPr lang="en-US" sz="1450" dirty="0"/>
+          </a:p>
+        </p:txBody>
+      </p:sp>
+      <p:sp>
+        <p:nvSpPr>
+          <p:cNvPr id="8" name="Text 5"/>
+          <p:cNvSpPr/>
+          <p:nvPr/>
+        </p:nvSpPr>
+        <p:spPr>
+          <a:xfrm>
+            <a:off x="11475720" y="6446520"/>
+            <a:ext cx="457200" cy="320040"/>
+          </a:xfrm>
+          <a:prstGeom prst="rect">
+            <a:avLst/>
+          </a:prstGeom>
+          <a:noFill/>
+          <a:ln/>
+        </p:spPr>
+        <p:txBody>
+          <a:bodyPr wrap="square" rtlCol="0" anchor="ctr"/>
+          <a:lstStyle/>
+          <a:p>
+            <a:pPr algn="r" indent="0" marL="0">
+              <a:buNone/>
+            </a:pPr>
+            <a:r>
+              <a:rPr lang="en-US" sz="1000" dirty="0">
+                <a:solidFill>
+                  <a:srgbClr val="AAAAAA"/>
+                </a:solidFill>
+                <a:latin typeface="Calibri" pitchFamily="34" charset="0"/>
+                <a:ea typeface="Calibri" pitchFamily="34" charset="-122"/>
+                <a:cs typeface="Calibri" pitchFamily="34" charset="-120"/>
+              </a:rPr>
+              <a:t>8</a:t>
             </a:r>
             <a:endParaRPr lang="en-US" sz="1000" dirty="0"/>
           </a:p>
@@ -5746,15 +7693,14 @@
 </p:sld>
 </file>
 
-<file path=ppt/slides/slide8.xml><?xml version="1.0" encoding="utf-8"?>
+<file path=ppt/slides/slide9.xml><?xml version="1.0" encoding="utf-8"?>
 <p:sld xmlns:a="http://schemas.openxmlformats.org/drawingml/2006/main" xmlns:r="http://schemas.openxmlformats.org/officeDocument/2006/relationships" xmlns:p="http://schemas.openxmlformats.org/presentationml/2006/main">
-  <p:cSld name="Slide 8">
+  <p:cSld name="Slide 9">
     <p:bg>
       <p:bgPr>
         <a:solidFill>
           <a:srgbClr val="FFFFFF"/>
         </a:solidFill>
-        <a:effectLst/>
       </p:bgPr>
     </p:bg>
     <p:spTree>
@@ -5771,73 +7717,80 @@
           <a:chExt cx="0" cy="0"/>
         </a:xfrm>
       </p:grpSpPr>
+      <p:sp>
+        <p:nvSpPr>
+          <p:cNvPr id="2" name="Shape 0"/>
+          <p:cNvSpPr/>
+          <p:nvPr/>
+        </p:nvSpPr>
+        <p:spPr>
+          <a:xfrm>
+            <a:off x="0" y="0"/>
+            <a:ext cx="12188952" cy="128016"/>
+          </a:xfrm>
+          <a:prstGeom prst="rect">
+            <a:avLst/>
+          </a:prstGeom>
+          <a:solidFill>
+            <a:srgbClr val="8B0000"/>
+          </a:solidFill>
+          <a:ln/>
+        </p:spPr>
+      </p:sp>
       <p:pic>
         <p:nvPicPr>
-          <p:cNvPr id="2" name="Image 0" descr="crime_by_year.png"/>
+          <p:cNvPr id="3" name="Image 0" descr="v2_time_of_day.png">    </p:cNvPr>
           <p:cNvPicPr>
             <a:picLocks noChangeAspect="1"/>
           </p:cNvPicPr>
           <p:nvPr/>
         </p:nvPicPr>
         <p:blipFill>
-          <a:blip r:embed="rId3"/>
+          <a:blip r:embed="rId1"/>
           <a:stretch>
             <a:fillRect/>
           </a:stretch>
         </p:blipFill>
         <p:spPr>
           <a:xfrm>
-            <a:off x="1923056" y="274320"/>
-            <a:ext cx="8342840" cy="6309360"/>
+            <a:off x="365760" y="1096006"/>
+            <a:ext cx="7589520" cy="4665987"/>
           </a:xfrm>
           <a:prstGeom prst="rect">
             <a:avLst/>
           </a:prstGeom>
         </p:spPr>
       </p:pic>
-    </p:spTree>
-  </p:cSld>
-  <p:clrMapOvr>
-    <a:masterClrMapping/>
-  </p:clrMapOvr>
-</p:sld>
-</file>
-
-<file path=ppt/slides/slide9.xml><?xml version="1.0" encoding="utf-8"?>
-<p:sld xmlns:a="http://schemas.openxmlformats.org/drawingml/2006/main" xmlns:r="http://schemas.openxmlformats.org/officeDocument/2006/relationships" xmlns:p="http://schemas.openxmlformats.org/presentationml/2006/main">
-  <p:cSld name="Slide 9">
-    <p:bg>
-      <p:bgPr>
-        <a:solidFill>
-          <a:srgbClr val="FFFFFF"/>
-        </a:solidFill>
-        <a:effectLst/>
-      </p:bgPr>
-    </p:bg>
-    <p:spTree>
-      <p:nvGrpSpPr>
-        <p:cNvPr id="1" name=""/>
-        <p:cNvGrpSpPr/>
-        <p:nvPr/>
-      </p:nvGrpSpPr>
-      <p:grpSpPr>
-        <a:xfrm>
-          <a:off x="0" y="0"/>
-          <a:ext cx="0" cy="0"/>
-          <a:chOff x="0" y="0"/>
-          <a:chExt cx="0" cy="0"/>
-        </a:xfrm>
-      </p:grpSpPr>
-      <p:sp>
-        <p:nvSpPr>
-          <p:cNvPr id="2" name="Shape 0"/>
-          <p:cNvSpPr/>
-          <p:nvPr/>
-        </p:nvSpPr>
-        <p:spPr>
-          <a:xfrm>
-            <a:off x="0" y="0"/>
-            <a:ext cx="12188952" cy="6858000"/>
+      <p:sp>
+        <p:nvSpPr>
+          <p:cNvPr id="4" name="Shape 1"/>
+          <p:cNvSpPr/>
+          <p:nvPr/>
+        </p:nvSpPr>
+        <p:spPr>
+          <a:xfrm>
+            <a:off x="8229600" y="1874520"/>
+            <a:ext cx="3566160" cy="3108960"/>
+          </a:xfrm>
+          <a:prstGeom prst="rect">
+            <a:avLst/>
+          </a:prstGeom>
+          <a:solidFill>
+            <a:srgbClr val="F4F4F4"/>
+          </a:solidFill>
+          <a:ln/>
+        </p:spPr>
+      </p:sp>
+      <p:sp>
+        <p:nvSpPr>
+          <p:cNvPr id="5" name="Shape 2"/>
+          <p:cNvSpPr/>
+          <p:nvPr/>
+        </p:nvSpPr>
+        <p:spPr>
+          <a:xfrm>
+            <a:off x="8229600" y="1874520"/>
+            <a:ext cx="1737360" cy="420624"/>
           </a:xfrm>
           <a:prstGeom prst="rect">
             <a:avLst/>
@@ -5847,24 +7800,17 @@
           </a:solidFill>
           <a:ln/>
         </p:spPr>
-        <p:txBody>
-          <a:bodyPr/>
-          <a:lstStyle/>
-          <a:p>
-            <a:endParaRPr lang="en-BH"/>
-          </a:p>
-        </p:txBody>
-      </p:sp>
-      <p:sp>
-        <p:nvSpPr>
-          <p:cNvPr id="3" name="Text 1"/>
-          <p:cNvSpPr/>
-          <p:nvPr/>
-        </p:nvSpPr>
-        <p:spPr>
-          <a:xfrm>
-            <a:off x="1188720" y="2011680"/>
-            <a:ext cx="9811512" cy="502920"/>
+      </p:sp>
+      <p:sp>
+        <p:nvSpPr>
+          <p:cNvPr id="6" name="Text 3"/>
+          <p:cNvSpPr/>
+          <p:nvPr/>
+        </p:nvSpPr>
+        <p:spPr>
+          <a:xfrm>
+            <a:off x="8229600" y="1874520"/>
+            <a:ext cx="1737360" cy="420624"/>
           </a:xfrm>
           <a:prstGeom prst="rect">
             <a:avLst/>
@@ -5876,34 +7822,34 @@
           <a:bodyPr wrap="square" rtlCol="0" anchor="ctr"/>
           <a:lstStyle/>
           <a:p>
-            <a:pPr marL="0" indent="0">
+            <a:pPr algn="ctr" indent="0" marL="0">
               <a:buNone/>
             </a:pPr>
             <a:r>
-              <a:rPr lang="en-US" sz="1500" b="1" kern="0" spc="200" dirty="0">
-                <a:solidFill>
-                  <a:srgbClr val="FFD6D6"/>
+              <a:rPr lang="en-US" sz="1250" b="1" spc="100" kern="0" dirty="0">
+                <a:solidFill>
+                  <a:srgbClr val="FFFFFF"/>
                 </a:solidFill>
                 <a:latin typeface="Calibri" pitchFamily="34" charset="0"/>
                 <a:ea typeface="Calibri" pitchFamily="34" charset="-122"/>
                 <a:cs typeface="Calibri" pitchFamily="34" charset="-120"/>
               </a:rPr>
-              <a:t>FINDING</a:t>
-            </a:r>
-            <a:endParaRPr lang="en-US" sz="1500" dirty="0"/>
-          </a:p>
-        </p:txBody>
-      </p:sp>
-      <p:sp>
-        <p:nvSpPr>
-          <p:cNvPr id="4" name="Text 2"/>
-          <p:cNvSpPr/>
-          <p:nvPr/>
-        </p:nvSpPr>
-        <p:spPr>
-          <a:xfrm>
-            <a:off x="1188720" y="2606040"/>
-            <a:ext cx="9811512" cy="2377440"/>
+              <a:t>KEY FINDING</a:t>
+            </a:r>
+            <a:endParaRPr lang="en-US" sz="1250" dirty="0"/>
+          </a:p>
+        </p:txBody>
+      </p:sp>
+      <p:sp>
+        <p:nvSpPr>
+          <p:cNvPr id="7" name="Text 4"/>
+          <p:cNvSpPr/>
+          <p:nvPr/>
+        </p:nvSpPr>
+        <p:spPr>
+          <a:xfrm>
+            <a:off x="8503920" y="2651760"/>
+            <a:ext cx="3017520" cy="2103120"/>
           </a:xfrm>
           <a:prstGeom prst="rect">
             <a:avLst/>
@@ -5915,30 +7861,58 @@
           <a:bodyPr wrap="square" rtlCol="0" anchor="t"/>
           <a:lstStyle/>
           <a:p>
-            <a:pPr marL="0" indent="0">
+            <a:pPr marL="342900" indent="-342900">
               <a:lnSpc>
-                <a:spcPct val="125000"/>
+                <a:spcPct val="115000"/>
               </a:lnSpc>
-              <a:buNone/>
-            </a:pPr>
-            <a:r>
-              <a:rPr lang="en-US" sz="2600" dirty="0">
-                <a:solidFill>
-                  <a:srgbClr val="FFFFFF"/>
-                </a:solidFill>
-                <a:latin typeface="Cambria" pitchFamily="34" charset="0"/>
-                <a:ea typeface="Cambria" pitchFamily="34" charset="-122"/>
-                <a:cs typeface="Cambria" pitchFamily="34" charset="-120"/>
-              </a:rPr>
-              <a:t>Crime incidents increased until 2022 before declining. The sharp drop in 2024 and near-zero value in 2025 reflect that only a small portion of recent data is included in the dataset.</a:t>
-            </a:r>
-            <a:endParaRPr lang="en-US" sz="2600" dirty="0"/>
-          </a:p>
-        </p:txBody>
-      </p:sp>
-      <p:sp>
-        <p:nvSpPr>
-          <p:cNvPr id="5" name="Text 3"/>
+              <a:spcAft>
+                <a:spcPts val="1200"/>
+              </a:spcAft>
+              <a:buSzPct val="100000"/>
+              <a:buChar char="•"/>
+            </a:pPr>
+            <a:r>
+              <a:rPr lang="en-US" sz="1450" dirty="0">
+                <a:solidFill>
+                  <a:srgbClr val="1A1A1A"/>
+                </a:solidFill>
+                <a:latin typeface="Calibri" pitchFamily="34" charset="0"/>
+                <a:ea typeface="Calibri" pitchFamily="34" charset="-122"/>
+                <a:cs typeface="Calibri" pitchFamily="34" charset="-120"/>
+              </a:rPr>
+              <a:t>Most crimes were reported at Night, followed by Afternoon</a:t>
+            </a:r>
+            <a:endParaRPr lang="en-US" sz="1450" dirty="0"/>
+          </a:p>
+          <a:p>
+            <a:pPr marL="342900" indent="-342900">
+              <a:lnSpc>
+                <a:spcPct val="115000"/>
+              </a:lnSpc>
+              <a:spcAft>
+                <a:spcPts val="1200"/>
+              </a:spcAft>
+              <a:buSzPct val="100000"/>
+              <a:buChar char="•"/>
+            </a:pPr>
+            <a:r>
+              <a:rPr lang="en-US" sz="1450" dirty="0">
+                <a:solidFill>
+                  <a:srgbClr val="1A1A1A"/>
+                </a:solidFill>
+                <a:latin typeface="Calibri" pitchFamily="34" charset="0"/>
+                <a:ea typeface="Calibri" pitchFamily="34" charset="-122"/>
+                <a:cs typeface="Calibri" pitchFamily="34" charset="-120"/>
+              </a:rPr>
+              <a:t>Morning recorded the fewest incidents</a:t>
+            </a:r>
+            <a:endParaRPr lang="en-US" sz="1450" dirty="0"/>
+          </a:p>
+        </p:txBody>
+      </p:sp>
+      <p:sp>
+        <p:nvSpPr>
+          <p:cNvPr id="8" name="Text 5"/>
           <p:cNvSpPr/>
           <p:nvPr/>
         </p:nvSpPr>
@@ -5957,13 +7931,13 @@
           <a:bodyPr wrap="square" rtlCol="0" anchor="ctr"/>
           <a:lstStyle/>
           <a:p>
-            <a:pPr marL="0" indent="0" algn="r">
+            <a:pPr algn="r" indent="0" marL="0">
               <a:buNone/>
             </a:pPr>
             <a:r>
               <a:rPr lang="en-US" sz="1000" dirty="0">
                 <a:solidFill>
-                  <a:srgbClr val="FFFFFF"/>
+                  <a:srgbClr val="AAAAAA"/>
                 </a:solidFill>
                 <a:latin typeface="Calibri" pitchFamily="34" charset="0"/>
                 <a:ea typeface="Calibri" pitchFamily="34" charset="-122"/>
@@ -6276,319 +8250,4 @@
     </a:ext>
   </a:extLst>
 </a:theme>
-</file>
-
-<file path=ppt/theme/theme2.xml><?xml version="1.0" encoding="utf-8"?>
-<a:theme xmlns:a="http://schemas.openxmlformats.org/drawingml/2006/main" name="Office Theme">
-  <a:themeElements>
-    <a:clrScheme name="Office">
-      <a:dk1>
-        <a:sysClr val="windowText" lastClr="000000"/>
-      </a:dk1>
-      <a:lt1>
-        <a:sysClr val="window" lastClr="FFFFFF"/>
-      </a:lt1>
-      <a:dk2>
-        <a:srgbClr val="0E2841"/>
-      </a:dk2>
-      <a:lt2>
-        <a:srgbClr val="E8E8E8"/>
-      </a:lt2>
-      <a:accent1>
-        <a:srgbClr val="156082"/>
-      </a:accent1>
-      <a:accent2>
-        <a:srgbClr val="E97132"/>
-      </a:accent2>
-      <a:accent3>
-        <a:srgbClr val="196B24"/>
-      </a:accent3>
-      <a:accent4>
-        <a:srgbClr val="0F9ED5"/>
-      </a:accent4>
-      <a:accent5>
-        <a:srgbClr val="A02B93"/>
-      </a:accent5>
-      <a:accent6>
-        <a:srgbClr val="4EA72E"/>
-      </a:accent6>
-      <a:hlink>
-        <a:srgbClr val="467886"/>
-      </a:hlink>
-      <a:folHlink>
-        <a:srgbClr val="96607D"/>
-      </a:folHlink>
-    </a:clrScheme>
-    <a:fontScheme name="Office">
-      <a:majorFont>
-        <a:latin typeface="Aptos Display" panose="02110004020202020204"/>
-        <a:ea typeface=""/>
-        <a:cs typeface=""/>
-        <a:font script="Jpan" typeface="游ゴシック Light"/>
-        <a:font script="Hang" typeface="맑은 고딕"/>
-        <a:font script="Hans" typeface="等线 Light"/>
-        <a:font script="Hant" typeface="新細明體"/>
-        <a:font script="Arab" typeface="Times New Roman"/>
-        <a:font script="Hebr" typeface="Times New Roman"/>
-        <a:font script="Thai" typeface="Angsana New"/>
-        <a:font script="Ethi" typeface="Nyala"/>
-        <a:font script="Beng" typeface="Vrinda"/>
-        <a:font script="Gujr" typeface="Shruti"/>
-        <a:font script="Khmr" typeface="MoolBoran"/>
-        <a:font script="Knda" typeface="Tunga"/>
-        <a:font script="Guru" typeface="Raavi"/>
-        <a:font script="Cans" typeface="Euphemia"/>
-        <a:font script="Cher" typeface="Plantagenet Cherokee"/>
-        <a:font script="Yiii" typeface="Microsoft Yi Baiti"/>
-        <a:font script="Tibt" typeface="Microsoft Himalaya"/>
-        <a:font script="Thaa" typeface="MV Boli"/>
-        <a:font script="Deva" typeface="Mangal"/>
-        <a:font script="Telu" typeface="Gautami"/>
-        <a:font script="Taml" typeface="Latha"/>
-        <a:font script="Syrc" typeface="Estrangelo Edessa"/>
-        <a:font script="Orya" typeface="Kalinga"/>
-        <a:font script="Mlym" typeface="Kartika"/>
-        <a:font script="Laoo" typeface="DokChampa"/>
-        <a:font script="Sinh" typeface="Iskoola Pota"/>
-        <a:font script="Mong" typeface="Mongolian Baiti"/>
-        <a:font script="Viet" typeface="Times New Roman"/>
-        <a:font script="Uigh" typeface="Microsoft Uighur"/>
-        <a:font script="Geor" typeface="Sylfaen"/>
-        <a:font script="Armn" typeface="Arial"/>
-        <a:font script="Bugi" typeface="Leelawadee UI"/>
-        <a:font script="Bopo" typeface="Microsoft JhengHei"/>
-        <a:font script="Java" typeface="Javanese Text"/>
-        <a:font script="Lisu" typeface="Segoe UI"/>
-        <a:font script="Mymr" typeface="Myanmar Text"/>
-        <a:font script="Nkoo" typeface="Ebrima"/>
-        <a:font script="Olck" typeface="Nirmala UI"/>
-        <a:font script="Osma" typeface="Ebrima"/>
-        <a:font script="Phag" typeface="Phagspa"/>
-        <a:font script="Syrn" typeface="Estrangelo Edessa"/>
-        <a:font script="Syrj" typeface="Estrangelo Edessa"/>
-        <a:font script="Syre" typeface="Estrangelo Edessa"/>
-        <a:font script="Sora" typeface="Nirmala UI"/>
-        <a:font script="Tale" typeface="Microsoft Tai Le"/>
-        <a:font script="Talu" typeface="Microsoft New Tai Lue"/>
-        <a:font script="Tfng" typeface="Ebrima"/>
-      </a:majorFont>
-      <a:minorFont>
-        <a:latin typeface="Aptos" panose="02110004020202020204"/>
-        <a:ea typeface=""/>
-        <a:cs typeface=""/>
-        <a:font script="Jpan" typeface="游ゴシック"/>
-        <a:font script="Hang" typeface="맑은 고딕"/>
-        <a:font script="Hans" typeface="等线"/>
-        <a:font script="Hant" typeface="新細明體"/>
-        <a:font script="Arab" typeface="Arial"/>
-        <a:font script="Hebr" typeface="Arial"/>
-        <a:font script="Thai" typeface="Cordia New"/>
-        <a:font script="Ethi" typeface="Nyala"/>
-        <a:font script="Beng" typeface="Vrinda"/>
-        <a:font script="Gujr" typeface="Shruti"/>
-        <a:font script="Khmr" typeface="DaunPenh"/>
-        <a:font script="Knda" typeface="Tunga"/>
-        <a:font script="Guru" typeface="Raavi"/>
-        <a:font script="Cans" typeface="Euphemia"/>
-        <a:font script="Cher" typeface="Plantagenet Cherokee"/>
-        <a:font script="Yiii" typeface="Microsoft Yi Baiti"/>
-        <a:font script="Tibt" typeface="Microsoft Himalaya"/>
-        <a:font script="Thaa" typeface="MV Boli"/>
-        <a:font script="Deva" typeface="Mangal"/>
-        <a:font script="Telu" typeface="Gautami"/>
-        <a:font script="Taml" typeface="Latha"/>
-        <a:font script="Syrc" typeface="Estrangelo Edessa"/>
-        <a:font script="Orya" typeface="Kalinga"/>
-        <a:font script="Mlym" typeface="Kartika"/>
-        <a:font script="Laoo" typeface="DokChampa"/>
-        <a:font script="Sinh" typeface="Iskoola Pota"/>
-        <a:font script="Mong" typeface="Mongolian Baiti"/>
-        <a:font script="Viet" typeface="Arial"/>
-        <a:font script="Uigh" typeface="Microsoft Uighur"/>
-        <a:font script="Geor" typeface="Sylfaen"/>
-        <a:font script="Armn" typeface="Arial"/>
-        <a:font script="Bugi" typeface="Leelawadee UI"/>
-        <a:font script="Bopo" typeface="Microsoft JhengHei"/>
-        <a:font script="Java" typeface="Javanese Text"/>
-        <a:font script="Lisu" typeface="Segoe UI"/>
-        <a:font script="Mymr" typeface="Myanmar Text"/>
-        <a:font script="Nkoo" typeface="Ebrima"/>
-        <a:font script="Olck" typeface="Nirmala UI"/>
-        <a:font script="Osma" typeface="Ebrima"/>
-        <a:font script="Phag" typeface="Phagspa"/>
-        <a:font script="Syrn" typeface="Estrangelo Edessa"/>
-        <a:font script="Syrj" typeface="Estrangelo Edessa"/>
-        <a:font script="Syre" typeface="Estrangelo Edessa"/>
-        <a:font script="Sora" typeface="Nirmala UI"/>
-        <a:font script="Tale" typeface="Microsoft Tai Le"/>
-        <a:font script="Talu" typeface="Microsoft New Tai Lue"/>
-        <a:font script="Tfng" typeface="Ebrima"/>
-      </a:minorFont>
-    </a:fontScheme>
-    <a:fmtScheme name="Office">
-      <a:fillStyleLst>
-        <a:solidFill>
-          <a:schemeClr val="phClr"/>
-        </a:solidFill>
-        <a:gradFill rotWithShape="1">
-          <a:gsLst>
-            <a:gs pos="0">
-              <a:schemeClr val="phClr">
-                <a:lumMod val="110000"/>
-                <a:satMod val="105000"/>
-                <a:tint val="67000"/>
-              </a:schemeClr>
-            </a:gs>
-            <a:gs pos="50000">
-              <a:schemeClr val="phClr">
-                <a:lumMod val="105000"/>
-                <a:satMod val="103000"/>
-                <a:tint val="73000"/>
-              </a:schemeClr>
-            </a:gs>
-            <a:gs pos="100000">
-              <a:schemeClr val="phClr">
-                <a:lumMod val="105000"/>
-                <a:satMod val="109000"/>
-                <a:tint val="81000"/>
-              </a:schemeClr>
-            </a:gs>
-          </a:gsLst>
-          <a:lin ang="5400000" scaled="0"/>
-        </a:gradFill>
-        <a:gradFill rotWithShape="1">
-          <a:gsLst>
-            <a:gs pos="0">
-              <a:schemeClr val="phClr">
-                <a:satMod val="103000"/>
-                <a:lumMod val="102000"/>
-                <a:tint val="94000"/>
-              </a:schemeClr>
-            </a:gs>
-            <a:gs pos="50000">
-              <a:schemeClr val="phClr">
-                <a:satMod val="110000"/>
-                <a:lumMod val="100000"/>
-                <a:shade val="100000"/>
-              </a:schemeClr>
-            </a:gs>
-            <a:gs pos="100000">
-              <a:schemeClr val="phClr">
-                <a:lumMod val="99000"/>
-                <a:satMod val="120000"/>
-                <a:shade val="78000"/>
-              </a:schemeClr>
-            </a:gs>
-          </a:gsLst>
-          <a:lin ang="5400000" scaled="0"/>
-        </a:gradFill>
-      </a:fillStyleLst>
-      <a:lnStyleLst>
-        <a:ln w="12700" cap="flat" cmpd="sng" algn="ctr">
-          <a:solidFill>
-            <a:schemeClr val="phClr"/>
-          </a:solidFill>
-          <a:prstDash val="solid"/>
-          <a:miter lim="800000"/>
-        </a:ln>
-        <a:ln w="19050" cap="flat" cmpd="sng" algn="ctr">
-          <a:solidFill>
-            <a:schemeClr val="phClr"/>
-          </a:solidFill>
-          <a:prstDash val="solid"/>
-          <a:miter lim="800000"/>
-        </a:ln>
-        <a:ln w="25400" cap="flat" cmpd="sng" algn="ctr">
-          <a:solidFill>
-            <a:schemeClr val="phClr"/>
-          </a:solidFill>
-          <a:prstDash val="solid"/>
-          <a:miter lim="800000"/>
-        </a:ln>
-      </a:lnStyleLst>
-      <a:effectStyleLst>
-        <a:effectStyle>
-          <a:effectLst/>
-        </a:effectStyle>
-        <a:effectStyle>
-          <a:effectLst/>
-        </a:effectStyle>
-        <a:effectStyle>
-          <a:effectLst>
-            <a:outerShdw blurRad="57150" dist="19050" dir="5400000" algn="ctr" rotWithShape="0">
-              <a:srgbClr val="000000">
-                <a:alpha val="63000"/>
-              </a:srgbClr>
-            </a:outerShdw>
-          </a:effectLst>
-        </a:effectStyle>
-      </a:effectStyleLst>
-      <a:bgFillStyleLst>
-        <a:solidFill>
-          <a:schemeClr val="phClr"/>
-        </a:solidFill>
-        <a:solidFill>
-          <a:schemeClr val="phClr">
-            <a:tint val="95000"/>
-            <a:satMod val="170000"/>
-          </a:schemeClr>
-        </a:solidFill>
-        <a:gradFill rotWithShape="1">
-          <a:gsLst>
-            <a:gs pos="0">
-              <a:schemeClr val="phClr">
-                <a:tint val="93000"/>
-                <a:satMod val="150000"/>
-                <a:shade val="98000"/>
-                <a:lumMod val="102000"/>
-              </a:schemeClr>
-            </a:gs>
-            <a:gs pos="50000">
-              <a:schemeClr val="phClr">
-                <a:tint val="98000"/>
-                <a:satMod val="130000"/>
-                <a:shade val="90000"/>
-                <a:lumMod val="103000"/>
-              </a:schemeClr>
-            </a:gs>
-            <a:gs pos="100000">
-              <a:schemeClr val="phClr">
-                <a:shade val="63000"/>
-                <a:satMod val="120000"/>
-              </a:schemeClr>
-            </a:gs>
-          </a:gsLst>
-          <a:lin ang="5400000" scaled="0"/>
-        </a:gradFill>
-      </a:bgFillStyleLst>
-    </a:fmtScheme>
-  </a:themeElements>
-  <a:objectDefaults>
-    <a:lnDef>
-      <a:spPr/>
-      <a:bodyPr/>
-      <a:lstStyle/>
-      <a:style>
-        <a:lnRef idx="2">
-          <a:schemeClr val="accent1"/>
-        </a:lnRef>
-        <a:fillRef idx="0">
-          <a:schemeClr val="accent1"/>
-        </a:fillRef>
-        <a:effectRef idx="1">
-          <a:schemeClr val="accent1"/>
-        </a:effectRef>
-        <a:fontRef idx="minor">
-          <a:schemeClr val="tx1"/>
-        </a:fontRef>
-      </a:style>
-    </a:lnDef>
-  </a:objectDefaults>
-  <a:extraClrSchemeLst/>
-  <a:extLst>
-    <a:ext uri="{05A4C25C-085E-4340-85A3-A5531E510DB2}">
-      <thm15:themeFamily xmlns:thm15="http://schemas.microsoft.com/office/thememl/2012/main" name="Office Theme" id="{2E142A2C-CD16-42D6-873A-C26D2A0506FA}" vid="{1BDDFF52-6CD6-40A5-AB3C-68EB2F1E4D0A}"/>
-    </a:ext>
-  </a:extLst>
-</a:theme>
 </file>